--- a/courses/ooad/sessions/s08.pptx
+++ b/courses/ooad/sessions/s08.pptx
@@ -433,7 +433,7 @@
   </p:cSld>
   <p:clrMap bg1="lt1" tx1="dk1" bg2="lt2" tx2="dk2" accent1="accent1" accent2="accent2" accent3="accent3" accent4="accent4" accent5="accent5" accent6="accent6" hlink="hlink" folHlink="folHlink"/>
   <p:notesStyle>
-    <a:lvl1pPr marL="0" algn="l" defTabSz="914400" rtl="0" eaLnBrk="1" latinLnBrk="1" hangingPunct="1">
+    <a:lvl1pPr marL="0" algn="l" defTabSz="914400" rtl="0" eaLnBrk="1" latinLnBrk="0" hangingPunct="1">
       <a:defRPr sz="1200" kern="1200">
         <a:solidFill>
           <a:schemeClr val="tx1"/>
@@ -443,7 +443,7 @@
         <a:cs typeface="+mn-cs"/>
       </a:defRPr>
     </a:lvl1pPr>
-    <a:lvl2pPr marL="457200" algn="l" defTabSz="914400" rtl="0" eaLnBrk="1" latinLnBrk="1" hangingPunct="1">
+    <a:lvl2pPr marL="457200" algn="l" defTabSz="914400" rtl="0" eaLnBrk="1" latinLnBrk="0" hangingPunct="1">
       <a:defRPr sz="1200" kern="1200">
         <a:solidFill>
           <a:schemeClr val="tx1"/>
@@ -453,7 +453,7 @@
         <a:cs typeface="+mn-cs"/>
       </a:defRPr>
     </a:lvl2pPr>
-    <a:lvl3pPr marL="914400" algn="l" defTabSz="914400" rtl="0" eaLnBrk="1" latinLnBrk="1" hangingPunct="1">
+    <a:lvl3pPr marL="914400" algn="l" defTabSz="914400" rtl="0" eaLnBrk="1" latinLnBrk="0" hangingPunct="1">
       <a:defRPr sz="1200" kern="1200">
         <a:solidFill>
           <a:schemeClr val="tx1"/>
@@ -463,7 +463,7 @@
         <a:cs typeface="+mn-cs"/>
       </a:defRPr>
     </a:lvl3pPr>
-    <a:lvl4pPr marL="1371600" algn="l" defTabSz="914400" rtl="0" eaLnBrk="1" latinLnBrk="1" hangingPunct="1">
+    <a:lvl4pPr marL="1371600" algn="l" defTabSz="914400" rtl="0" eaLnBrk="1" latinLnBrk="0" hangingPunct="1">
       <a:defRPr sz="1200" kern="1200">
         <a:solidFill>
           <a:schemeClr val="tx1"/>
@@ -473,7 +473,7 @@
         <a:cs typeface="+mn-cs"/>
       </a:defRPr>
     </a:lvl4pPr>
-    <a:lvl5pPr marL="1828800" algn="l" defTabSz="914400" rtl="0" eaLnBrk="1" latinLnBrk="1" hangingPunct="1">
+    <a:lvl5pPr marL="1828800" algn="l" defTabSz="914400" rtl="0" eaLnBrk="1" latinLnBrk="0" hangingPunct="1">
       <a:defRPr sz="1200" kern="1200">
         <a:solidFill>
           <a:schemeClr val="tx1"/>
@@ -483,7 +483,7 @@
         <a:cs typeface="+mn-cs"/>
       </a:defRPr>
     </a:lvl5pPr>
-    <a:lvl6pPr marL="2286000" algn="l" defTabSz="914400" rtl="0" eaLnBrk="1" latinLnBrk="1" hangingPunct="1">
+    <a:lvl6pPr marL="2286000" algn="l" defTabSz="914400" rtl="0" eaLnBrk="1" latinLnBrk="0" hangingPunct="1">
       <a:defRPr sz="1200" kern="1200">
         <a:solidFill>
           <a:schemeClr val="tx1"/>
@@ -493,7 +493,7 @@
         <a:cs typeface="+mn-cs"/>
       </a:defRPr>
     </a:lvl6pPr>
-    <a:lvl7pPr marL="2743200" algn="l" defTabSz="914400" rtl="0" eaLnBrk="1" latinLnBrk="1" hangingPunct="1">
+    <a:lvl7pPr marL="2743200" algn="l" defTabSz="914400" rtl="0" eaLnBrk="1" latinLnBrk="0" hangingPunct="1">
       <a:defRPr sz="1200" kern="1200">
         <a:solidFill>
           <a:schemeClr val="tx1"/>
@@ -503,7 +503,7 @@
         <a:cs typeface="+mn-cs"/>
       </a:defRPr>
     </a:lvl7pPr>
-    <a:lvl8pPr marL="3200400" algn="l" defTabSz="914400" rtl="0" eaLnBrk="1" latinLnBrk="1" hangingPunct="1">
+    <a:lvl8pPr marL="3200400" algn="l" defTabSz="914400" rtl="0" eaLnBrk="1" latinLnBrk="0" hangingPunct="1">
       <a:defRPr sz="1200" kern="1200">
         <a:solidFill>
           <a:schemeClr val="tx1"/>
@@ -513,7 +513,7 @@
         <a:cs typeface="+mn-cs"/>
       </a:defRPr>
     </a:lvl8pPr>
-    <a:lvl9pPr marL="3657600" algn="l" defTabSz="914400" rtl="0" eaLnBrk="1" latinLnBrk="1" hangingPunct="1">
+    <a:lvl9pPr marL="3657600" algn="l" defTabSz="914400" rtl="0" eaLnBrk="1" latinLnBrk="0" hangingPunct="1">
       <a:defRPr sz="1200" kern="1200">
         <a:solidFill>
           <a:schemeClr val="tx1"/>
@@ -718,7 +718,7 @@
             <a:pPr lvl="0"/>
             <a:r>
               <a:rPr lang="ko-KR" sz="1200"/>
-              <a:t>결제 쪽 PaymentSystem은 이미 있는 약속이다(연동·가짜 구현). 결제 대행사가 늘어난다는 추측만으로 대행사 선택 구조까지 만들지는 않는다.</a:t>
+              <a:t>결제 쪽 PaymentGateway은 이미 있는 약속이다(연동·가짜 구현). 결제 대행사가 늘어난다는 추측만으로 대행사 선택 구조까지 만들지는 않는다.</a:t>
             </a:r>
           </a:p>
         </p:txBody>
@@ -990,7 +990,7 @@
             <a:pPr lvl="0"/>
             <a:r>
               <a:rPr lang="ko-KR" sz="1200"/>
-              <a:t>정보 은닉은 "07. 책임·협력·계약"의 「13. 정보 은닉」, Parnas의 원래 뜻은 "05. 구조적 경계와 의존성"의 「12. 변경 이유」에서 다뤘다.</a:t>
+              <a:t>정보 은닉은 "07. 책임·협력·계약"의 「13. 정보 은닉」, Parnas의 원래 뜻은 "05. 구조적 경계와 의존성"의 「08. 패키지 기준」에서 다뤘다.</a:t>
             </a:r>
           </a:p>
         </p:txBody>
@@ -3274,7 +3274,7 @@
             <a:pPr lvl="0"/>
             <a:r>
               <a:rPr lang="ko-KR" sz="1200"/>
-              <a:t>결제 전 취소는 "04. 동적 모델 — 상호작용과 상태"의 「35. 가드와 금지된 전이」와 "05. 구조적 경계와 의존성"의 「31. 변경 파급」에서 미정으로 남겼다. 이 세션은 "결제 대기 → 취소됨, 외부 요청 없음"으로 정해졌다고 가정한다.</a:t>
+              <a:t>결제 전 취소는 "04. 동적 모델 — 상호작용과 상태"의 「35. 가드와 금지된 전이」와 "05. 구조적 경계와 의존성"의 「17. 변경 파급」에서 미정으로 남겼다. 이 세션은 "결제 대기 → 취소됨, 외부 요청 없음"으로 정해졌다고 가정한다.</a:t>
             </a:r>
           </a:p>
           <a:p>
@@ -3349,7 +3349,7 @@
             <a:pPr lvl="0"/>
             <a:r>
               <a:rPr lang="ko-KR" sz="1200"/>
-              <a:t>"05. 구조적 경계와 의존성"의 「31. 변경 파급」은 패키지 수준이었다. 이 세션은 클래스·계약 수준이다.</a:t>
+              <a:t>"05. 구조적 경계와 의존성"의 「17. 변경 파급」은 패키지 수준이었다. 이 세션은 클래스·계약 수준이다.</a:t>
             </a:r>
           </a:p>
         </p:txBody>
@@ -4156,7 +4156,7 @@
   <p:hf hdr="0" ftr="0" dt="0"/>
   <p:txStyles>
     <p:titleStyle>
-      <a:lvl1pPr algn="l" rtl="0" eaLnBrk="0" fontAlgn="base" latinLnBrk="1" hangingPunct="0">
+      <a:lvl1pPr algn="l" rtl="0" eaLnBrk="0" fontAlgn="base" latinLnBrk="0" hangingPunct="0">
         <a:spcBef>
           <a:spcPct val="0"/>
         </a:spcBef>
@@ -4172,7 +4172,7 @@
           <a:cs typeface="+mj-cs"/>
         </a:defRPr>
       </a:lvl1pPr>
-      <a:lvl2pPr algn="l" rtl="0" eaLnBrk="0" fontAlgn="base" latinLnBrk="1" hangingPunct="0">
+      <a:lvl2pPr algn="l" rtl="0" eaLnBrk="0" fontAlgn="base" latinLnBrk="0" hangingPunct="0">
         <a:spcBef>
           <a:spcPct val="0"/>
         </a:spcBef>
@@ -4187,7 +4187,7 @@
           <a:ea typeface="맑은 고딕" pitchFamily="50" charset="-127"/>
         </a:defRPr>
       </a:lvl2pPr>
-      <a:lvl3pPr algn="l" rtl="0" eaLnBrk="0" fontAlgn="base" latinLnBrk="1" hangingPunct="0">
+      <a:lvl3pPr algn="l" rtl="0" eaLnBrk="0" fontAlgn="base" latinLnBrk="0" hangingPunct="0">
         <a:spcBef>
           <a:spcPct val="0"/>
         </a:spcBef>
@@ -4202,7 +4202,7 @@
           <a:ea typeface="맑은 고딕" pitchFamily="50" charset="-127"/>
         </a:defRPr>
       </a:lvl3pPr>
-      <a:lvl4pPr algn="l" rtl="0" eaLnBrk="0" fontAlgn="base" latinLnBrk="1" hangingPunct="0">
+      <a:lvl4pPr algn="l" rtl="0" eaLnBrk="0" fontAlgn="base" latinLnBrk="0" hangingPunct="0">
         <a:spcBef>
           <a:spcPct val="0"/>
         </a:spcBef>
@@ -4217,7 +4217,7 @@
           <a:ea typeface="맑은 고딕" pitchFamily="50" charset="-127"/>
         </a:defRPr>
       </a:lvl4pPr>
-      <a:lvl5pPr algn="l" rtl="0" eaLnBrk="0" fontAlgn="base" latinLnBrk="1" hangingPunct="0">
+      <a:lvl5pPr algn="l" rtl="0" eaLnBrk="0" fontAlgn="base" latinLnBrk="0" hangingPunct="0">
         <a:spcBef>
           <a:spcPct val="0"/>
         </a:spcBef>
@@ -4232,7 +4232,7 @@
           <a:ea typeface="맑은 고딕" pitchFamily="50" charset="-127"/>
         </a:defRPr>
       </a:lvl5pPr>
-      <a:lvl6pPr marL="457200" algn="ctr" rtl="0" fontAlgn="base" latinLnBrk="1">
+      <a:lvl6pPr marL="457200" algn="ctr" rtl="0" fontAlgn="base" latinLnBrk="0">
         <a:spcBef>
           <a:spcPct val="0"/>
         </a:spcBef>
@@ -4247,7 +4247,7 @@
           <a:ea typeface="맑은 고딕" pitchFamily="50" charset="-127"/>
         </a:defRPr>
       </a:lvl6pPr>
-      <a:lvl7pPr marL="914400" algn="ctr" rtl="0" fontAlgn="base" latinLnBrk="1">
+      <a:lvl7pPr marL="914400" algn="ctr" rtl="0" fontAlgn="base" latinLnBrk="0">
         <a:spcBef>
           <a:spcPct val="0"/>
         </a:spcBef>
@@ -4262,7 +4262,7 @@
           <a:ea typeface="맑은 고딕" pitchFamily="50" charset="-127"/>
         </a:defRPr>
       </a:lvl7pPr>
-      <a:lvl8pPr marL="1371600" algn="ctr" rtl="0" fontAlgn="base" latinLnBrk="1">
+      <a:lvl8pPr marL="1371600" algn="ctr" rtl="0" fontAlgn="base" latinLnBrk="0">
         <a:spcBef>
           <a:spcPct val="0"/>
         </a:spcBef>
@@ -4277,7 +4277,7 @@
           <a:ea typeface="맑은 고딕" pitchFamily="50" charset="-127"/>
         </a:defRPr>
       </a:lvl8pPr>
-      <a:lvl9pPr marL="1828800" algn="ctr" rtl="0" fontAlgn="base" latinLnBrk="1">
+      <a:lvl9pPr marL="1828800" algn="ctr" rtl="0" fontAlgn="base" latinLnBrk="0">
         <a:spcBef>
           <a:spcPct val="0"/>
         </a:spcBef>
@@ -4294,7 +4294,7 @@
       </a:lvl9pPr>
     </p:titleStyle>
     <p:bodyStyle>
-      <a:lvl1pPr marL="342900" indent="-342900" algn="l" rtl="0" eaLnBrk="0" fontAlgn="base" latinLnBrk="1" hangingPunct="0">
+      <a:lvl1pPr marL="342900" indent="-342900" algn="l" rtl="0" eaLnBrk="0" fontAlgn="base" latinLnBrk="0" hangingPunct="0">
         <a:spcBef>
           <a:spcPct val="20000"/>
         </a:spcBef>
@@ -4312,7 +4312,7 @@
           <a:cs typeface="+mn-cs"/>
         </a:defRPr>
       </a:lvl1pPr>
-      <a:lvl2pPr marL="742950" indent="-285750" algn="l" rtl="0" eaLnBrk="0" fontAlgn="base" latinLnBrk="1" hangingPunct="0">
+      <a:lvl2pPr marL="742950" indent="-285750" algn="l" rtl="0" eaLnBrk="0" fontAlgn="base" latinLnBrk="0" hangingPunct="0">
         <a:spcBef>
           <a:spcPct val="20000"/>
         </a:spcBef>
@@ -4330,7 +4330,7 @@
           <a:cs typeface="+mn-cs"/>
         </a:defRPr>
       </a:lvl2pPr>
-      <a:lvl3pPr marL="1143000" indent="-228600" algn="l" rtl="0" eaLnBrk="0" fontAlgn="base" latinLnBrk="1" hangingPunct="0">
+      <a:lvl3pPr marL="1143000" indent="-228600" algn="l" rtl="0" eaLnBrk="0" fontAlgn="base" latinLnBrk="0" hangingPunct="0">
         <a:spcBef>
           <a:spcPct val="20000"/>
         </a:spcBef>
@@ -4348,7 +4348,7 @@
           <a:cs typeface="+mn-cs"/>
         </a:defRPr>
       </a:lvl3pPr>
-      <a:lvl4pPr marL="1600200" indent="-228600" algn="l" rtl="0" eaLnBrk="0" fontAlgn="base" latinLnBrk="1" hangingPunct="0">
+      <a:lvl4pPr marL="1600200" indent="-228600" algn="l" rtl="0" eaLnBrk="0" fontAlgn="base" latinLnBrk="0" hangingPunct="0">
         <a:spcBef>
           <a:spcPct val="20000"/>
         </a:spcBef>
@@ -4366,7 +4366,7 @@
           <a:cs typeface="+mn-cs"/>
         </a:defRPr>
       </a:lvl4pPr>
-      <a:lvl5pPr marL="2057400" indent="-228600" algn="l" rtl="0" eaLnBrk="0" fontAlgn="base" latinLnBrk="1" hangingPunct="0">
+      <a:lvl5pPr marL="2057400" indent="-228600" algn="l" rtl="0" eaLnBrk="0" fontAlgn="base" latinLnBrk="0" hangingPunct="0">
         <a:spcBef>
           <a:spcPct val="20000"/>
         </a:spcBef>
@@ -4384,7 +4384,7 @@
           <a:cs typeface="+mn-cs"/>
         </a:defRPr>
       </a:lvl5pPr>
-      <a:lvl6pPr marL="2514600" indent="-228600" algn="l" defTabSz="914400" rtl="0" eaLnBrk="1" latinLnBrk="1" hangingPunct="1">
+      <a:lvl6pPr marL="2514600" indent="-228600" algn="l" defTabSz="914400" rtl="0" eaLnBrk="1" latinLnBrk="0" hangingPunct="1">
         <a:spcBef>
           <a:spcPct val="20000"/>
         </a:spcBef>
@@ -4399,7 +4399,7 @@
           <a:cs typeface="+mn-cs"/>
         </a:defRPr>
       </a:lvl6pPr>
-      <a:lvl7pPr marL="2971800" indent="-228600" algn="l" defTabSz="914400" rtl="0" eaLnBrk="1" latinLnBrk="1" hangingPunct="1">
+      <a:lvl7pPr marL="2971800" indent="-228600" algn="l" defTabSz="914400" rtl="0" eaLnBrk="1" latinLnBrk="0" hangingPunct="1">
         <a:spcBef>
           <a:spcPct val="20000"/>
         </a:spcBef>
@@ -4414,7 +4414,7 @@
           <a:cs typeface="+mn-cs"/>
         </a:defRPr>
       </a:lvl7pPr>
-      <a:lvl8pPr marL="3429000" indent="-228600" algn="l" defTabSz="914400" rtl="0" eaLnBrk="1" latinLnBrk="1" hangingPunct="1">
+      <a:lvl8pPr marL="3429000" indent="-228600" algn="l" defTabSz="914400" rtl="0" eaLnBrk="1" latinLnBrk="0" hangingPunct="1">
         <a:spcBef>
           <a:spcPct val="20000"/>
         </a:spcBef>
@@ -4429,7 +4429,7 @@
           <a:cs typeface="+mn-cs"/>
         </a:defRPr>
       </a:lvl8pPr>
-      <a:lvl9pPr marL="3886200" indent="-228600" algn="l" defTabSz="914400" rtl="0" eaLnBrk="1" latinLnBrk="1" hangingPunct="1">
+      <a:lvl9pPr marL="3886200" indent="-228600" algn="l" defTabSz="914400" rtl="0" eaLnBrk="1" latinLnBrk="0" hangingPunct="1">
         <a:spcBef>
           <a:spcPct val="20000"/>
         </a:spcBef>
@@ -4449,7 +4449,7 @@
       <a:defPPr>
         <a:defRPr lang="ko-KR"/>
       </a:defPPr>
-      <a:lvl1pPr marL="0" algn="l" defTabSz="914400" rtl="0" eaLnBrk="1" latinLnBrk="1" hangingPunct="1">
+      <a:lvl1pPr marL="0" algn="l" defTabSz="914400" rtl="0" eaLnBrk="1" latinLnBrk="0" hangingPunct="1">
         <a:defRPr sz="1800" kern="1200">
           <a:solidFill>
             <a:schemeClr val="tx1"/>
@@ -4459,7 +4459,7 @@
           <a:cs typeface="+mn-cs"/>
         </a:defRPr>
       </a:lvl1pPr>
-      <a:lvl2pPr marL="457200" algn="l" defTabSz="914400" rtl="0" eaLnBrk="1" latinLnBrk="1" hangingPunct="1">
+      <a:lvl2pPr marL="457200" algn="l" defTabSz="914400" rtl="0" eaLnBrk="1" latinLnBrk="0" hangingPunct="1">
         <a:defRPr sz="1800" kern="1200">
           <a:solidFill>
             <a:schemeClr val="tx1"/>
@@ -4469,7 +4469,7 @@
           <a:cs typeface="+mn-cs"/>
         </a:defRPr>
       </a:lvl2pPr>
-      <a:lvl3pPr marL="914400" algn="l" defTabSz="914400" rtl="0" eaLnBrk="1" latinLnBrk="1" hangingPunct="1">
+      <a:lvl3pPr marL="914400" algn="l" defTabSz="914400" rtl="0" eaLnBrk="1" latinLnBrk="0" hangingPunct="1">
         <a:defRPr sz="1800" kern="1200">
           <a:solidFill>
             <a:schemeClr val="tx1"/>
@@ -4479,7 +4479,7 @@
           <a:cs typeface="+mn-cs"/>
         </a:defRPr>
       </a:lvl3pPr>
-      <a:lvl4pPr marL="1371600" algn="l" defTabSz="914400" rtl="0" eaLnBrk="1" latinLnBrk="1" hangingPunct="1">
+      <a:lvl4pPr marL="1371600" algn="l" defTabSz="914400" rtl="0" eaLnBrk="1" latinLnBrk="0" hangingPunct="1">
         <a:defRPr sz="1800" kern="1200">
           <a:solidFill>
             <a:schemeClr val="tx1"/>
@@ -4489,7 +4489,7 @@
           <a:cs typeface="+mn-cs"/>
         </a:defRPr>
       </a:lvl4pPr>
-      <a:lvl5pPr marL="1828800" algn="l" defTabSz="914400" rtl="0" eaLnBrk="1" latinLnBrk="1" hangingPunct="1">
+      <a:lvl5pPr marL="1828800" algn="l" defTabSz="914400" rtl="0" eaLnBrk="1" latinLnBrk="0" hangingPunct="1">
         <a:defRPr sz="1800" kern="1200">
           <a:solidFill>
             <a:schemeClr val="tx1"/>
@@ -4499,7 +4499,7 @@
           <a:cs typeface="+mn-cs"/>
         </a:defRPr>
       </a:lvl5pPr>
-      <a:lvl6pPr marL="2286000" algn="l" defTabSz="914400" rtl="0" eaLnBrk="1" latinLnBrk="1" hangingPunct="1">
+      <a:lvl6pPr marL="2286000" algn="l" defTabSz="914400" rtl="0" eaLnBrk="1" latinLnBrk="0" hangingPunct="1">
         <a:defRPr sz="1800" kern="1200">
           <a:solidFill>
             <a:schemeClr val="tx1"/>
@@ -4509,7 +4509,7 @@
           <a:cs typeface="+mn-cs"/>
         </a:defRPr>
       </a:lvl6pPr>
-      <a:lvl7pPr marL="2743200" algn="l" defTabSz="914400" rtl="0" eaLnBrk="1" latinLnBrk="1" hangingPunct="1">
+      <a:lvl7pPr marL="2743200" algn="l" defTabSz="914400" rtl="0" eaLnBrk="1" latinLnBrk="0" hangingPunct="1">
         <a:defRPr sz="1800" kern="1200">
           <a:solidFill>
             <a:schemeClr val="tx1"/>
@@ -4519,7 +4519,7 @@
           <a:cs typeface="+mn-cs"/>
         </a:defRPr>
       </a:lvl7pPr>
-      <a:lvl8pPr marL="3200400" algn="l" defTabSz="914400" rtl="0" eaLnBrk="1" latinLnBrk="1" hangingPunct="1">
+      <a:lvl8pPr marL="3200400" algn="l" defTabSz="914400" rtl="0" eaLnBrk="1" latinLnBrk="0" hangingPunct="1">
         <a:defRPr sz="1800" kern="1200">
           <a:solidFill>
             <a:schemeClr val="tx1"/>
@@ -4529,7 +4529,7 @@
           <a:cs typeface="+mn-cs"/>
         </a:defRPr>
       </a:lvl8pPr>
-      <a:lvl9pPr marL="3657600" algn="l" defTabSz="914400" rtl="0" eaLnBrk="1" latinLnBrk="1" hangingPunct="1">
+      <a:lvl9pPr marL="3657600" algn="l" defTabSz="914400" rtl="0" eaLnBrk="1" latinLnBrk="0" hangingPunct="1">
         <a:defRPr sz="1800" kern="1200">
           <a:solidFill>
             <a:schemeClr val="tx1"/>
@@ -5981,7 +5981,7 @@
                           <a:ea typeface="맑은 고딕" panose="020B0503020000020004" pitchFamily="34" charset="-127"/>
                           <a:cs typeface="맑은 고딕"/>
                         </a:rPr>
-                        <a:t>DeliverySystem</a:t>
+                        <a:t>DeliveryGateway</a:t>
                       </a:r>
                     </a:p>
                   </a:txBody>
@@ -6713,7 +6713,7 @@
                 <a:latin typeface="맑은 고딕"/>
                 <a:ea typeface="맑은 고딕"/>
               </a:rPr>
-              <a:t>DeliverySystem</a:t>
+              <a:t>DeliveryGateway</a:t>
             </a:r>
             <a:r>
               <a:rPr sz="1800" b="0">
@@ -7064,15 +7064,15 @@
           </p:nvPr>
         </p:nvGraphicFramePr>
         <p:xfrm>
-          <a:off x="1273365" y="1842998"/>
-          <a:ext cx="6583680" cy="3873500"/>
+          <a:off x="1231456" y="1842998"/>
+          <a:ext cx="6667500" cy="3873500"/>
         </p:xfrm>
         <a:graphic>
           <a:graphicData uri="http://schemas.openxmlformats.org/drawingml/2006/table">
             <a:tbl>
               <a:tblPr/>
               <a:tblGrid>
-                <a:gridCol w="1478280"/>
+                <a:gridCol w="1562100"/>
                 <a:gridCol w="889000"/>
                 <a:gridCol w="4216400"/>
               </a:tblGrid>
@@ -7803,7 +7803,7 @@
                           <a:ea typeface="맑은 고딕" panose="020B0503020000020004" pitchFamily="34" charset="-127"/>
                           <a:cs typeface="맑은 고딕"/>
                         </a:rPr>
-                        <a:t>DeliverySystem</a:t>
+                        <a:t>DeliveryGateway</a:t>
                       </a:r>
                     </a:p>
                   </a:txBody>
@@ -9264,7 +9264,7 @@
                 <a:latin typeface="맑은 고딕"/>
                 <a:ea typeface="맑은 고딕"/>
               </a:rPr>
-              <a:t>Craig Larman, 2004</a:t>
+              <a:t>[Larman 2004]</a:t>
             </a:r>
           </a:p>
           <a:p>
@@ -9347,7 +9347,7 @@
                 <a:latin typeface="맑은 고딕"/>
                 <a:ea typeface="맑은 고딕"/>
               </a:rPr>
-              <a:t>Craig Larman, 2004</a:t>
+              <a:t>[Larman 2004]</a:t>
             </a:r>
           </a:p>
         </p:txBody>
@@ -9586,8 +9586,8 @@
           </p:nvPr>
         </p:nvGraphicFramePr>
         <p:xfrm>
-          <a:off x="1579436" y="1842998"/>
-          <a:ext cx="5971540" cy="3873500"/>
+          <a:off x="1537526" y="1842998"/>
+          <a:ext cx="6055360" cy="3873500"/>
         </p:xfrm>
         <a:graphic>
           <a:graphicData uri="http://schemas.openxmlformats.org/drawingml/2006/table">
@@ -9595,7 +9595,7 @@
               <a:tblPr/>
               <a:tblGrid>
                 <a:gridCol w="2679700"/>
-                <a:gridCol w="1478280"/>
+                <a:gridCol w="1562100"/>
                 <a:gridCol w="1813560"/>
               </a:tblGrid>
               <a:tr h="288000">
@@ -10043,7 +10043,7 @@
                           <a:ea typeface="맑은 고딕" panose="020B0503020000020004" pitchFamily="34" charset="-127"/>
                           <a:cs typeface="맑은 고딕"/>
                         </a:rPr>
-                        <a:t>DeliverySystem</a:t>
+                        <a:t>DeliveryGateway</a:t>
                       </a:r>
                     </a:p>
                   </a:txBody>
@@ -10874,8 +10874,8 @@
           </p:nvPr>
         </p:nvGraphicFramePr>
         <p:xfrm>
-          <a:off x="1105726" y="1842998"/>
-          <a:ext cx="6918960" cy="3873500"/>
+          <a:off x="1063816" y="1842998"/>
+          <a:ext cx="7002780" cy="3873500"/>
         </p:xfrm>
         <a:graphic>
           <a:graphicData uri="http://schemas.openxmlformats.org/drawingml/2006/table">
@@ -10885,7 +10885,7 @@
                 <a:gridCol w="1087120"/>
                 <a:gridCol w="1981200"/>
                 <a:gridCol w="2372360"/>
-                <a:gridCol w="1478280"/>
+                <a:gridCol w="1562100"/>
               </a:tblGrid>
               <a:tr h="288000">
                 <a:tc>
@@ -11346,7 +11346,7 @@
                           <a:ea typeface="맑은 고딕" panose="020B0503020000020004" pitchFamily="34" charset="-127"/>
                           <a:cs typeface="맑은 고딕"/>
                         </a:rPr>
-                        <a:t>DeliverySystem</a:t>
+                        <a:t>DeliveryGateway</a:t>
                       </a:r>
                     </a:p>
                   </a:txBody>
@@ -12714,7 +12714,7 @@
                 <a:latin typeface="맑은 고딕"/>
                 <a:ea typeface="맑은 고딕"/>
               </a:rPr>
-              <a:t>Robert C. Martin, 2000</a:t>
+              <a:t>[Martin 2000]</a:t>
             </a:r>
           </a:p>
           <a:p>
@@ -13034,8 +13034,8 @@
           </p:nvPr>
         </p:nvGraphicFramePr>
         <p:xfrm>
-          <a:off x="978726" y="2801048"/>
-          <a:ext cx="7172960" cy="3873500"/>
+          <a:off x="936816" y="2801048"/>
+          <a:ext cx="7256780" cy="3873500"/>
         </p:xfrm>
         <a:graphic>
           <a:graphicData uri="http://schemas.openxmlformats.org/drawingml/2006/table">
@@ -13044,7 +13044,7 @@
               <a:tblGrid>
                 <a:gridCol w="1087120"/>
                 <a:gridCol w="2819400"/>
-                <a:gridCol w="3266440"/>
+                <a:gridCol w="3350260"/>
               </a:tblGrid>
               <a:tr h="288000">
                 <a:tc>
@@ -13547,7 +13547,7 @@
                           <a:ea typeface="맑은 고딕" panose="020B0503020000020004" pitchFamily="34" charset="-127"/>
                           <a:cs typeface="맑은 고딕"/>
                         </a:rPr>
-                        <a:t>배송 대행사를 DeliverySystem으로 감싼다</a:t>
+                        <a:t>배송 대행사를 DeliveryGateway으로 감싼다</a:t>
                       </a:r>
                     </a:p>
                   </a:txBody>
@@ -13906,7 +13906,7 @@
                 <a:latin typeface="맑은 고딕"/>
                 <a:ea typeface="맑은 고딕"/>
               </a:rPr>
-              <a:t>Craig Larman, 2004</a:t>
+              <a:t>[Larman 2004]</a:t>
             </a:r>
           </a:p>
         </p:txBody>
@@ -14434,7 +14434,7 @@
                           <a:ea typeface="맑은 고딕" panose="020B0503020000020004" pitchFamily="34" charset="-127"/>
                           <a:cs typeface="맑은 고딕"/>
                         </a:rPr>
-                        <a:t>DeliverySystem</a:t>
+                        <a:t>DeliveryGateway</a:t>
                       </a:r>
                     </a:p>
                   </a:txBody>
@@ -14602,7 +14602,7 @@
                           <a:ea typeface="맑은 고딕" panose="020B0503020000020004" pitchFamily="34" charset="-127"/>
                           <a:cs typeface="맑은 고딕"/>
                         </a:rPr>
-                        <a:t>PaymentSystem</a:t>
+                        <a:t>PaymentGateway</a:t>
                       </a:r>
                     </a:p>
                   </a:txBody>
@@ -15225,7 +15225,7 @@
                 <a:latin typeface="맑은 고딕"/>
                 <a:ea typeface="맑은 고딕"/>
               </a:rPr>
-              <a:t>Craig Larman, 2004</a:t>
+              <a:t>[Larman 2004]</a:t>
             </a:r>
           </a:p>
         </p:txBody>
@@ -15631,7 +15631,7 @@
                 <a:latin typeface="맑은 고딕"/>
                 <a:ea typeface="맑은 고딕"/>
               </a:rPr>
-              <a:t>Erich Gamma, 2005</a:t>
+              <a:t>[Gamma 2005]</a:t>
             </a:r>
           </a:p>
           <a:p>
@@ -15684,7 +15684,7 @@
                 <a:latin typeface="맑은 고딕"/>
                 <a:ea typeface="맑은 고딕"/>
               </a:rPr>
-              <a:t>DeliverySystem</a:t>
+              <a:t>DeliveryGateway</a:t>
             </a:r>
             <a:r>
               <a:rPr sz="1800" b="0">
@@ -16472,7 +16472,7 @@
                 <a:latin typeface="맑은 고딕"/>
                 <a:ea typeface="맑은 고딕"/>
               </a:rPr>
-              <a:t>Craig Larman, 2004</a:t>
+              <a:t>[Larman 2004]</a:t>
             </a:r>
           </a:p>
         </p:txBody>
@@ -18047,7 +18047,7 @@
                 <a:latin typeface="맑은 고딕"/>
                 <a:ea typeface="맑은 고딕"/>
               </a:rPr>
-              <a:t>Craig Larman, 2004</a:t>
+              <a:t>[Larman 2004]</a:t>
             </a:r>
           </a:p>
         </p:txBody>
@@ -19168,7 +19168,7 @@
                 <a:latin typeface="맑은 고딕"/>
                 <a:ea typeface="맑은 고딕"/>
               </a:rPr>
-              <a:t>Erich Gamma, 2005</a:t>
+              <a:t>[Gamma 2005]</a:t>
             </a:r>
           </a:p>
         </p:txBody>
@@ -22923,7 +22923,7 @@
                 <a:latin typeface="맑은 고딕"/>
                 <a:ea typeface="맑은 고딕"/>
               </a:rPr>
-              <a:t>Kent Beck, 2012, www</a:t>
+              <a:t>[Beck 2012, 재인용]</a:t>
             </a:r>
           </a:p>
         </p:txBody>
@@ -23835,7 +23835,7 @@
                 <a:latin typeface="맑은 고딕"/>
                 <a:ea typeface="맑은 고딕"/>
               </a:rPr>
-              <a:t>Martin Fowler, 2015</a:t>
+              <a:t>[Fowler 2015a]</a:t>
             </a:r>
           </a:p>
         </p:txBody>
@@ -24956,7 +24956,7 @@
                 <a:latin typeface="맑은 고딕"/>
                 <a:ea typeface="맑은 고딕"/>
               </a:rPr>
-              <a:t>Erich Gamma et al., 1994, www</a:t>
+              <a:t>[Gamma 외 1994, 재인용]</a:t>
             </a:r>
           </a:p>
         </p:txBody>
@@ -25537,7 +25537,7 @@
                           <a:ea typeface="맑은 고딕" panose="020B0503020000020004" pitchFamily="34" charset="-127"/>
                           <a:cs typeface="맑은 고딕"/>
                         </a:rPr>
-                        <a:t>DeliverySystem</a:t>
+                        <a:t>DeliveryGateway</a:t>
                       </a:r>
                     </a:p>
                   </a:txBody>
@@ -29164,7 +29164,7 @@
                 <a:latin typeface="맑은 고딕"/>
                 <a:ea typeface="맑은 고딕"/>
               </a:rPr>
-              <a:t>DeliverySystem</a:t>
+              <a:t>DeliveryGateway</a:t>
             </a:r>
             <a:r>
               <a:rPr sz="1800" b="0">
@@ -30298,7 +30298,7 @@
                           <a:ea typeface="맑은 고딕" panose="020B0503020000020004" pitchFamily="34" charset="-127"/>
                           <a:cs typeface="맑은 고딕"/>
                         </a:rPr>
-                        <a:t>PaymentSystem 약속 하나</a:t>
+                        <a:t>PaymentGateway 약속 하나</a:t>
                       </a:r>
                     </a:p>
                   </a:txBody>
@@ -30703,7 +30703,7 @@
                 <a:latin typeface="맑은 고딕"/>
                 <a:ea typeface="맑은 고딕"/>
               </a:rPr>
-              <a:t>Craig Larman, 2004</a:t>
+              <a:t>[Larman 2004]</a:t>
             </a:r>
           </a:p>
         </p:txBody>
@@ -38852,6 +38852,27 @@
             </a:r>
           </a:p>
           <a:p>
+            <a:pPr marL="342900" indent="0">
+              <a:spcBef>
+                <a:spcPts val="600"/>
+              </a:spcBef>
+              <a:spcAft>
+                <a:spcPts val="600"/>
+              </a:spcAft>
+              <a:buNone/>
+            </a:pPr>
+            <a:r>
+              <a:rPr sz="1800" b="1">
+                <a:solidFill>
+                  <a:srgbClr val="000000"/>
+                </a:solidFill>
+                <a:latin typeface="맑은 고딕"/>
+                <a:ea typeface="맑은 고딕"/>
+              </a:rPr>
+              <a:t>변화 대응과 변이 설계의 핵심</a:t>
+            </a:r>
+          </a:p>
+          <a:p>
             <a:pPr lvl="2" marL="723900" indent="-368300">
               <a:spcBef>
                 <a:spcPts val="600"/>
@@ -38864,6 +38885,16 @@
               <a:buChar char=""/>
             </a:pPr>
             <a:r>
+              <a:rPr sz="1800" b="1">
+                <a:solidFill>
+                  <a:srgbClr val="000000"/>
+                </a:solidFill>
+                <a:latin typeface="맑은 고딕"/>
+                <a:ea typeface="맑은 고딕"/>
+              </a:rPr>
+              <a:t>판단</a:t>
+            </a:r>
+            <a:r>
               <a:rPr sz="1800" b="0">
                 <a:solidFill>
                   <a:srgbClr val="000000"/>
@@ -38871,30 +38902,7 @@
                 <a:latin typeface="맑은 고딕"/>
                 <a:ea typeface="맑은 고딕"/>
               </a:rPr>
-              <a:t>변화 대응과 변이 설계의 핵심</a:t>
-            </a:r>
-          </a:p>
-          <a:p>
-            <a:pPr lvl="3" marL="1077913" indent="-354013">
-              <a:spcBef>
-                <a:spcPts val="600"/>
-              </a:spcBef>
-              <a:spcAft>
-                <a:spcPts val="600"/>
-              </a:spcAft>
-              <a:buSzPct val="90000"/>
-              <a:buFont typeface="Wingdings" pitchFamily="2" charset="2"/>
-              <a:buChar char=""/>
-            </a:pPr>
-            <a:r>
-              <a:rPr sz="1600" b="1">
-                <a:solidFill>
-                  <a:srgbClr val="000000"/>
-                </a:solidFill>
-                <a:latin typeface="맑은 고딕"/>
-                <a:ea typeface="맑은 고딕"/>
-              </a:rPr>
-              <a:t>판단</a:t>
+              <a:t> —</a:t>
             </a:r>
             <a:r>
               <a:rPr sz="1600" b="0">
@@ -38904,232 +38912,7 @@
                 <a:latin typeface="맑은 고딕"/>
                 <a:ea typeface="맑은 고딕"/>
               </a:rPr>
-              <a:t> —</a:t>
-            </a:r>
-            <a:r>
-              <a:rPr sz="1400" b="0">
-                <a:solidFill>
-                  <a:srgbClr val="000000"/>
-                </a:solidFill>
-                <a:latin typeface="맑은 고딕"/>
-                <a:ea typeface="맑은 고딕"/>
-              </a:rPr>
               <a:t> 모든 변이가 아니라 실제 변경 압력을 국소화한다</a:t>
-            </a:r>
-          </a:p>
-          <a:p>
-            <a:pPr lvl="3" marL="1077913" indent="-354013">
-              <a:spcBef>
-                <a:spcPts val="600"/>
-              </a:spcBef>
-              <a:spcAft>
-                <a:spcPts val="600"/>
-              </a:spcAft>
-              <a:buSzPct val="90000"/>
-              <a:buFont typeface="Wingdings" pitchFamily="2" charset="2"/>
-              <a:buChar char=""/>
-            </a:pPr>
-            <a:r>
-              <a:rPr sz="1600" b="1">
-                <a:solidFill>
-                  <a:srgbClr val="000000"/>
-                </a:solidFill>
-                <a:latin typeface="맑은 고딕"/>
-                <a:ea typeface="맑은 고딕"/>
-              </a:rPr>
-              <a:t>파급</a:t>
-            </a:r>
-            <a:r>
-              <a:rPr sz="1600" b="0">
-                <a:solidFill>
-                  <a:srgbClr val="000000"/>
-                </a:solidFill>
-                <a:latin typeface="맑은 고딕"/>
-                <a:ea typeface="맑은 고딕"/>
-              </a:rPr>
-              <a:t> —</a:t>
-            </a:r>
-            <a:r>
-              <a:rPr sz="1400" b="0">
-                <a:solidFill>
-                  <a:srgbClr val="000000"/>
-                </a:solidFill>
-                <a:latin typeface="맑은 고딕"/>
-                <a:ea typeface="맑은 고딕"/>
-              </a:rPr>
-              <a:t> 바뀌는 곳과 그대로인 곳을 적어 경직성을 드러낸다</a:t>
-            </a:r>
-          </a:p>
-          <a:p>
-            <a:pPr lvl="3" marL="1077913" indent="-354013">
-              <a:spcBef>
-                <a:spcPts val="600"/>
-              </a:spcBef>
-              <a:spcAft>
-                <a:spcPts val="600"/>
-              </a:spcAft>
-              <a:buSzPct val="90000"/>
-              <a:buFont typeface="Wingdings" pitchFamily="2" charset="2"/>
-              <a:buChar char=""/>
-            </a:pPr>
-            <a:r>
-              <a:rPr sz="1600" b="1">
-                <a:solidFill>
-                  <a:srgbClr val="000000"/>
-                </a:solidFill>
-                <a:latin typeface="맑은 고딕"/>
-                <a:ea typeface="맑은 고딕"/>
-              </a:rPr>
-              <a:t>지점</a:t>
-            </a:r>
-            <a:r>
-              <a:rPr sz="1600" b="0">
-                <a:solidFill>
-                  <a:srgbClr val="000000"/>
-                </a:solidFill>
-                <a:latin typeface="맑은 고딕"/>
-                <a:ea typeface="맑은 고딕"/>
-              </a:rPr>
-              <a:t> —</a:t>
-            </a:r>
-            <a:r>
-              <a:rPr sz="1400" b="0">
-                <a:solidFill>
-                  <a:srgbClr val="000000"/>
-                </a:solidFill>
-                <a:latin typeface="맑은 고딕"/>
-                <a:ea typeface="맑은 고딕"/>
-              </a:rPr>
-              <a:t> 변이 지점은 지금 보호하고, 진화 지점은 추측으로 남긴다</a:t>
-            </a:r>
-          </a:p>
-          <a:p>
-            <a:pPr lvl="3" marL="1077913" indent="-354013">
-              <a:spcBef>
-                <a:spcPts val="600"/>
-              </a:spcBef>
-              <a:spcAft>
-                <a:spcPts val="600"/>
-              </a:spcAft>
-              <a:buSzPct val="90000"/>
-              <a:buFont typeface="Wingdings" pitchFamily="2" charset="2"/>
-              <a:buChar char=""/>
-            </a:pPr>
-            <a:r>
-              <a:rPr sz="1600" b="1">
-                <a:solidFill>
-                  <a:srgbClr val="000000"/>
-                </a:solidFill>
-                <a:latin typeface="맑은 고딕"/>
-                <a:ea typeface="맑은 고딕"/>
-              </a:rPr>
-              <a:t>원칙</a:t>
-            </a:r>
-            <a:r>
-              <a:rPr sz="1600" b="0">
-                <a:solidFill>
-                  <a:srgbClr val="000000"/>
-                </a:solidFill>
-                <a:latin typeface="맑은 고딕"/>
-                <a:ea typeface="맑은 고딕"/>
-              </a:rPr>
-              <a:t> —</a:t>
-            </a:r>
-            <a:r>
-              <a:rPr sz="1400" b="0">
-                <a:solidFill>
-                  <a:srgbClr val="000000"/>
-                </a:solidFill>
-                <a:latin typeface="맑은 고딕"/>
-                <a:ea typeface="맑은 고딕"/>
-              </a:rPr>
-              <a:t> OCP·보호된 변이·다형성·간접화·합성·구조 숨기기</a:t>
-            </a:r>
-          </a:p>
-          <a:p>
-            <a:pPr lvl="3" marL="1077913" indent="-354013">
-              <a:spcBef>
-                <a:spcPts val="600"/>
-              </a:spcBef>
-              <a:spcAft>
-                <a:spcPts val="600"/>
-              </a:spcAft>
-              <a:buSzPct val="90000"/>
-              <a:buFont typeface="Wingdings" pitchFamily="2" charset="2"/>
-              <a:buChar char=""/>
-            </a:pPr>
-            <a:r>
-              <a:rPr sz="1600" b="1">
-                <a:solidFill>
-                  <a:srgbClr val="000000"/>
-                </a:solidFill>
-                <a:latin typeface="맑은 고딕"/>
-                <a:ea typeface="맑은 고딕"/>
-              </a:rPr>
-              <a:t>패턴</a:t>
-            </a:r>
-            <a:r>
-              <a:rPr sz="1600" b="0">
-                <a:solidFill>
-                  <a:srgbClr val="000000"/>
-                </a:solidFill>
-                <a:latin typeface="맑은 고딕"/>
-                <a:ea typeface="맑은 고딕"/>
-              </a:rPr>
-              <a:t> —</a:t>
-            </a:r>
-            <a:r>
-              <a:rPr sz="1400" b="0">
-                <a:solidFill>
-                  <a:srgbClr val="000000"/>
-                </a:solidFill>
-                <a:latin typeface="맑은 고딕"/>
-                <a:ea typeface="맑은 고딕"/>
-              </a:rPr>
-              <a:t> 어댑터·전략은 원칙을 구조로 옮긴 어휘. 압력에서 출발한다</a:t>
-            </a:r>
-          </a:p>
-          <a:p>
-            <a:pPr lvl="3" marL="1077913" indent="-354013">
-              <a:spcBef>
-                <a:spcPts val="600"/>
-              </a:spcBef>
-              <a:spcAft>
-                <a:spcPts val="600"/>
-              </a:spcAft>
-              <a:buSzPct val="90000"/>
-              <a:buFont typeface="Wingdings" pitchFamily="2" charset="2"/>
-              <a:buChar char=""/>
-            </a:pPr>
-            <a:r>
-              <a:rPr sz="1600" b="1">
-                <a:solidFill>
-                  <a:srgbClr val="000000"/>
-                </a:solidFill>
-                <a:latin typeface="맑은 고딕"/>
-                <a:ea typeface="맑은 고딕"/>
-              </a:rPr>
-              <a:t>잘못된 관행</a:t>
-            </a:r>
-            <a:r>
-              <a:rPr sz="1600" b="0">
-                <a:solidFill>
-                  <a:srgbClr val="000000"/>
-                </a:solidFill>
-                <a:latin typeface="맑은 고딕"/>
-                <a:ea typeface="맑은 고딕"/>
-              </a:rPr>
-              <a:t> —</a:t>
-            </a:r>
-            <a:r>
-              <a:rPr sz="1400" b="0">
-                <a:solidFill>
-                  <a:srgbClr val="000000"/>
-                </a:solidFill>
-                <a:latin typeface="맑은 고딕"/>
-                <a:ea typeface="맑은 고딕"/>
-              </a:rPr>
-              <a:t> 추측성 일반화, 흩어진 변경, 타입 검사 분기, 패턴 과잉</a:t>
             </a:r>
           </a:p>
           <a:p>
@@ -39145,6 +38928,16 @@
               <a:buChar char=""/>
             </a:pPr>
             <a:r>
+              <a:rPr sz="1800" b="1">
+                <a:solidFill>
+                  <a:srgbClr val="000000"/>
+                </a:solidFill>
+                <a:latin typeface="맑은 고딕"/>
+                <a:ea typeface="맑은 고딕"/>
+              </a:rPr>
+              <a:t>파급</a:t>
+            </a:r>
+            <a:r>
               <a:rPr sz="1800" b="0">
                 <a:solidFill>
                   <a:srgbClr val="000000"/>
@@ -39152,11 +38945,21 @@
                 <a:latin typeface="맑은 고딕"/>
                 <a:ea typeface="맑은 고딕"/>
               </a:rPr>
-              <a:t>다음 세션</a:t>
-            </a:r>
-          </a:p>
-          <a:p>
-            <a:pPr lvl="3" marL="1077913" indent="-354013">
+              <a:t> —</a:t>
+            </a:r>
+            <a:r>
+              <a:rPr sz="1600" b="0">
+                <a:solidFill>
+                  <a:srgbClr val="000000"/>
+                </a:solidFill>
+                <a:latin typeface="맑은 고딕"/>
+                <a:ea typeface="맑은 고딕"/>
+              </a:rPr>
+              <a:t> 바뀌는 곳과 그대로인 곳을 적어 경직성을 드러낸다</a:t>
+            </a:r>
+          </a:p>
+          <a:p>
+            <a:pPr lvl="2" marL="723900" indent="-368300">
               <a:spcBef>
                 <a:spcPts val="600"/>
               </a:spcBef>
@@ -39165,9 +38968,29 @@
               </a:spcAft>
               <a:buSzPct val="90000"/>
               <a:buFont typeface="Wingdings" pitchFamily="2" charset="2"/>
-              <a:buChar char=""/>
+              <a:buChar char=""/>
             </a:pPr>
             <a:r>
+              <a:rPr sz="1800" b="1">
+                <a:solidFill>
+                  <a:srgbClr val="000000"/>
+                </a:solidFill>
+                <a:latin typeface="맑은 고딕"/>
+                <a:ea typeface="맑은 고딕"/>
+              </a:rPr>
+              <a:t>지점</a:t>
+            </a:r>
+            <a:r>
+              <a:rPr sz="1800" b="0">
+                <a:solidFill>
+                  <a:srgbClr val="000000"/>
+                </a:solidFill>
+                <a:latin typeface="맑은 고딕"/>
+                <a:ea typeface="맑은 고딕"/>
+              </a:rPr>
+              <a:t> —</a:t>
+            </a:r>
+            <a:r>
               <a:rPr sz="1600" b="0">
                 <a:solidFill>
                   <a:srgbClr val="000000"/>
@@ -39175,10 +38998,183 @@
                 <a:latin typeface="맑은 고딕"/>
                 <a:ea typeface="맑은 고딕"/>
               </a:rPr>
+              <a:t> 변이 지점은 지금 보호하고, 진화 지점은 추측으로 남긴다</a:t>
+            </a:r>
+          </a:p>
+          <a:p>
+            <a:pPr lvl="2" marL="723900" indent="-368300">
+              <a:spcBef>
+                <a:spcPts val="600"/>
+              </a:spcBef>
+              <a:spcAft>
+                <a:spcPts val="600"/>
+              </a:spcAft>
+              <a:buSzPct val="90000"/>
+              <a:buFont typeface="Wingdings" pitchFamily="2" charset="2"/>
+              <a:buChar char=""/>
+            </a:pPr>
+            <a:r>
+              <a:rPr sz="1800" b="1">
+                <a:solidFill>
+                  <a:srgbClr val="000000"/>
+                </a:solidFill>
+                <a:latin typeface="맑은 고딕"/>
+                <a:ea typeface="맑은 고딕"/>
+              </a:rPr>
+              <a:t>원칙</a:t>
+            </a:r>
+            <a:r>
+              <a:rPr sz="1800" b="0">
+                <a:solidFill>
+                  <a:srgbClr val="000000"/>
+                </a:solidFill>
+                <a:latin typeface="맑은 고딕"/>
+                <a:ea typeface="맑은 고딕"/>
+              </a:rPr>
+              <a:t> —</a:t>
+            </a:r>
+            <a:r>
+              <a:rPr sz="1600" b="0">
+                <a:solidFill>
+                  <a:srgbClr val="000000"/>
+                </a:solidFill>
+                <a:latin typeface="맑은 고딕"/>
+                <a:ea typeface="맑은 고딕"/>
+              </a:rPr>
+              <a:t> OCP·보호된 변이·다형성·간접화·합성·구조 숨기기</a:t>
+            </a:r>
+          </a:p>
+          <a:p>
+            <a:pPr lvl="2" marL="723900" indent="-368300">
+              <a:spcBef>
+                <a:spcPts val="600"/>
+              </a:spcBef>
+              <a:spcAft>
+                <a:spcPts val="600"/>
+              </a:spcAft>
+              <a:buSzPct val="90000"/>
+              <a:buFont typeface="Wingdings" pitchFamily="2" charset="2"/>
+              <a:buChar char=""/>
+            </a:pPr>
+            <a:r>
+              <a:rPr sz="1800" b="1">
+                <a:solidFill>
+                  <a:srgbClr val="000000"/>
+                </a:solidFill>
+                <a:latin typeface="맑은 고딕"/>
+                <a:ea typeface="맑은 고딕"/>
+              </a:rPr>
+              <a:t>패턴</a:t>
+            </a:r>
+            <a:r>
+              <a:rPr sz="1800" b="0">
+                <a:solidFill>
+                  <a:srgbClr val="000000"/>
+                </a:solidFill>
+                <a:latin typeface="맑은 고딕"/>
+                <a:ea typeface="맑은 고딕"/>
+              </a:rPr>
+              <a:t> —</a:t>
+            </a:r>
+            <a:r>
+              <a:rPr sz="1600" b="0">
+                <a:solidFill>
+                  <a:srgbClr val="000000"/>
+                </a:solidFill>
+                <a:latin typeface="맑은 고딕"/>
+                <a:ea typeface="맑은 고딕"/>
+              </a:rPr>
+              <a:t> 어댑터·전략은 원칙을 구조로 옮긴 어휘. 압력에서 출발한다</a:t>
+            </a:r>
+          </a:p>
+          <a:p>
+            <a:pPr lvl="2" marL="723900" indent="-368300">
+              <a:spcBef>
+                <a:spcPts val="600"/>
+              </a:spcBef>
+              <a:spcAft>
+                <a:spcPts val="600"/>
+              </a:spcAft>
+              <a:buSzPct val="90000"/>
+              <a:buFont typeface="Wingdings" pitchFamily="2" charset="2"/>
+              <a:buChar char=""/>
+            </a:pPr>
+            <a:r>
+              <a:rPr sz="1800" b="1">
+                <a:solidFill>
+                  <a:srgbClr val="000000"/>
+                </a:solidFill>
+                <a:latin typeface="맑은 고딕"/>
+                <a:ea typeface="맑은 고딕"/>
+              </a:rPr>
+              <a:t>잘못된 관행</a:t>
+            </a:r>
+            <a:r>
+              <a:rPr sz="1800" b="0">
+                <a:solidFill>
+                  <a:srgbClr val="000000"/>
+                </a:solidFill>
+                <a:latin typeface="맑은 고딕"/>
+                <a:ea typeface="맑은 고딕"/>
+              </a:rPr>
+              <a:t> —</a:t>
+            </a:r>
+            <a:r>
+              <a:rPr sz="1600" b="0">
+                <a:solidFill>
+                  <a:srgbClr val="000000"/>
+                </a:solidFill>
+                <a:latin typeface="맑은 고딕"/>
+                <a:ea typeface="맑은 고딕"/>
+              </a:rPr>
+              <a:t> 추측성 일반화, 흩어진 변경, 타입 검사 분기, 패턴 과잉</a:t>
+            </a:r>
+          </a:p>
+          <a:p>
+            <a:pPr marL="342900" indent="0">
+              <a:spcBef>
+                <a:spcPts val="600"/>
+              </a:spcBef>
+              <a:spcAft>
+                <a:spcPts val="600"/>
+              </a:spcAft>
+              <a:buNone/>
+            </a:pPr>
+            <a:r>
+              <a:rPr sz="1800" b="1">
+                <a:solidFill>
+                  <a:srgbClr val="000000"/>
+                </a:solidFill>
+                <a:latin typeface="맑은 고딕"/>
+                <a:ea typeface="맑은 고딕"/>
+              </a:rPr>
+              <a:t>다음 세션</a:t>
+            </a:r>
+          </a:p>
+          <a:p>
+            <a:pPr lvl="2" marL="723900" indent="-368300">
+              <a:spcBef>
+                <a:spcPts val="600"/>
+              </a:spcBef>
+              <a:spcAft>
+                <a:spcPts val="600"/>
+              </a:spcAft>
+              <a:buSzPct val="90000"/>
+              <a:buFont typeface="Wingdings" pitchFamily="2" charset="2"/>
+              <a:buChar char=""/>
+            </a:pPr>
+            <a:r>
+              <a:rPr sz="1800" b="0">
+                <a:solidFill>
+                  <a:srgbClr val="000000"/>
+                </a:solidFill>
+                <a:latin typeface="맑은 고딕"/>
+                <a:ea typeface="맑은 고딕"/>
+              </a:rPr>
               <a:t>"</a:t>
             </a:r>
             <a:r>
-              <a:rPr sz="1600" b="1">
+              <a:rPr sz="1800" b="1">
                 <a:solidFill>
                   <a:srgbClr val="000000"/>
                 </a:solidFill>
@@ -39188,17 +39184,17 @@
               <a:t>09. 설계 대안 평가</a:t>
             </a:r>
             <a:r>
+              <a:rPr sz="1800" b="0">
+                <a:solidFill>
+                  <a:srgbClr val="000000"/>
+                </a:solidFill>
+                <a:latin typeface="맑은 고딕"/>
+                <a:ea typeface="맑은 고딕"/>
+              </a:rPr>
+              <a:t>" —</a:t>
+            </a:r>
+            <a:r>
               <a:rPr sz="1600" b="0">
-                <a:solidFill>
-                  <a:srgbClr val="000000"/>
-                </a:solidFill>
-                <a:latin typeface="맑은 고딕"/>
-                <a:ea typeface="맑은 고딕"/>
-              </a:rPr>
-              <a:t>" —</a:t>
-            </a:r>
-            <a:r>
-              <a:rPr sz="1400" b="0">
                 <a:solidFill>
                   <a:srgbClr val="000000"/>
                 </a:solidFill>
@@ -39566,7 +39562,7 @@
                 <a:latin typeface="맑은 고딕"/>
                 <a:ea typeface="맑은 고딕"/>
               </a:rPr>
-              <a:t>Craig Larman, 2004</a:t>
+              <a:t>[Larman 2004]</a:t>
             </a:r>
           </a:p>
           <a:p>
@@ -42253,7 +42249,7 @@
                 <a:latin typeface="맑은 고딕"/>
                 <a:ea typeface="맑은 고딕"/>
               </a:rPr>
-              <a:t>Robert C. Martin, 2000</a:t>
+              <a:t>[Martin 2000]</a:t>
             </a:r>
           </a:p>
           <a:p>

--- a/courses/ooad/sessions/s08.pptx
+++ b/courses/ooad/sessions/s08.pptx
@@ -1459,7 +1459,7 @@
             <a:pPr lvl="0"/>
             <a:r>
               <a:rPr lang="ko-KR" sz="1200"/>
-              <a:t>도식은 분석의 상태 기계라 한글이다("04. 동적 모델 — 상호작용과 상태"의 「33. 주문 상태 기계」에 전이 하나를 더했다). 배송 완료는 생략했다.</a:t>
+              <a:t>도식은 분석의 상태 기계라 한글이다("04. 동적 모델 — 상호작용과 상태"의 「08. 상태 기계 다이어그램」의 「주문 상태 기계」에 전이 하나를 더했다). 배송 완료는 생략했다.</a:t>
             </a:r>
           </a:p>
           <a:p>
@@ -3274,7 +3274,7 @@
             <a:pPr lvl="0"/>
             <a:r>
               <a:rPr lang="ko-KR" sz="1200"/>
-              <a:t>결제 전 취소는 "04. 동적 모델 — 상호작용과 상태"의 「35. 가드와 금지된 전이」와 "05. 구조적 경계와 의존성"의 「17. 변경 파급」에서 미정으로 남겼다. 이 세션은 "결제 대기 → 취소됨, 외부 요청 없음"으로 정해졌다고 가정한다.</a:t>
+              <a:t>결제 전 취소는 "04. 동적 모델 — 상호작용과 상태"의 「08. 상태 기계 다이어그램」의 「가드와 금지된 전이」와 "05. 구조적 경계와 의존성"의 「17. 변경 파급」에서 미정으로 남겼다. 이 세션은 "결제 대기 → 취소됨, 외부 요청 없음"으로 정해졌다고 가정한다.</a:t>
             </a:r>
           </a:p>
           <a:p>
@@ -4988,6 +4988,48 @@
               <a:t>15. 보호된 변이</a:t>
             </a:r>
           </a:p>
+          <a:p>
+            <a:pPr lvl="1" marL="355600" indent="0">
+              <a:spcBef>
+                <a:spcPts val="300"/>
+              </a:spcBef>
+              <a:spcAft>
+                <a:spcPts val="300"/>
+              </a:spcAft>
+              <a:buNone/>
+            </a:pPr>
+            <a:r>
+              <a:rPr sz="1600" b="0">
+                <a:solidFill>
+                  <a:srgbClr val="000000"/>
+                </a:solidFill>
+                <a:latin typeface="맑은 고딕"/>
+                <a:ea typeface="맑은 고딕"/>
+              </a:rPr>
+              <a:t>16. 인터페이스</a:t>
+            </a:r>
+          </a:p>
+          <a:p>
+            <a:pPr lvl="1" marL="355600" indent="0">
+              <a:spcBef>
+                <a:spcPts val="300"/>
+              </a:spcBef>
+              <a:spcAft>
+                <a:spcPts val="300"/>
+              </a:spcAft>
+              <a:buNone/>
+            </a:pPr>
+            <a:r>
+              <a:rPr sz="1600" b="0">
+                <a:solidFill>
+                  <a:srgbClr val="000000"/>
+                </a:solidFill>
+                <a:latin typeface="맑은 고딕"/>
+                <a:ea typeface="맑은 고딕"/>
+              </a:rPr>
+              <a:t>17. 다형성</a:t>
+            </a:r>
+          </a:p>
         </p:txBody>
       </p:sp>
       <p:sp>
@@ -5110,7 +5152,7 @@
                 <a:latin typeface="맑은 고딕"/>
                 <a:ea typeface="맑은 고딕"/>
               </a:rPr>
-              <a:t>16. 인터페이스</a:t>
+              <a:t>18. 간접화</a:t>
             </a:r>
           </a:p>
           <a:p>
@@ -5131,7 +5173,7 @@
                 <a:latin typeface="맑은 고딕"/>
                 <a:ea typeface="맑은 고딕"/>
               </a:rPr>
-              <a:t>17. 다형성</a:t>
+              <a:t>19. 합성</a:t>
             </a:r>
           </a:p>
           <a:p>
@@ -5152,7 +5194,7 @@
                 <a:latin typeface="맑은 고딕"/>
                 <a:ea typeface="맑은 고딕"/>
               </a:rPr>
-              <a:t>18. 간접화</a:t>
+              <a:t>20. 구조 숨기기</a:t>
             </a:r>
           </a:p>
           <a:p>
@@ -5173,7 +5215,7 @@
                 <a:latin typeface="맑은 고딕"/>
                 <a:ea typeface="맑은 고딕"/>
               </a:rPr>
-              <a:t>19. 합성</a:t>
+              <a:t>21. 규칙의 국소화</a:t>
             </a:r>
           </a:p>
           <a:p>
@@ -5194,7 +5236,7 @@
                 <a:latin typeface="맑은 고딕"/>
                 <a:ea typeface="맑은 고딕"/>
               </a:rPr>
-              <a:t>20. 구조 숨기기</a:t>
+              <a:t>22. 새 연동의 추가</a:t>
             </a:r>
           </a:p>
           <a:p>
@@ -5215,7 +5257,7 @@
                 <a:latin typeface="맑은 고딕"/>
                 <a:ea typeface="맑은 고딕"/>
               </a:rPr>
-              <a:t>21. 규칙의 국소화</a:t>
+              <a:t>23. 계약을 바꾸는 변경</a:t>
             </a:r>
           </a:p>
           <a:p>
@@ -5236,7 +5278,7 @@
                 <a:latin typeface="맑은 고딕"/>
                 <a:ea typeface="맑은 고딕"/>
               </a:rPr>
-              <a:t>22. 새 연동의 추가</a:t>
+              <a:t>24. 변경을 쉽게</a:t>
             </a:r>
           </a:p>
           <a:p>
@@ -5257,7 +5299,7 @@
                 <a:latin typeface="맑은 고딕"/>
                 <a:ea typeface="맑은 고딕"/>
               </a:rPr>
-              <a:t>23. 계약을 바꾸는 변경</a:t>
+              <a:t>25. YAGNI의 범위</a:t>
             </a:r>
           </a:p>
           <a:p>
@@ -5278,7 +5320,7 @@
                 <a:latin typeface="맑은 고딕"/>
                 <a:ea typeface="맑은 고딕"/>
               </a:rPr>
-              <a:t>24. 변경을 쉽게</a:t>
+              <a:t>26. 패턴 어휘</a:t>
             </a:r>
           </a:p>
           <a:p>
@@ -5299,7 +5341,7 @@
                 <a:latin typeface="맑은 고딕"/>
                 <a:ea typeface="맑은 고딕"/>
               </a:rPr>
-              <a:t>25. YAGNI의 범위</a:t>
+              <a:t>27. 어댑터</a:t>
             </a:r>
           </a:p>
           <a:p>
@@ -5320,7 +5362,7 @@
                 <a:latin typeface="맑은 고딕"/>
                 <a:ea typeface="맑은 고딕"/>
               </a:rPr>
-              <a:t>26. 패턴 어휘</a:t>
+              <a:t>28. 전략</a:t>
             </a:r>
           </a:p>
           <a:p>
@@ -5341,7 +5383,7 @@
                 <a:latin typeface="맑은 고딕"/>
                 <a:ea typeface="맑은 고딕"/>
               </a:rPr>
-              <a:t>27. 어댑터</a:t>
+              <a:t>29. 패턴과 원칙</a:t>
             </a:r>
           </a:p>
           <a:p>
@@ -5362,7 +5404,7 @@
                 <a:latin typeface="맑은 고딕"/>
                 <a:ea typeface="맑은 고딕"/>
               </a:rPr>
-              <a:t>28. 전략</a:t>
+              <a:t>30. 규칙 변경 코드</a:t>
             </a:r>
           </a:p>
           <a:p>
@@ -5383,7 +5425,7 @@
                 <a:latin typeface="맑은 고딕"/>
                 <a:ea typeface="맑은 고딕"/>
               </a:rPr>
-              <a:t>29. 패턴과 원칙</a:t>
+              <a:t>31. 새 연동 코드</a:t>
             </a:r>
           </a:p>
           <a:p>
@@ -5404,7 +5446,69 @@
                 <a:latin typeface="맑은 고딕"/>
                 <a:ea typeface="맑은 고딕"/>
               </a:rPr>
-              <a:t>30. 규칙 변경 코드</a:t>
+              <a:t>32. 변경 테스트</a:t>
+            </a:r>
+          </a:p>
+          <a:p>
+            <a:pPr lvl="1" marL="355600" indent="0">
+              <a:spcBef>
+                <a:spcPts val="300"/>
+              </a:spcBef>
+              <a:spcAft>
+                <a:spcPts val="300"/>
+              </a:spcAft>
+              <a:buNone/>
+            </a:pPr>
+            <a:r>
+              <a:rPr sz="1600" b="0">
+                <a:solidFill>
+                  <a:srgbClr val="000000"/>
+                </a:solidFill>
+                <a:latin typeface="맑은 고딕"/>
+                <a:ea typeface="맑은 고딕"/>
+              </a:rPr>
+              <a:t>33. 잘못된 관행 —</a:t>
+            </a:r>
+            <a:r>
+              <a:rPr sz="1400" b="0">
+                <a:solidFill>
+                  <a:srgbClr val="000000"/>
+                </a:solidFill>
+                <a:latin typeface="맑은 고딕"/>
+                <a:ea typeface="맑은 고딕"/>
+              </a:rPr>
+              <a:t> 추측성 일반화</a:t>
+            </a:r>
+          </a:p>
+          <a:p>
+            <a:pPr lvl="1" marL="355600" indent="0">
+              <a:spcBef>
+                <a:spcPts val="300"/>
+              </a:spcBef>
+              <a:spcAft>
+                <a:spcPts val="300"/>
+              </a:spcAft>
+              <a:buNone/>
+            </a:pPr>
+            <a:r>
+              <a:rPr sz="1600" b="0">
+                <a:solidFill>
+                  <a:srgbClr val="000000"/>
+                </a:solidFill>
+                <a:latin typeface="맑은 고딕"/>
+                <a:ea typeface="맑은 고딕"/>
+              </a:rPr>
+              <a:t>34. 잘못된 관행 —</a:t>
+            </a:r>
+            <a:r>
+              <a:rPr sz="1400" b="0">
+                <a:solidFill>
+                  <a:srgbClr val="000000"/>
+                </a:solidFill>
+                <a:latin typeface="맑은 고딕"/>
+                <a:ea typeface="맑은 고딕"/>
+              </a:rPr>
+              <a:t> 흩어진 변경</a:t>
             </a:r>
           </a:p>
         </p:txBody>
@@ -16684,110 +16788,6 @@
             <a:normAutofit/>
           </a:bodyPr>
           <a:lstStyle/>
-          <a:p>
-            <a:pPr lvl="1" marL="355600" indent="0">
-              <a:spcBef>
-                <a:spcPts val="300"/>
-              </a:spcBef>
-              <a:spcAft>
-                <a:spcPts val="300"/>
-              </a:spcAft>
-              <a:buNone/>
-            </a:pPr>
-            <a:r>
-              <a:rPr sz="1600" b="0">
-                <a:solidFill>
-                  <a:srgbClr val="000000"/>
-                </a:solidFill>
-                <a:latin typeface="맑은 고딕"/>
-                <a:ea typeface="맑은 고딕"/>
-              </a:rPr>
-              <a:t>31. 새 연동 코드</a:t>
-            </a:r>
-          </a:p>
-          <a:p>
-            <a:pPr lvl="1" marL="355600" indent="0">
-              <a:spcBef>
-                <a:spcPts val="300"/>
-              </a:spcBef>
-              <a:spcAft>
-                <a:spcPts val="300"/>
-              </a:spcAft>
-              <a:buNone/>
-            </a:pPr>
-            <a:r>
-              <a:rPr sz="1600" b="0">
-                <a:solidFill>
-                  <a:srgbClr val="000000"/>
-                </a:solidFill>
-                <a:latin typeface="맑은 고딕"/>
-                <a:ea typeface="맑은 고딕"/>
-              </a:rPr>
-              <a:t>32. 변경 테스트</a:t>
-            </a:r>
-          </a:p>
-          <a:p>
-            <a:pPr lvl="1" marL="355600" indent="0">
-              <a:spcBef>
-                <a:spcPts val="300"/>
-              </a:spcBef>
-              <a:spcAft>
-                <a:spcPts val="300"/>
-              </a:spcAft>
-              <a:buNone/>
-            </a:pPr>
-            <a:r>
-              <a:rPr sz="1600" b="0">
-                <a:solidFill>
-                  <a:srgbClr val="000000"/>
-                </a:solidFill>
-                <a:latin typeface="맑은 고딕"/>
-                <a:ea typeface="맑은 고딕"/>
-              </a:rPr>
-              <a:t>33. 잘못된 관행 —</a:t>
-            </a:r>
-            <a:r>
-              <a:rPr sz="1400" b="0">
-                <a:solidFill>
-                  <a:srgbClr val="000000"/>
-                </a:solidFill>
-                <a:latin typeface="맑은 고딕"/>
-                <a:ea typeface="맑은 고딕"/>
-              </a:rPr>
-              <a:t> 추측성 일반화</a:t>
-            </a:r>
-          </a:p>
-          <a:p>
-            <a:pPr lvl="1" marL="355600" indent="0">
-              <a:spcBef>
-                <a:spcPts val="300"/>
-              </a:spcBef>
-              <a:spcAft>
-                <a:spcPts val="300"/>
-              </a:spcAft>
-              <a:buNone/>
-            </a:pPr>
-            <a:r>
-              <a:rPr sz="1600" b="0">
-                <a:solidFill>
-                  <a:srgbClr val="000000"/>
-                </a:solidFill>
-                <a:latin typeface="맑은 고딕"/>
-                <a:ea typeface="맑은 고딕"/>
-              </a:rPr>
-              <a:t>34. 잘못된 관행 —</a:t>
-            </a:r>
-            <a:r>
-              <a:rPr sz="1400" b="0">
-                <a:solidFill>
-                  <a:srgbClr val="000000"/>
-                </a:solidFill>
-                <a:latin typeface="맑은 고딕"/>
-                <a:ea typeface="맑은 고딕"/>
-              </a:rPr>
-              <a:t> 흩어진 변경</a:t>
-            </a:r>
-          </a:p>
           <a:p>
             <a:pPr lvl="1" marL="355600" indent="0">
               <a:spcBef>
@@ -36848,7 +36848,7 @@
         <p:spPr>
           <a:xfrm>
             <a:off x="233172" y="1414318"/>
-            <a:ext cx="4338828" cy="5068778"/>
+            <a:ext cx="4338828" cy="4898147"/>
           </a:xfrm>
         </p:spPr>
         <p:txBody>
@@ -37179,7 +37179,7 @@
         <p:spPr>
           <a:xfrm>
             <a:off x="4572000" y="1414318"/>
-            <a:ext cx="4439412" cy="5068778"/>
+            <a:ext cx="4439412" cy="4898147"/>
           </a:xfrm>
         </p:spPr>
         <p:txBody>
@@ -37996,7 +37996,7 @@
         <p:spPr>
           <a:xfrm>
             <a:off x="233172" y="1414318"/>
-            <a:ext cx="4338828" cy="5068778"/>
+            <a:ext cx="4338828" cy="4898147"/>
           </a:xfrm>
         </p:spPr>
         <p:txBody>
@@ -38370,7 +38370,7 @@
         <p:spPr>
           <a:xfrm>
             <a:off x="4572000" y="1414318"/>
-            <a:ext cx="4439412" cy="5068778"/>
+            <a:ext cx="4439412" cy="4898147"/>
           </a:xfrm>
         </p:spPr>
         <p:txBody>

--- a/courses/ooad/sessions/s08.pptx
+++ b/courses/ooad/sessions/s08.pptx
@@ -990,7 +990,7 @@
             <a:pPr lvl="0"/>
             <a:r>
               <a:rPr lang="ko-KR" sz="1200"/>
-              <a:t>정보 은닉은 "07. 책임·협력·계약"의 「13. 정보 은닉」, Parnas의 원래 뜻은 "05. 구조적 경계와 의존성"의 「08. 패키지 기준」에서 다뤘다.</a:t>
+              <a:t>정보 은닉은 "07. 책임·협력·계약"의 「13. 정보 은닉」, 변경 이유에 따른 경계 판단은 "05. 구조적 경계와 의존성"의 「07. 경계 후보」에서 다뤘다.</a:t>
             </a:r>
           </a:p>
         </p:txBody>
@@ -2812,14 +2812,7 @@
             <a:pPr lvl="0"/>
             <a:r>
               <a:rPr lang="ko-KR" sz="1200"/>
-              <a:t>요청 A에서 결제 수단마다 클래스를 만들지 않은 것이 점검 항목 5의 답이다. 결제의 행위는 결제 수단에 따라 달라지지 않고, 요청의 형식만 연동에서 달라진다.</a:t>
-            </a:r>
-          </a:p>
-          <a:p>
-            <a:pPr lvl="0"/>
-            <a:r>
-              <a:rPr lang="ko-KR" sz="1200"/>
-              <a:t>수강생의 표가 달라도 바뀌는 곳이 좁고 그 이유를 설명하면 맞다.</a:t>
+              <a:t>이 세션의 판단(부분 취소를 지금 일반화하지 않는다, 결제 수단마다 클래스를 만들지 않는다)은 다음 세션에서 대안을 비교해 정당화한다.</a:t>
             </a:r>
           </a:p>
         </p:txBody>
@@ -2880,14 +2873,14 @@
             <a:pPr lvl="0"/>
             <a:r>
               <a:rPr lang="ko-KR" sz="1200"/>
-              <a:t>매월 ○일을 1~28일로 제한한 것은 기존 R1의 교육용 가정을 따른 것이다(29~31일이 없는 달의 처리를 피한다).</a:t>
+              <a:t>요청 A에서 결제 수단마다 클래스를 만들지 않은 것이 점검 항목 5의 답이다. 결제의 행위는 결제 수단에 따라 달라지지 않고, 요청의 형식만 연동에서 달라진다.</a:t>
             </a:r>
           </a:p>
           <a:p>
             <a:pPr lvl="0"/>
             <a:r>
               <a:rPr lang="ko-KR" sz="1200"/>
-              <a:t>DeliveryCycle은 값처럼 쓰이는 작은 객체다. 주기 규칙(1~28)은 각 구현의 생성자에서 검사한다.</a:t>
+              <a:t>수강생의 표가 달라도 바뀌는 곳이 좁고 그 이유를 설명하면 맞다.</a:t>
             </a:r>
           </a:p>
         </p:txBody>
@@ -2948,14 +2941,14 @@
             <a:pPr lvl="0"/>
             <a:r>
               <a:rPr lang="ko-KR" sz="1200"/>
-              <a:t>DeliveryCycle은 변이 지점(두 종류가 실제로 있다)이라 인터페이스로 두었고, PaymentMethod는 값이 하나 늘었을 뿐이라 enum 그대로다.</a:t>
+              <a:t>매월 ○일을 1~28일로 제한한 것은 기존 R1의 교육용 가정을 따른 것이다(29~31일이 없는 달의 처리를 피한다).</a:t>
             </a:r>
           </a:p>
           <a:p>
             <a:pPr lvl="0"/>
             <a:r>
               <a:rPr lang="ko-KR" sz="1200"/>
-              <a:t>결제·배송 요청의 약속과 서비스·저장소는 바뀌지 않아 생략했다(실습 7의 설계 클래스 다이어그램 (안)).</a:t>
+              <a:t>DeliveryCycle은 값처럼 쓰이는 작은 객체다. 주기 규칙(1~28)은 각 구현의 생성자에서 검사한다.</a:t>
             </a:r>
           </a:p>
         </p:txBody>
@@ -3016,7 +3009,14 @@
             <a:pPr lvl="0"/>
             <a:r>
               <a:rPr lang="ko-KR" sz="1200"/>
-              <a:t>변경 요청은 설계만 바꾸지 않는다. 요구(R1)와 속성 도메인이 먼저 바뀌고, 설계는 그 의미를 따른다 — 「23. 계약을 바꾸는 변경」과 같은 순서다.</a:t>
+              <a:t>DeliveryCycle은 변이 지점(두 종류가 실제로 있다)이라 인터페이스로 두었고, PaymentMethod는 값이 하나 늘었을 뿐이라 enum 그대로다.</a:t>
+            </a:r>
+          </a:p>
+          <a:p>
+            <a:pPr lvl="0"/>
+            <a:r>
+              <a:rPr lang="ko-KR" sz="1200"/>
+              <a:t>결제·배송 요청의 약속과 서비스·저장소는 바뀌지 않아 생략했다(실습 7의 설계 클래스 다이어그램 (안)).</a:t>
             </a:r>
           </a:p>
         </p:txBody>
@@ -3077,7 +3077,7 @@
             <a:pPr lvl="0"/>
             <a:r>
               <a:rPr lang="ko-KR" sz="1200"/>
-              <a:t>이 세션의 판단(부분 취소를 지금 일반화하지 않는다, 결제 수단마다 클래스를 만들지 않는다)은 다음 세션에서 대안을 비교해 정당화한다.</a:t>
+              <a:t>변경 요청은 설계만 바꾸지 않는다. 요구(R1)와 속성 도메인이 먼저 바뀌고, 설계는 그 의미를 따른다 — 「23. 계약을 바꾸는 변경」과 같은 순서다.</a:t>
             </a:r>
           </a:p>
         </p:txBody>
@@ -3274,7 +3274,7 @@
             <a:pPr lvl="0"/>
             <a:r>
               <a:rPr lang="ko-KR" sz="1200"/>
-              <a:t>결제 전 취소는 "04. 동적 모델 — 상호작용과 상태"의 「08. 상태 기계 다이어그램」의 「가드와 금지된 전이」와 "05. 구조적 경계와 의존성"의 「17. 변경 파급」에서 미정으로 남겼다. 이 세션은 "결제 대기 → 취소됨, 외부 요청 없음"으로 정해졌다고 가정한다.</a:t>
+              <a:t>결제 전 취소는 "04. 동적 모델 — 상호작용과 상태"의 「08. 상태 기계 다이어그램」의 「가드와 금지된 전이」와 "05. 구조적 경계와 의존성"의 「15. 변경 파급」에서 미정으로 남겼다. 이 세션은 "결제 대기 → 취소됨, 외부 요청 없음"으로 정해졌다고 가정한다.</a:t>
             </a:r>
           </a:p>
           <a:p>
@@ -3349,7 +3349,7 @@
             <a:pPr lvl="0"/>
             <a:r>
               <a:rPr lang="ko-KR" sz="1200"/>
-              <a:t>"05. 구조적 경계와 의존성"의 「17. 변경 파급」은 패키지 수준이었다. 이 세션은 클래스·계약 수준이다.</a:t>
+              <a:t>"05. 구조적 경계와 의존성"의 「15. 변경 파급」은 패키지 수준이었다. 이 세션은 클래스·계약 수준이다.</a:t>
             </a:r>
           </a:p>
         </p:txBody>
@@ -5775,7 +5775,7 @@
                           <a:ea typeface="맑은 고딕" panose="020B0503020000020004" pitchFamily="34" charset="-127"/>
                           <a:cs typeface="맑은 고딕"/>
                         </a:rPr>
-                        <a:t>바뀌는가</a:t>
+                        <a:t>바뀌는가?</a:t>
                       </a:r>
                     </a:p>
                   </a:txBody>
@@ -7168,8 +7168,8 @@
           </p:nvPr>
         </p:nvGraphicFramePr>
         <p:xfrm>
-          <a:off x="1231456" y="1842998"/>
-          <a:ext cx="6667500" cy="3873500"/>
+          <a:off x="1202246" y="1842998"/>
+          <a:ext cx="6725920" cy="3873500"/>
         </p:xfrm>
         <a:graphic>
           <a:graphicData uri="http://schemas.openxmlformats.org/drawingml/2006/table">
@@ -7177,7 +7177,7 @@
               <a:tblPr/>
               <a:tblGrid>
                 <a:gridCol w="1562100"/>
-                <a:gridCol w="889000"/>
+                <a:gridCol w="947420"/>
                 <a:gridCol w="4216400"/>
               </a:tblGrid>
               <a:tr h="288000">
@@ -7261,7 +7261,7 @@
                           <a:ea typeface="맑은 고딕" panose="020B0503020000020004" pitchFamily="34" charset="-127"/>
                           <a:cs typeface="맑은 고딕"/>
                         </a:rPr>
-                        <a:t>바뀌는가</a:t>
+                        <a:t>바뀌는가?</a:t>
                       </a:r>
                     </a:p>
                   </a:txBody>
@@ -16920,131 +16920,7 @@
                 <a:latin typeface="맑은 고딕"/>
                 <a:ea typeface="맑은 고딕"/>
               </a:rPr>
-              <a:t>39. 변경 영향 분석 </a:t>
-            </a:r>
-            <a:r>
-              <a:rPr sz="1200" b="0">
-                <a:solidFill>
-                  <a:srgbClr val="000000"/>
-                </a:solidFill>
-                <a:latin typeface="맑은 고딕"/>
-                <a:ea typeface="맑은 고딕"/>
-              </a:rPr>
-              <a:t>(안)</a:t>
-            </a:r>
-          </a:p>
-          <a:p>
-            <a:pPr lvl="1" marL="355600" indent="0">
-              <a:spcBef>
-                <a:spcPts val="300"/>
-              </a:spcBef>
-              <a:spcAft>
-                <a:spcPts val="300"/>
-              </a:spcAft>
-              <a:buNone/>
-            </a:pPr>
-            <a:r>
-              <a:rPr sz="1600" b="0">
-                <a:solidFill>
-                  <a:srgbClr val="000000"/>
-                </a:solidFill>
-                <a:latin typeface="맑은 고딕"/>
-                <a:ea typeface="맑은 고딕"/>
-              </a:rPr>
-              <a:t>40. 변이 설계 </a:t>
-            </a:r>
-            <a:r>
-              <a:rPr sz="1200" b="0">
-                <a:solidFill>
-                  <a:srgbClr val="000000"/>
-                </a:solidFill>
-                <a:latin typeface="맑은 고딕"/>
-                <a:ea typeface="맑은 고딕"/>
-              </a:rPr>
-              <a:t>(안)</a:t>
-            </a:r>
-          </a:p>
-          <a:p>
-            <a:pPr lvl="1" marL="355600" indent="0">
-              <a:spcBef>
-                <a:spcPts val="300"/>
-              </a:spcBef>
-              <a:spcAft>
-                <a:spcPts val="300"/>
-              </a:spcAft>
-              <a:buNone/>
-            </a:pPr>
-            <a:r>
-              <a:rPr sz="1600" b="0">
-                <a:solidFill>
-                  <a:srgbClr val="000000"/>
-                </a:solidFill>
-                <a:latin typeface="맑은 고딕"/>
-                <a:ea typeface="맑은 고딕"/>
-              </a:rPr>
-              <a:t>41. 설계 클래스 다이어그램 </a:t>
-            </a:r>
-            <a:r>
-              <a:rPr sz="1200" b="0">
-                <a:solidFill>
-                  <a:srgbClr val="000000"/>
-                </a:solidFill>
-                <a:latin typeface="맑은 고딕"/>
-                <a:ea typeface="맑은 고딕"/>
-              </a:rPr>
-              <a:t>(안)</a:t>
-            </a:r>
-          </a:p>
-          <a:p>
-            <a:pPr lvl="1" marL="355600" indent="0">
-              <a:spcBef>
-                <a:spcPts val="300"/>
-              </a:spcBef>
-              <a:spcAft>
-                <a:spcPts val="300"/>
-              </a:spcAft>
-              <a:buNone/>
-            </a:pPr>
-            <a:r>
-              <a:rPr sz="1600" b="0">
-                <a:solidFill>
-                  <a:srgbClr val="000000"/>
-                </a:solidFill>
-                <a:latin typeface="맑은 고딕"/>
-                <a:ea typeface="맑은 고딕"/>
-              </a:rPr>
-              <a:t>42. 변화 대응 보완 </a:t>
-            </a:r>
-            <a:r>
-              <a:rPr sz="1200" b="0">
-                <a:solidFill>
-                  <a:srgbClr val="000000"/>
-                </a:solidFill>
-                <a:latin typeface="맑은 고딕"/>
-                <a:ea typeface="맑은 고딕"/>
-              </a:rPr>
-              <a:t>(안)</a:t>
-            </a:r>
-          </a:p>
-          <a:p>
-            <a:pPr lvl="1" marL="355600" indent="0">
-              <a:spcBef>
-                <a:spcPts val="300"/>
-              </a:spcBef>
-              <a:spcAft>
-                <a:spcPts val="300"/>
-              </a:spcAft>
-              <a:buNone/>
-            </a:pPr>
-            <a:r>
-              <a:rPr sz="1600" b="0">
-                <a:solidFill>
-                  <a:srgbClr val="000000"/>
-                </a:solidFill>
-                <a:latin typeface="맑은 고딕"/>
-                <a:ea typeface="맑은 고딕"/>
-              </a:rPr>
-              <a:t>43. 요약</a:t>
+              <a:t>39. 요약</a:t>
             </a:r>
           </a:p>
         </p:txBody>
@@ -35075,6 +34951,627 @@
         <p:cNvPr id="1" name="">
           <a:extLst>
             <a:ext uri="{FF2B5EF4-FFF2-40B4-BE49-F238E27FC236}">
+              <a16:creationId xmlns:a16="http://schemas.microsoft.com/office/drawing/2014/main" id="{8E4F1F13-426B-086B-7D8C-9A58A0F879DB}"/>
+            </a:ext>
+          </a:extLst>
+        </p:cNvPr>
+        <p:cNvGrpSpPr/>
+        <p:nvPr/>
+      </p:nvGrpSpPr>
+      <p:grpSpPr>
+        <a:xfrm>
+          <a:off x="0" y="0"/>
+          <a:ext cx="0" cy="0"/>
+          <a:chOff x="0" y="0"/>
+          <a:chExt cx="0" cy="0"/>
+        </a:xfrm>
+      </p:grpSpPr>
+      <p:sp>
+        <p:nvSpPr>
+          <p:cNvPr id="2" name="제목 1">
+            <a:extLst>
+              <a:ext uri="{FF2B5EF4-FFF2-40B4-BE49-F238E27FC236}">
+                <a16:creationId xmlns:a16="http://schemas.microsoft.com/office/drawing/2014/main" id="{AA26A92D-924E-0575-9551-F8FD7BFD3FAD}"/>
+              </a:ext>
+            </a:extLst>
+          </p:cNvPr>
+          <p:cNvSpPr>
+            <a:spLocks noGrp="1"/>
+          </p:cNvSpPr>
+          <p:nvPr>
+            <p:ph type="title"/>
+          </p:nvPr>
+        </p:nvSpPr>
+        <p:spPr/>
+        <p:txBody>
+          <a:bodyPr/>
+          <a:lstStyle/>
+          <a:p>
+            <a:r>
+              <a:rPr sz="2400" b="1">
+                <a:solidFill>
+                  <a:srgbClr val="000000"/>
+                </a:solidFill>
+                <a:latin typeface="맑은 고딕"/>
+                <a:ea typeface="맑은 고딕"/>
+              </a:rPr>
+              <a:t>39. 요약</a:t>
+            </a:r>
+          </a:p>
+        </p:txBody>
+      </p:sp>
+      <p:sp>
+        <p:nvSpPr>
+          <p:cNvPr id="3" name="슬라이드 번호 개체 틀 2">
+            <a:extLst>
+              <a:ext uri="{FF2B5EF4-FFF2-40B4-BE49-F238E27FC236}">
+                <a16:creationId xmlns:a16="http://schemas.microsoft.com/office/drawing/2014/main" id="{12CF30EE-4DFD-8063-56B8-B8689E76DFCA}"/>
+              </a:ext>
+            </a:extLst>
+          </p:cNvPr>
+          <p:cNvSpPr>
+            <a:spLocks noGrp="1"/>
+          </p:cNvSpPr>
+          <p:nvPr>
+            <p:ph type="sldNum" sz="quarter" idx="10"/>
+          </p:nvPr>
+        </p:nvSpPr>
+        <p:spPr/>
+        <p:txBody>
+          <a:bodyPr/>
+          <a:lstStyle/>
+          <a:p>
+            <a:pPr>
+              <a:defRPr/>
+            </a:pPr>
+            <a:r>
+              <a:rPr lang="en-US" altLang="ko-KR">
+                <a:solidFill>
+                  <a:prstClr val="black"/>
+                </a:solidFill>
+              </a:rPr>
+              <a:t>- 41 -</a:t>
+            </a:r>
+          </a:p>
+        </p:txBody>
+      </p:sp>
+      <p:sp>
+        <p:nvSpPr>
+          <p:cNvPr id="5" name="텍스트 개체 틀 4">
+            <a:extLst>
+              <a:ext uri="{FF2B5EF4-FFF2-40B4-BE49-F238E27FC236}">
+                <a16:creationId xmlns:a16="http://schemas.microsoft.com/office/drawing/2014/main" id="{D66274C8-E16F-5AEB-614B-D8D32DA3E8C6}"/>
+              </a:ext>
+            </a:extLst>
+          </p:cNvPr>
+          <p:cNvSpPr>
+            <a:spLocks noGrp="1"/>
+          </p:cNvSpPr>
+          <p:nvPr>
+            <p:ph type="body" sz="quarter" idx="11"/>
+          </p:nvPr>
+        </p:nvSpPr>
+        <p:spPr/>
+        <p:txBody>
+          <a:bodyPr/>
+          <a:lstStyle/>
+          <a:p>
+            <a:r>
+              <a:rPr kumimoji="1" lang="en-US" altLang="ko-KR" sz="1400" dirty="0" err="1"/>
+              <a:t>08. 변화 대응과 변이 설계</a:t>
+            </a:r>
+          </a:p>
+        </p:txBody>
+      </p:sp>
+      <p:sp>
+        <p:nvSpPr>
+          <p:cNvPr id="6" name="텍스트 개체 틀 5">
+            <a:extLst>
+              <a:ext uri="{FF2B5EF4-FFF2-40B4-BE49-F238E27FC236}">
+                <a16:creationId xmlns:a16="http://schemas.microsoft.com/office/drawing/2014/main" id="{A24E58E1-194B-A320-AEEE-24D08685BB67}"/>
+              </a:ext>
+            </a:extLst>
+          </p:cNvPr>
+          <p:cNvSpPr>
+            <a:spLocks noGrp="1"/>
+          </p:cNvSpPr>
+          <p:nvPr>
+            <p:ph type="body" sz="quarter" idx="12"/>
+          </p:nvPr>
+        </p:nvSpPr>
+        <p:spPr/>
+        <p:txBody>
+          <a:bodyPr/>
+          <a:lstStyle/>
+          <a:p>
+            <a:endParaRPr kumimoji="1" lang="ko-KR" altLang="en-US" dirty="0"/>
+          </a:p>
+        </p:txBody>
+      </p:sp>
+      <p:sp>
+        <p:nvSpPr>
+          <p:cNvPr id="7" name="텍스트 개체 틀 6">
+            <a:extLst>
+              <a:ext uri="{FF2B5EF4-FFF2-40B4-BE49-F238E27FC236}">
+                <a16:creationId xmlns:a16="http://schemas.microsoft.com/office/drawing/2014/main" id="{A219F420-613B-6234-45F6-0955A9A4505F}"/>
+              </a:ext>
+            </a:extLst>
+          </p:cNvPr>
+          <p:cNvSpPr>
+            <a:spLocks noGrp="1"/>
+          </p:cNvSpPr>
+          <p:nvPr>
+            <p:ph type="body" sz="quarter" idx="13"/>
+          </p:nvPr>
+        </p:nvSpPr>
+        <p:spPr/>
+        <p:txBody>
+          <a:bodyPr/>
+          <a:lstStyle/>
+          <a:p>
+            <a:endParaRPr kumimoji="1" lang="en-US" altLang="ko-KR" dirty="0"/>
+          </a:p>
+        </p:txBody>
+      </p:sp>
+      <p:sp>
+        <p:nvSpPr>
+          <p:cNvPr id="8" name="내용 개체 틀 7">
+            <a:extLst>
+              <a:ext uri="{FF2B5EF4-FFF2-40B4-BE49-F238E27FC236}">
+                <a16:creationId xmlns:a16="http://schemas.microsoft.com/office/drawing/2014/main" id="{BEBA2C4A-B0BF-F2E4-EA6E-614C99CBA184}"/>
+              </a:ext>
+            </a:extLst>
+          </p:cNvPr>
+          <p:cNvSpPr>
+            <a:spLocks noGrp="1"/>
+          </p:cNvSpPr>
+          <p:nvPr>
+            <p:ph idx="1"/>
+          </p:nvPr>
+        </p:nvSpPr>
+        <p:spPr/>
+        <p:txBody>
+          <a:bodyPr>
+            <a:normAutofit/>
+          </a:bodyPr>
+          <a:lstStyle/>
+          <a:p>
+            <a:pPr marL="0" indent="0">
+              <a:spcBef>
+                <a:spcPts val="600"/>
+              </a:spcBef>
+              <a:spcAft>
+                <a:spcPts val="600"/>
+              </a:spcAft>
+              <a:buNone/>
+            </a:pPr>
+            <a:r>
+              <a:rPr sz="1800" b="0">
+                <a:solidFill>
+                  <a:srgbClr val="000000"/>
+                </a:solidFill>
+                <a:latin typeface="맑은 고딕"/>
+                <a:ea typeface="맑은 고딕"/>
+              </a:rPr>
+              <a:t>이 세션은 </a:t>
+            </a:r>
+            <a:r>
+              <a:rPr sz="1800" b="1">
+                <a:solidFill>
+                  <a:srgbClr val="000000"/>
+                </a:solidFill>
+                <a:latin typeface="맑은 고딕"/>
+                <a:ea typeface="맑은 고딕"/>
+              </a:rPr>
+              <a:t>실제 변경 요청</a:t>
+            </a:r>
+            <a:r>
+              <a:rPr sz="1800" b="0">
+                <a:solidFill>
+                  <a:srgbClr val="000000"/>
+                </a:solidFill>
+                <a:latin typeface="맑은 고딕"/>
+                <a:ea typeface="맑은 고딕"/>
+              </a:rPr>
+              <a:t>으로 설계의 파급을 관찰하고, 변화를 </a:t>
+            </a:r>
+            <a:r>
+              <a:rPr sz="1800" b="1">
+                <a:solidFill>
+                  <a:srgbClr val="000000"/>
+                </a:solidFill>
+                <a:latin typeface="맑은 고딕"/>
+                <a:ea typeface="맑은 고딕"/>
+              </a:rPr>
+              <a:t>국소화</a:t>
+            </a:r>
+            <a:r>
+              <a:rPr sz="1800" b="0">
+                <a:solidFill>
+                  <a:srgbClr val="000000"/>
+                </a:solidFill>
+                <a:latin typeface="맑은 고딕"/>
+                <a:ea typeface="맑은 고딕"/>
+              </a:rPr>
+              <a:t>하는 설계를 만들었다.</a:t>
+            </a:r>
+          </a:p>
+          <a:p>
+            <a:pPr marL="342900" indent="0">
+              <a:spcBef>
+                <a:spcPts val="600"/>
+              </a:spcBef>
+              <a:spcAft>
+                <a:spcPts val="600"/>
+              </a:spcAft>
+              <a:buNone/>
+            </a:pPr>
+            <a:r>
+              <a:rPr sz="1800" b="1">
+                <a:solidFill>
+                  <a:srgbClr val="000000"/>
+                </a:solidFill>
+                <a:latin typeface="맑은 고딕"/>
+                <a:ea typeface="맑은 고딕"/>
+              </a:rPr>
+              <a:t>변화 대응과 변이 설계의 핵심</a:t>
+            </a:r>
+          </a:p>
+          <a:p>
+            <a:pPr lvl="2" marL="723900" indent="-368300">
+              <a:spcBef>
+                <a:spcPts val="600"/>
+              </a:spcBef>
+              <a:spcAft>
+                <a:spcPts val="600"/>
+              </a:spcAft>
+              <a:buSzPct val="90000"/>
+              <a:buFont typeface="Wingdings" pitchFamily="2" charset="2"/>
+              <a:buChar char=""/>
+            </a:pPr>
+            <a:r>
+              <a:rPr sz="1800" b="1">
+                <a:solidFill>
+                  <a:srgbClr val="000000"/>
+                </a:solidFill>
+                <a:latin typeface="맑은 고딕"/>
+                <a:ea typeface="맑은 고딕"/>
+              </a:rPr>
+              <a:t>판단</a:t>
+            </a:r>
+            <a:r>
+              <a:rPr sz="1800" b="0">
+                <a:solidFill>
+                  <a:srgbClr val="000000"/>
+                </a:solidFill>
+                <a:latin typeface="맑은 고딕"/>
+                <a:ea typeface="맑은 고딕"/>
+              </a:rPr>
+              <a:t> —</a:t>
+            </a:r>
+            <a:r>
+              <a:rPr sz="1600" b="0">
+                <a:solidFill>
+                  <a:srgbClr val="000000"/>
+                </a:solidFill>
+                <a:latin typeface="맑은 고딕"/>
+                <a:ea typeface="맑은 고딕"/>
+              </a:rPr>
+              <a:t> 모든 변이가 아니라 실제 변경 압력을 국소화한다</a:t>
+            </a:r>
+          </a:p>
+          <a:p>
+            <a:pPr lvl="2" marL="723900" indent="-368300">
+              <a:spcBef>
+                <a:spcPts val="600"/>
+              </a:spcBef>
+              <a:spcAft>
+                <a:spcPts val="600"/>
+              </a:spcAft>
+              <a:buSzPct val="90000"/>
+              <a:buFont typeface="Wingdings" pitchFamily="2" charset="2"/>
+              <a:buChar char=""/>
+            </a:pPr>
+            <a:r>
+              <a:rPr sz="1800" b="1">
+                <a:solidFill>
+                  <a:srgbClr val="000000"/>
+                </a:solidFill>
+                <a:latin typeface="맑은 고딕"/>
+                <a:ea typeface="맑은 고딕"/>
+              </a:rPr>
+              <a:t>파급</a:t>
+            </a:r>
+            <a:r>
+              <a:rPr sz="1800" b="0">
+                <a:solidFill>
+                  <a:srgbClr val="000000"/>
+                </a:solidFill>
+                <a:latin typeface="맑은 고딕"/>
+                <a:ea typeface="맑은 고딕"/>
+              </a:rPr>
+              <a:t> —</a:t>
+            </a:r>
+            <a:r>
+              <a:rPr sz="1600" b="0">
+                <a:solidFill>
+                  <a:srgbClr val="000000"/>
+                </a:solidFill>
+                <a:latin typeface="맑은 고딕"/>
+                <a:ea typeface="맑은 고딕"/>
+              </a:rPr>
+              <a:t> 바뀌는 곳과 그대로인 곳을 적어 경직성을 드러낸다</a:t>
+            </a:r>
+          </a:p>
+          <a:p>
+            <a:pPr lvl="2" marL="723900" indent="-368300">
+              <a:spcBef>
+                <a:spcPts val="600"/>
+              </a:spcBef>
+              <a:spcAft>
+                <a:spcPts val="600"/>
+              </a:spcAft>
+              <a:buSzPct val="90000"/>
+              <a:buFont typeface="Wingdings" pitchFamily="2" charset="2"/>
+              <a:buChar char=""/>
+            </a:pPr>
+            <a:r>
+              <a:rPr sz="1800" b="1">
+                <a:solidFill>
+                  <a:srgbClr val="000000"/>
+                </a:solidFill>
+                <a:latin typeface="맑은 고딕"/>
+                <a:ea typeface="맑은 고딕"/>
+              </a:rPr>
+              <a:t>지점</a:t>
+            </a:r>
+            <a:r>
+              <a:rPr sz="1800" b="0">
+                <a:solidFill>
+                  <a:srgbClr val="000000"/>
+                </a:solidFill>
+                <a:latin typeface="맑은 고딕"/>
+                <a:ea typeface="맑은 고딕"/>
+              </a:rPr>
+              <a:t> —</a:t>
+            </a:r>
+            <a:r>
+              <a:rPr sz="1600" b="0">
+                <a:solidFill>
+                  <a:srgbClr val="000000"/>
+                </a:solidFill>
+                <a:latin typeface="맑은 고딕"/>
+                <a:ea typeface="맑은 고딕"/>
+              </a:rPr>
+              <a:t> 변이 지점은 지금 보호하고, 진화 지점은 추측으로 남긴다</a:t>
+            </a:r>
+          </a:p>
+          <a:p>
+            <a:pPr lvl="2" marL="723900" indent="-368300">
+              <a:spcBef>
+                <a:spcPts val="600"/>
+              </a:spcBef>
+              <a:spcAft>
+                <a:spcPts val="600"/>
+              </a:spcAft>
+              <a:buSzPct val="90000"/>
+              <a:buFont typeface="Wingdings" pitchFamily="2" charset="2"/>
+              <a:buChar char=""/>
+            </a:pPr>
+            <a:r>
+              <a:rPr sz="1800" b="1">
+                <a:solidFill>
+                  <a:srgbClr val="000000"/>
+                </a:solidFill>
+                <a:latin typeface="맑은 고딕"/>
+                <a:ea typeface="맑은 고딕"/>
+              </a:rPr>
+              <a:t>원칙</a:t>
+            </a:r>
+            <a:r>
+              <a:rPr sz="1800" b="0">
+                <a:solidFill>
+                  <a:srgbClr val="000000"/>
+                </a:solidFill>
+                <a:latin typeface="맑은 고딕"/>
+                <a:ea typeface="맑은 고딕"/>
+              </a:rPr>
+              <a:t> —</a:t>
+            </a:r>
+            <a:r>
+              <a:rPr sz="1600" b="0">
+                <a:solidFill>
+                  <a:srgbClr val="000000"/>
+                </a:solidFill>
+                <a:latin typeface="맑은 고딕"/>
+                <a:ea typeface="맑은 고딕"/>
+              </a:rPr>
+              <a:t> OCP·보호된 변이·다형성·간접화·합성·구조 숨기기</a:t>
+            </a:r>
+          </a:p>
+          <a:p>
+            <a:pPr lvl="2" marL="723900" indent="-368300">
+              <a:spcBef>
+                <a:spcPts val="600"/>
+              </a:spcBef>
+              <a:spcAft>
+                <a:spcPts val="600"/>
+              </a:spcAft>
+              <a:buSzPct val="90000"/>
+              <a:buFont typeface="Wingdings" pitchFamily="2" charset="2"/>
+              <a:buChar char=""/>
+            </a:pPr>
+            <a:r>
+              <a:rPr sz="1800" b="1">
+                <a:solidFill>
+                  <a:srgbClr val="000000"/>
+                </a:solidFill>
+                <a:latin typeface="맑은 고딕"/>
+                <a:ea typeface="맑은 고딕"/>
+              </a:rPr>
+              <a:t>패턴</a:t>
+            </a:r>
+            <a:r>
+              <a:rPr sz="1800" b="0">
+                <a:solidFill>
+                  <a:srgbClr val="000000"/>
+                </a:solidFill>
+                <a:latin typeface="맑은 고딕"/>
+                <a:ea typeface="맑은 고딕"/>
+              </a:rPr>
+              <a:t> —</a:t>
+            </a:r>
+            <a:r>
+              <a:rPr sz="1600" b="0">
+                <a:solidFill>
+                  <a:srgbClr val="000000"/>
+                </a:solidFill>
+                <a:latin typeface="맑은 고딕"/>
+                <a:ea typeface="맑은 고딕"/>
+              </a:rPr>
+              <a:t> 어댑터·전략은 원칙을 구조로 옮긴 어휘. 압력에서 출발한다</a:t>
+            </a:r>
+          </a:p>
+          <a:p>
+            <a:pPr lvl="2" marL="723900" indent="-368300">
+              <a:spcBef>
+                <a:spcPts val="600"/>
+              </a:spcBef>
+              <a:spcAft>
+                <a:spcPts val="600"/>
+              </a:spcAft>
+              <a:buSzPct val="90000"/>
+              <a:buFont typeface="Wingdings" pitchFamily="2" charset="2"/>
+              <a:buChar char=""/>
+            </a:pPr>
+            <a:r>
+              <a:rPr sz="1800" b="1">
+                <a:solidFill>
+                  <a:srgbClr val="000000"/>
+                </a:solidFill>
+                <a:latin typeface="맑은 고딕"/>
+                <a:ea typeface="맑은 고딕"/>
+              </a:rPr>
+              <a:t>잘못된 관행</a:t>
+            </a:r>
+            <a:r>
+              <a:rPr sz="1800" b="0">
+                <a:solidFill>
+                  <a:srgbClr val="000000"/>
+                </a:solidFill>
+                <a:latin typeface="맑은 고딕"/>
+                <a:ea typeface="맑은 고딕"/>
+              </a:rPr>
+              <a:t> —</a:t>
+            </a:r>
+            <a:r>
+              <a:rPr sz="1600" b="0">
+                <a:solidFill>
+                  <a:srgbClr val="000000"/>
+                </a:solidFill>
+                <a:latin typeface="맑은 고딕"/>
+                <a:ea typeface="맑은 고딕"/>
+              </a:rPr>
+              <a:t> 추측성 일반화, 흩어진 변경, 타입 검사 분기, 패턴 과잉</a:t>
+            </a:r>
+          </a:p>
+          <a:p>
+            <a:pPr marL="342900" indent="0">
+              <a:spcBef>
+                <a:spcPts val="600"/>
+              </a:spcBef>
+              <a:spcAft>
+                <a:spcPts val="600"/>
+              </a:spcAft>
+              <a:buNone/>
+            </a:pPr>
+            <a:r>
+              <a:rPr sz="1800" b="1">
+                <a:solidFill>
+                  <a:srgbClr val="000000"/>
+                </a:solidFill>
+                <a:latin typeface="맑은 고딕"/>
+                <a:ea typeface="맑은 고딕"/>
+              </a:rPr>
+              <a:t>다음 세션</a:t>
+            </a:r>
+          </a:p>
+          <a:p>
+            <a:pPr lvl="2" marL="723900" indent="-368300">
+              <a:spcBef>
+                <a:spcPts val="600"/>
+              </a:spcBef>
+              <a:spcAft>
+                <a:spcPts val="600"/>
+              </a:spcAft>
+              <a:buSzPct val="90000"/>
+              <a:buFont typeface="Wingdings" pitchFamily="2" charset="2"/>
+              <a:buChar char=""/>
+            </a:pPr>
+            <a:r>
+              <a:rPr sz="1800" b="0">
+                <a:solidFill>
+                  <a:srgbClr val="000000"/>
+                </a:solidFill>
+                <a:latin typeface="맑은 고딕"/>
+                <a:ea typeface="맑은 고딕"/>
+              </a:rPr>
+              <a:t>"</a:t>
+            </a:r>
+            <a:r>
+              <a:rPr sz="1800" b="1">
+                <a:solidFill>
+                  <a:srgbClr val="000000"/>
+                </a:solidFill>
+                <a:latin typeface="맑은 고딕"/>
+                <a:ea typeface="맑은 고딕"/>
+              </a:rPr>
+              <a:t>09. 설계 대안 평가</a:t>
+            </a:r>
+            <a:r>
+              <a:rPr sz="1800" b="0">
+                <a:solidFill>
+                  <a:srgbClr val="000000"/>
+                </a:solidFill>
+                <a:latin typeface="맑은 고딕"/>
+                <a:ea typeface="맑은 고딕"/>
+              </a:rPr>
+              <a:t>" —</a:t>
+            </a:r>
+            <a:r>
+              <a:rPr sz="1600" b="0">
+                <a:solidFill>
+                  <a:srgbClr val="000000"/>
+                </a:solidFill>
+                <a:latin typeface="맑은 고딕"/>
+                <a:ea typeface="맑은 고딕"/>
+              </a:rPr>
+              <a:t> 동일한 문제에 대한 여러 설계 대안을 change impact·품질·비용·trade-off 관점에서 비교하고 선택한다.</a:t>
+            </a:r>
+          </a:p>
+        </p:txBody>
+      </p:sp>
+    </p:spTree>
+    <p:extLst>
+      <p:ext uri="{BB962C8B-B14F-4D97-AF65-F5344CB8AC3E}">
+        <p14:creationId xmlns:p14="http://schemas.microsoft.com/office/powerpoint/2010/main" val="3555436673"/>
+      </p:ext>
+    </p:extLst>
+  </p:cSld>
+  <p:clrMapOvr>
+    <a:masterClrMapping/>
+  </p:clrMapOvr>
+</p:sld>
+</file>
+
+<file path=ppt/slides/slide42.xml><?xml version="1.0" encoding="utf-8"?>
+<p:sld xmlns:a="http://schemas.openxmlformats.org/drawingml/2006/main" xmlns:r="http://schemas.openxmlformats.org/officeDocument/2006/relationships" xmlns:p="http://schemas.openxmlformats.org/presentationml/2006/main">
+  <p:cSld>
+    <p:spTree>
+      <p:nvGrpSpPr>
+        <p:cNvPr id="1" name="">
+          <a:extLst>
+            <a:ext uri="{FF2B5EF4-FFF2-40B4-BE49-F238E27FC236}">
               <a16:creationId xmlns:a16="http://schemas.microsoft.com/office/drawing/2014/main" id="{60B87152-D004-1569-E429-90A42420A65C}"/>
             </a:ext>
           </a:extLst>
@@ -35119,7 +35616,7 @@
                 <a:latin typeface="맑은 고딕"/>
                 <a:ea typeface="맑은 고딕"/>
               </a:rPr>
-              <a:t>39. 변경 영향 분석 </a:t>
+              <a:t>변경 영향 분석 </a:t>
             </a:r>
             <a:r>
               <a:rPr sz="1800" b="1">
@@ -35130,6 +35627,18 @@
                 <a:ea typeface="맑은 고딕"/>
               </a:rPr>
               <a:t>(안)</a:t>
+            </a:r>
+          </a:p>
+          <a:p>
+            <a:r>
+              <a:rPr sz="1100" b="1">
+                <a:solidFill>
+                  <a:srgbClr val="000000"/>
+                </a:solidFill>
+                <a:latin typeface="맑은 고딕"/>
+                <a:ea typeface="맑은 고딕"/>
+              </a:rPr>
+              <a:t>별첨. 실습 답</a:t>
             </a:r>
           </a:p>
         </p:txBody>
@@ -35157,7 +35666,7 @@
           <a:p>
             <a:r>
               <a:rPr kumimoji="1" lang="en-US" altLang="ko-KR" sz="1400" dirty="0" err="1"/>
-              <a:t>08. 변화 대응과 변이 설계</a:t>
+              <a:t>별첨: 08. 변화 대응과 변이 설계</a:t>
             </a:r>
           </a:p>
         </p:txBody>
@@ -36631,7 +37140,7 @@
                 <a:ea typeface="맑은 고딕" panose="020B0503020000020004" pitchFamily="34" charset="-127"/>
                 <a:cs typeface="+mn-cs"/>
               </a:rPr>
-              <a:t>- 41 -</a:t>
+              <a:t>- 42 -</a:t>
             </a:r>
           </a:p>
         </p:txBody>
@@ -36640,867 +37149,6 @@
     <p:extLst>
       <p:ext uri="{BB962C8B-B14F-4D97-AF65-F5344CB8AC3E}">
         <p14:creationId xmlns:p14="http://schemas.microsoft.com/office/powerpoint/2010/main" val="2789569477"/>
-      </p:ext>
-    </p:extLst>
-  </p:cSld>
-  <p:clrMapOvr>
-    <a:masterClrMapping/>
-  </p:clrMapOvr>
-</p:sld>
-</file>
-
-<file path=ppt/slides/slide42.xml><?xml version="1.0" encoding="utf-8"?>
-<p:sld xmlns:a="http://schemas.openxmlformats.org/drawingml/2006/main" xmlns:r="http://schemas.openxmlformats.org/officeDocument/2006/relationships" xmlns:p="http://schemas.openxmlformats.org/presentationml/2006/main">
-  <p:cSld>
-    <p:spTree>
-      <p:nvGrpSpPr>
-        <p:cNvPr id="1" name="">
-          <a:extLst>
-            <a:ext uri="{FF2B5EF4-FFF2-40B4-BE49-F238E27FC236}">
-              <a16:creationId xmlns:a16="http://schemas.microsoft.com/office/drawing/2014/main" id="{8E4F1F13-426B-086B-7D8C-9A58A0F879DB}"/>
-            </a:ext>
-          </a:extLst>
-        </p:cNvPr>
-        <p:cNvGrpSpPr/>
-        <p:nvPr/>
-      </p:nvGrpSpPr>
-      <p:grpSpPr>
-        <a:xfrm>
-          <a:off x="0" y="0"/>
-          <a:ext cx="0" cy="0"/>
-          <a:chOff x="0" y="0"/>
-          <a:chExt cx="0" cy="0"/>
-        </a:xfrm>
-      </p:grpSpPr>
-      <p:sp>
-        <p:nvSpPr>
-          <p:cNvPr id="2" name="제목 1">
-            <a:extLst>
-              <a:ext uri="{FF2B5EF4-FFF2-40B4-BE49-F238E27FC236}">
-                <a16:creationId xmlns:a16="http://schemas.microsoft.com/office/drawing/2014/main" id="{AA26A92D-924E-0575-9551-F8FD7BFD3FAD}"/>
-              </a:ext>
-            </a:extLst>
-          </p:cNvPr>
-          <p:cNvSpPr>
-            <a:spLocks noGrp="1"/>
-          </p:cNvSpPr>
-          <p:nvPr>
-            <p:ph type="title"/>
-          </p:nvPr>
-        </p:nvSpPr>
-        <p:spPr/>
-        <p:txBody>
-          <a:bodyPr/>
-          <a:lstStyle/>
-          <a:p>
-            <a:r>
-              <a:rPr sz="2400" b="1">
-                <a:solidFill>
-                  <a:srgbClr val="000000"/>
-                </a:solidFill>
-                <a:latin typeface="맑은 고딕"/>
-                <a:ea typeface="맑은 고딕"/>
-              </a:rPr>
-              <a:t>40. 변이 설계 </a:t>
-            </a:r>
-            <a:r>
-              <a:rPr sz="1800" b="1">
-                <a:solidFill>
-                  <a:srgbClr val="000000"/>
-                </a:solidFill>
-                <a:latin typeface="맑은 고딕"/>
-                <a:ea typeface="맑은 고딕"/>
-              </a:rPr>
-              <a:t>(안)</a:t>
-            </a:r>
-          </a:p>
-        </p:txBody>
-      </p:sp>
-      <p:sp>
-        <p:nvSpPr>
-          <p:cNvPr id="3" name="슬라이드 번호 개체 틀 2">
-            <a:extLst>
-              <a:ext uri="{FF2B5EF4-FFF2-40B4-BE49-F238E27FC236}">
-                <a16:creationId xmlns:a16="http://schemas.microsoft.com/office/drawing/2014/main" id="{12CF30EE-4DFD-8063-56B8-B8689E76DFCA}"/>
-              </a:ext>
-            </a:extLst>
-          </p:cNvPr>
-          <p:cNvSpPr>
-            <a:spLocks noGrp="1"/>
-          </p:cNvSpPr>
-          <p:nvPr>
-            <p:ph type="sldNum" sz="quarter" idx="10"/>
-          </p:nvPr>
-        </p:nvSpPr>
-        <p:spPr/>
-        <p:txBody>
-          <a:bodyPr/>
-          <a:lstStyle/>
-          <a:p>
-            <a:pPr>
-              <a:defRPr/>
-            </a:pPr>
-            <a:r>
-              <a:rPr lang="en-US" altLang="ko-KR">
-                <a:solidFill>
-                  <a:prstClr val="black"/>
-                </a:solidFill>
-              </a:rPr>
-              <a:t>- 42 -</a:t>
-            </a:r>
-          </a:p>
-        </p:txBody>
-      </p:sp>
-      <p:sp>
-        <p:nvSpPr>
-          <p:cNvPr id="5" name="텍스트 개체 틀 4">
-            <a:extLst>
-              <a:ext uri="{FF2B5EF4-FFF2-40B4-BE49-F238E27FC236}">
-                <a16:creationId xmlns:a16="http://schemas.microsoft.com/office/drawing/2014/main" id="{D66274C8-E16F-5AEB-614B-D8D32DA3E8C6}"/>
-              </a:ext>
-            </a:extLst>
-          </p:cNvPr>
-          <p:cNvSpPr>
-            <a:spLocks noGrp="1"/>
-          </p:cNvSpPr>
-          <p:nvPr>
-            <p:ph type="body" sz="quarter" idx="11"/>
-          </p:nvPr>
-        </p:nvSpPr>
-        <p:spPr/>
-        <p:txBody>
-          <a:bodyPr/>
-          <a:lstStyle/>
-          <a:p>
-            <a:r>
-              <a:rPr kumimoji="1" lang="en-US" altLang="ko-KR" sz="1400" dirty="0" err="1"/>
-              <a:t>08. 변화 대응과 변이 설계</a:t>
-            </a:r>
-          </a:p>
-        </p:txBody>
-      </p:sp>
-      <p:sp>
-        <p:nvSpPr>
-          <p:cNvPr id="6" name="텍스트 개체 틀 5">
-            <a:extLst>
-              <a:ext uri="{FF2B5EF4-FFF2-40B4-BE49-F238E27FC236}">
-                <a16:creationId xmlns:a16="http://schemas.microsoft.com/office/drawing/2014/main" id="{A24E58E1-194B-A320-AEEE-24D08685BB67}"/>
-              </a:ext>
-            </a:extLst>
-          </p:cNvPr>
-          <p:cNvSpPr>
-            <a:spLocks noGrp="1"/>
-          </p:cNvSpPr>
-          <p:nvPr>
-            <p:ph type="body" sz="quarter" idx="12"/>
-          </p:nvPr>
-        </p:nvSpPr>
-        <p:spPr/>
-        <p:txBody>
-          <a:bodyPr/>
-          <a:lstStyle/>
-          <a:p>
-            <a:endParaRPr kumimoji="1" lang="ko-KR" altLang="en-US" dirty="0"/>
-          </a:p>
-        </p:txBody>
-      </p:sp>
-      <p:sp>
-        <p:nvSpPr>
-          <p:cNvPr id="7" name="텍스트 개체 틀 6">
-            <a:extLst>
-              <a:ext uri="{FF2B5EF4-FFF2-40B4-BE49-F238E27FC236}">
-                <a16:creationId xmlns:a16="http://schemas.microsoft.com/office/drawing/2014/main" id="{A219F420-613B-6234-45F6-0955A9A4505F}"/>
-              </a:ext>
-            </a:extLst>
-          </p:cNvPr>
-          <p:cNvSpPr>
-            <a:spLocks noGrp="1"/>
-          </p:cNvSpPr>
-          <p:nvPr>
-            <p:ph type="body" sz="quarter" idx="13"/>
-          </p:nvPr>
-        </p:nvSpPr>
-        <p:spPr/>
-        <p:txBody>
-          <a:bodyPr/>
-          <a:lstStyle/>
-          <a:p>
-            <a:endParaRPr kumimoji="1" lang="en-US" altLang="ko-KR" dirty="0"/>
-          </a:p>
-        </p:txBody>
-      </p:sp>
-      <p:sp>
-        <p:nvSpPr>
-          <p:cNvPr id="8" name="내용 개체 틀 7">
-            <a:extLst>
-              <a:ext uri="{FF2B5EF4-FFF2-40B4-BE49-F238E27FC236}">
-                <a16:creationId xmlns:a16="http://schemas.microsoft.com/office/drawing/2014/main" id="{BEBA2C4A-B0BF-F2E4-EA6E-614C99CBA184}"/>
-              </a:ext>
-            </a:extLst>
-          </p:cNvPr>
-          <p:cNvSpPr>
-            <a:spLocks noGrp="1"/>
-          </p:cNvSpPr>
-          <p:nvPr>
-            <p:ph idx="1"/>
-          </p:nvPr>
-        </p:nvSpPr>
-        <p:spPr>
-          <a:xfrm>
-            <a:off x="233172" y="1414318"/>
-            <a:ext cx="4338828" cy="4898147"/>
-          </a:xfrm>
-        </p:spPr>
-        <p:txBody>
-          <a:bodyPr>
-            <a:normAutofit/>
-          </a:bodyPr>
-          <a:lstStyle/>
-          <a:p>
-            <a:pPr lvl="2" marL="228600" indent="-182880">
-              <a:spcBef>
-                <a:spcPts val="300"/>
-              </a:spcBef>
-              <a:spcAft>
-                <a:spcPts val="300"/>
-              </a:spcAft>
-              <a:buSzPct val="90000"/>
-              <a:buFont typeface="Wingdings" pitchFamily="2" charset="2"/>
-              <a:buChar char=""/>
-            </a:pPr>
-            <a:r>
-              <a:rPr sz="1400" b="1">
-                <a:solidFill>
-                  <a:srgbClr val="000000"/>
-                </a:solidFill>
-                <a:latin typeface="맑은 고딕"/>
-                <a:ea typeface="맑은 고딕"/>
-              </a:rPr>
-              <a:t>배송 주기 </a:t>
-            </a:r>
-            <a:r>
-              <a:rPr sz="1400" b="1">
-                <a:solidFill>
-                  <a:srgbClr val="000000"/>
-                </a:solidFill>
-                <a:latin typeface="맑은 고딕"/>
-                <a:ea typeface="맑은 고딕"/>
-              </a:rPr>
-              <a:t>DeliveryCycle</a:t>
-            </a:r>
-          </a:p>
-          <a:p>
-            <a:pPr lvl="3" marL="457200" indent="-182880">
-              <a:spcBef>
-                <a:spcPts val="300"/>
-              </a:spcBef>
-              <a:spcAft>
-                <a:spcPts val="300"/>
-              </a:spcAft>
-              <a:buSzPct val="90000"/>
-              <a:buFont typeface="Wingdings" pitchFamily="2" charset="2"/>
-              <a:buChar char=""/>
-            </a:pPr>
-            <a:r>
-              <a:rPr sz="1200" b="1">
-                <a:solidFill>
-                  <a:srgbClr val="000000"/>
-                </a:solidFill>
-                <a:latin typeface="맑은 고딕"/>
-                <a:ea typeface="맑은 고딕"/>
-              </a:rPr>
-              <a:t>약속</a:t>
-            </a:r>
-            <a:r>
-              <a:rPr sz="1200" b="0">
-                <a:solidFill>
-                  <a:srgbClr val="000000"/>
-                </a:solidFill>
-                <a:latin typeface="맑은 고딕"/>
-                <a:ea typeface="맑은 고딕"/>
-              </a:rPr>
-              <a:t> —</a:t>
-            </a:r>
-            <a:r>
-              <a:rPr sz="1000" b="0">
-                <a:solidFill>
-                  <a:srgbClr val="000000"/>
-                </a:solidFill>
-                <a:latin typeface="맑은 고딕"/>
-                <a:ea typeface="맑은 고딕"/>
-              </a:rPr>
-              <a:t> 다음 배송일을 계산한다: </a:t>
-            </a:r>
-            <a:r>
-              <a:rPr sz="1000" b="0">
-                <a:solidFill>
-                  <a:srgbClr val="000000"/>
-                </a:solidFill>
-                <a:latin typeface="맑은 고딕"/>
-                <a:ea typeface="맑은 고딕"/>
-              </a:rPr>
-              <a:t>nextDate(from)</a:t>
-            </a:r>
-          </a:p>
-          <a:p>
-            <a:pPr lvl="3" marL="457200" indent="-182880">
-              <a:spcBef>
-                <a:spcPts val="300"/>
-              </a:spcBef>
-              <a:spcAft>
-                <a:spcPts val="300"/>
-              </a:spcAft>
-              <a:buSzPct val="90000"/>
-              <a:buFont typeface="Wingdings" pitchFamily="2" charset="2"/>
-              <a:buChar char=""/>
-            </a:pPr>
-            <a:r>
-              <a:rPr sz="1200" b="1">
-                <a:solidFill>
-                  <a:srgbClr val="000000"/>
-                </a:solidFill>
-                <a:latin typeface="맑은 고딕"/>
-                <a:ea typeface="맑은 고딕"/>
-              </a:rPr>
-              <a:t>일 간격 </a:t>
-            </a:r>
-            <a:r>
-              <a:rPr sz="1200" b="1">
-                <a:solidFill>
-                  <a:srgbClr val="000000"/>
-                </a:solidFill>
-                <a:latin typeface="맑은 고딕"/>
-                <a:ea typeface="맑은 고딕"/>
-              </a:rPr>
-              <a:t>DailyCycle</a:t>
-            </a:r>
-            <a:r>
-              <a:rPr sz="1200" b="0">
-                <a:solidFill>
-                  <a:srgbClr val="000000"/>
-                </a:solidFill>
-                <a:latin typeface="맑은 고딕"/>
-                <a:ea typeface="맑은 고딕"/>
-              </a:rPr>
-              <a:t> —</a:t>
-            </a:r>
-            <a:r>
-              <a:rPr sz="1000" b="0">
-                <a:solidFill>
-                  <a:srgbClr val="000000"/>
-                </a:solidFill>
-                <a:latin typeface="맑은 고딕"/>
-                <a:ea typeface="맑은 고딕"/>
-              </a:rPr>
-              <a:t> 1~28일마다</a:t>
-            </a:r>
-            <a:r>
-              <a:rPr sz="800" b="0">
-                <a:solidFill>
-                  <a:srgbClr val="000000"/>
-                </a:solidFill>
-                <a:latin typeface="맑은 고딕"/>
-                <a:ea typeface="맑은 고딕"/>
-              </a:rPr>
-              <a:t>(기존 R1)</a:t>
-            </a:r>
-          </a:p>
-          <a:p>
-            <a:pPr lvl="3" marL="457200" indent="-182880">
-              <a:spcBef>
-                <a:spcPts val="300"/>
-              </a:spcBef>
-              <a:spcAft>
-                <a:spcPts val="300"/>
-              </a:spcAft>
-              <a:buSzPct val="90000"/>
-              <a:buFont typeface="Wingdings" pitchFamily="2" charset="2"/>
-              <a:buChar char=""/>
-            </a:pPr>
-            <a:r>
-              <a:rPr sz="1200" b="1">
-                <a:solidFill>
-                  <a:srgbClr val="000000"/>
-                </a:solidFill>
-                <a:latin typeface="맑은 고딕"/>
-                <a:ea typeface="맑은 고딕"/>
-              </a:rPr>
-              <a:t>매월 ○일 </a:t>
-            </a:r>
-            <a:r>
-              <a:rPr sz="1200" b="1">
-                <a:solidFill>
-                  <a:srgbClr val="000000"/>
-                </a:solidFill>
-                <a:latin typeface="맑은 고딕"/>
-                <a:ea typeface="맑은 고딕"/>
-              </a:rPr>
-              <a:t>MonthlyCycle</a:t>
-            </a:r>
-            <a:r>
-              <a:rPr sz="1200" b="0">
-                <a:solidFill>
-                  <a:srgbClr val="000000"/>
-                </a:solidFill>
-                <a:latin typeface="맑은 고딕"/>
-                <a:ea typeface="맑은 고딕"/>
-              </a:rPr>
-              <a:t> —</a:t>
-            </a:r>
-            <a:r>
-              <a:rPr sz="1000" b="0">
-                <a:solidFill>
-                  <a:srgbClr val="000000"/>
-                </a:solidFill>
-                <a:latin typeface="맑은 고딕"/>
-                <a:ea typeface="맑은 고딕"/>
-              </a:rPr>
-              <a:t> 매월 1~28일 중 하루</a:t>
-            </a:r>
-            <a:r>
-              <a:rPr sz="800" b="0">
-                <a:solidFill>
-                  <a:srgbClr val="000000"/>
-                </a:solidFill>
-                <a:latin typeface="맑은 고딕"/>
-                <a:ea typeface="맑은 고딕"/>
-              </a:rPr>
-              <a:t>(요청 B)</a:t>
-            </a:r>
-          </a:p>
-        </p:txBody>
-      </p:sp>
-      <p:sp>
-        <p:nvSpPr>
-          <p:cNvPr id="9" name="내용 개체 틀 7">
-            <a:extLst>
-              <a:ext uri="{FF2B5EF4-FFF2-40B4-BE49-F238E27FC236}">
-                <a16:creationId xmlns:a16="http://schemas.microsoft.com/office/drawing/2014/main" id="{BEBA2C4A-B0BF-F2E4-EA6E-614C99CBA184}"/>
-              </a:ext>
-            </a:extLst>
-          </p:cNvPr>
-          <p:cNvSpPr>
-            <a:spLocks noGrp="1"/>
-          </p:cNvSpPr>
-          <p:nvPr>
-            <p:ph idx="1"/>
-          </p:nvPr>
-        </p:nvSpPr>
-        <p:spPr>
-          <a:xfrm>
-            <a:off x="233172" y="960120"/>
-            <a:ext cx="8778240" cy="454198"/>
-          </a:xfrm>
-        </p:spPr>
-        <p:txBody>
-          <a:bodyPr>
-            <a:normAutofit/>
-          </a:bodyPr>
-          <a:lstStyle/>
-          <a:p>
-            <a:pPr marL="0" indent="0">
-              <a:spcBef>
-                <a:spcPts val="300"/>
-              </a:spcBef>
-              <a:spcAft>
-                <a:spcPts val="300"/>
-              </a:spcAft>
-              <a:buNone/>
-            </a:pPr>
-            <a:r>
-              <a:rPr sz="1400" b="0">
-                <a:solidFill>
-                  <a:srgbClr val="000000"/>
-                </a:solidFill>
-                <a:latin typeface="맑은 고딕"/>
-                <a:ea typeface="맑은 고딕"/>
-              </a:rPr>
-              <a:t>배송 주기를 </a:t>
-            </a:r>
-            <a:r>
-              <a:rPr sz="1400" b="1">
-                <a:solidFill>
-                  <a:srgbClr val="000000"/>
-                </a:solidFill>
-                <a:latin typeface="맑은 고딕"/>
-                <a:ea typeface="맑은 고딕"/>
-              </a:rPr>
-              <a:t>다형성</a:t>
-            </a:r>
-            <a:r>
-              <a:rPr sz="1400" b="0">
-                <a:solidFill>
-                  <a:srgbClr val="000000"/>
-                </a:solidFill>
-                <a:latin typeface="맑은 고딕"/>
-                <a:ea typeface="맑은 고딕"/>
-              </a:rPr>
-              <a:t>으로 바꾼다. 정기배송은 주기에게 "다음 배송일"을 묻지 않고 </a:t>
-            </a:r>
-            <a:r>
-              <a:rPr sz="1400" b="1">
-                <a:solidFill>
-                  <a:srgbClr val="000000"/>
-                </a:solidFill>
-                <a:latin typeface="맑은 고딕"/>
-                <a:ea typeface="맑은 고딕"/>
-              </a:rPr>
-              <a:t>맡긴다</a:t>
-            </a:r>
-            <a:r>
-              <a:rPr sz="1400" b="0">
-                <a:solidFill>
-                  <a:srgbClr val="000000"/>
-                </a:solidFill>
-                <a:latin typeface="맑은 고딕"/>
-                <a:ea typeface="맑은 고딕"/>
-              </a:rPr>
-              <a:t>.</a:t>
-            </a:r>
-          </a:p>
-        </p:txBody>
-      </p:sp>
-      <p:sp>
-        <p:nvSpPr>
-          <p:cNvPr id="10" name="내용 개체 틀 7">
-            <a:extLst>
-              <a:ext uri="{FF2B5EF4-FFF2-40B4-BE49-F238E27FC236}">
-                <a16:creationId xmlns:a16="http://schemas.microsoft.com/office/drawing/2014/main" id="{BEBA2C4A-B0BF-F2E4-EA6E-614C99CBA184}"/>
-              </a:ext>
-            </a:extLst>
-          </p:cNvPr>
-          <p:cNvSpPr>
-            <a:spLocks noGrp="1"/>
-          </p:cNvSpPr>
-          <p:nvPr>
-            <p:ph idx="1"/>
-          </p:nvPr>
-        </p:nvSpPr>
-        <p:spPr>
-          <a:xfrm>
-            <a:off x="4572000" y="1414318"/>
-            <a:ext cx="4439412" cy="4898147"/>
-          </a:xfrm>
-        </p:spPr>
-        <p:txBody>
-          <a:bodyPr>
-            <a:normAutofit/>
-          </a:bodyPr>
-          <a:lstStyle/>
-          <a:p>
-            <a:pPr lvl="2" marL="228600" indent="-182880">
-              <a:spcBef>
-                <a:spcPts val="300"/>
-              </a:spcBef>
-              <a:spcAft>
-                <a:spcPts val="300"/>
-              </a:spcAft>
-              <a:buSzPct val="90000"/>
-              <a:buFont typeface="Wingdings" pitchFamily="2" charset="2"/>
-              <a:buChar char=""/>
-            </a:pPr>
-            <a:r>
-              <a:rPr sz="1400" b="1">
-                <a:solidFill>
-                  <a:srgbClr val="000000"/>
-                </a:solidFill>
-                <a:latin typeface="맑은 고딕"/>
-                <a:ea typeface="맑은 고딕"/>
-              </a:rPr>
-              <a:t>정기배송 </a:t>
-            </a:r>
-            <a:r>
-              <a:rPr sz="1400" b="1">
-                <a:solidFill>
-                  <a:srgbClr val="000000"/>
-                </a:solidFill>
-                <a:latin typeface="맑은 고딕"/>
-                <a:ea typeface="맑은 고딕"/>
-              </a:rPr>
-              <a:t>Subscription</a:t>
-            </a:r>
-          </a:p>
-          <a:p>
-            <a:pPr lvl="3" marL="457200" indent="-182880">
-              <a:spcBef>
-                <a:spcPts val="300"/>
-              </a:spcBef>
-              <a:spcAft>
-                <a:spcPts val="300"/>
-              </a:spcAft>
-              <a:buSzPct val="90000"/>
-              <a:buFont typeface="Wingdings" pitchFamily="2" charset="2"/>
-              <a:buChar char=""/>
-            </a:pPr>
-            <a:r>
-              <a:rPr sz="1200" b="1">
-                <a:solidFill>
-                  <a:srgbClr val="000000"/>
-                </a:solidFill>
-                <a:latin typeface="맑은 고딕"/>
-                <a:ea typeface="맑은 고딕"/>
-              </a:rPr>
-              <a:t>회차 생성</a:t>
-            </a:r>
-            <a:r>
-              <a:rPr sz="1200" b="0">
-                <a:solidFill>
-                  <a:srgbClr val="000000"/>
-                </a:solidFill>
-                <a:latin typeface="맑은 고딕"/>
-                <a:ea typeface="맑은 고딕"/>
-              </a:rPr>
-              <a:t> —</a:t>
-            </a:r>
-            <a:r>
-              <a:rPr sz="1000" b="0">
-                <a:solidFill>
-                  <a:srgbClr val="000000"/>
-                </a:solidFill>
-                <a:latin typeface="맑은 고딕"/>
-                <a:ea typeface="맑은 고딕"/>
-              </a:rPr>
-              <a:t> 첫 배송일부터 만료일까지 </a:t>
-            </a:r>
-            <a:r>
-              <a:rPr sz="1000" b="0">
-                <a:solidFill>
-                  <a:srgbClr val="000000"/>
-                </a:solidFill>
-                <a:latin typeface="맑은 고딕"/>
-                <a:ea typeface="맑은 고딕"/>
-              </a:rPr>
-              <a:t>nextDate</a:t>
-            </a:r>
-            <a:r>
-              <a:rPr sz="1000" b="0">
-                <a:solidFill>
-                  <a:srgbClr val="000000"/>
-                </a:solidFill>
-                <a:latin typeface="맑은 고딕"/>
-                <a:ea typeface="맑은 고딕"/>
-              </a:rPr>
-              <a:t>로 회차를 만든다.</a:t>
-            </a:r>
-          </a:p>
-          <a:p>
-            <a:pPr lvl="3" marL="457200" indent="-182880">
-              <a:spcBef>
-                <a:spcPts val="300"/>
-              </a:spcBef>
-              <a:spcAft>
-                <a:spcPts val="300"/>
-              </a:spcAft>
-              <a:buSzPct val="90000"/>
-              <a:buFont typeface="Wingdings" pitchFamily="2" charset="2"/>
-              <a:buChar char=""/>
-            </a:pPr>
-            <a:r>
-              <a:rPr sz="1200" b="1">
-                <a:solidFill>
-                  <a:srgbClr val="000000"/>
-                </a:solidFill>
-                <a:latin typeface="맑은 고딕"/>
-                <a:ea typeface="맑은 고딕"/>
-              </a:rPr>
-              <a:t>그대로</a:t>
-            </a:r>
-            <a:r>
-              <a:rPr sz="1200" b="0">
-                <a:solidFill>
-                  <a:srgbClr val="000000"/>
-                </a:solidFill>
-                <a:latin typeface="맑은 고딕"/>
-                <a:ea typeface="맑은 고딕"/>
-              </a:rPr>
-              <a:t> —</a:t>
-            </a:r>
-            <a:r>
-              <a:rPr sz="1000" b="0">
-                <a:solidFill>
-                  <a:srgbClr val="000000"/>
-                </a:solidFill>
-                <a:latin typeface="맑은 고딕"/>
-                <a:ea typeface="맑은 고딕"/>
-              </a:rPr>
-              <a:t> 회차 금액, 만료일, 결제·확정의 계약</a:t>
-            </a:r>
-          </a:p>
-          <a:p>
-            <a:pPr lvl="2" marL="228600" indent="-182880">
-              <a:spcBef>
-                <a:spcPts val="300"/>
-              </a:spcBef>
-              <a:spcAft>
-                <a:spcPts val="300"/>
-              </a:spcAft>
-              <a:buSzPct val="90000"/>
-              <a:buFont typeface="Wingdings" pitchFamily="2" charset="2"/>
-              <a:buChar char=""/>
-            </a:pPr>
-            <a:r>
-              <a:rPr sz="1400" b="1">
-                <a:solidFill>
-                  <a:srgbClr val="000000"/>
-                </a:solidFill>
-                <a:latin typeface="맑은 고딕"/>
-                <a:ea typeface="맑은 고딕"/>
-              </a:rPr>
-              <a:t>결제 방법</a:t>
-            </a:r>
-          </a:p>
-          <a:p>
-            <a:pPr lvl="3" marL="457200" indent="-182880">
-              <a:spcBef>
-                <a:spcPts val="300"/>
-              </a:spcBef>
-              <a:spcAft>
-                <a:spcPts val="300"/>
-              </a:spcAft>
-              <a:buSzPct val="90000"/>
-              <a:buFont typeface="Wingdings" pitchFamily="2" charset="2"/>
-              <a:buChar char=""/>
-            </a:pPr>
-            <a:r>
-              <a:rPr sz="1200" b="1">
-                <a:solidFill>
-                  <a:srgbClr val="000000"/>
-                </a:solidFill>
-                <a:latin typeface="맑은 고딕"/>
-                <a:ea typeface="맑은 고딕"/>
-              </a:rPr>
-              <a:t>값</a:t>
-            </a:r>
-            <a:r>
-              <a:rPr sz="1200" b="0">
-                <a:solidFill>
-                  <a:srgbClr val="000000"/>
-                </a:solidFill>
-                <a:latin typeface="맑은 고딕"/>
-                <a:ea typeface="맑은 고딕"/>
-              </a:rPr>
-              <a:t> —</a:t>
-            </a:r>
-            <a:r>
-              <a:rPr sz="1000" b="0">
-                <a:solidFill>
-                  <a:srgbClr val="000000"/>
-                </a:solidFill>
-                <a:latin typeface="맑은 고딕"/>
-                <a:ea typeface="맑은 고딕"/>
-              </a:rPr>
-              <a:t> </a:t>
-            </a:r>
-            <a:r>
-              <a:rPr sz="1000" b="0">
-                <a:solidFill>
-                  <a:srgbClr val="000000"/>
-                </a:solidFill>
-                <a:latin typeface="맑은 고딕"/>
-                <a:ea typeface="맑은 고딕"/>
-              </a:rPr>
-              <a:t>PaymentMethod</a:t>
-            </a:r>
-            <a:r>
-              <a:rPr sz="1000" b="0">
-                <a:solidFill>
-                  <a:srgbClr val="000000"/>
-                </a:solidFill>
-                <a:latin typeface="맑은 고딕"/>
-                <a:ea typeface="맑은 고딕"/>
-              </a:rPr>
-              <a:t>에 </a:t>
-            </a:r>
-            <a:r>
-              <a:rPr sz="1000" b="0">
-                <a:solidFill>
-                  <a:srgbClr val="000000"/>
-                </a:solidFill>
-                <a:latin typeface="맑은 고딕"/>
-                <a:ea typeface="맑은 고딕"/>
-              </a:rPr>
-              <a:t>POINT</a:t>
-            </a:r>
-            <a:r>
-              <a:rPr sz="1000" b="0">
-                <a:solidFill>
-                  <a:srgbClr val="000000"/>
-                </a:solidFill>
-                <a:latin typeface="맑은 고딕"/>
-                <a:ea typeface="맑은 고딕"/>
-              </a:rPr>
-              <a:t>를 더한다.</a:t>
-            </a:r>
-          </a:p>
-          <a:p>
-            <a:pPr lvl="3" marL="457200" indent="-182880">
-              <a:spcBef>
-                <a:spcPts val="300"/>
-              </a:spcBef>
-              <a:spcAft>
-                <a:spcPts val="300"/>
-              </a:spcAft>
-              <a:buSzPct val="90000"/>
-              <a:buFont typeface="Wingdings" pitchFamily="2" charset="2"/>
-              <a:buChar char=""/>
-            </a:pPr>
-            <a:r>
-              <a:rPr sz="1200" b="1">
-                <a:solidFill>
-                  <a:srgbClr val="000000"/>
-                </a:solidFill>
-                <a:latin typeface="맑은 고딕"/>
-                <a:ea typeface="맑은 고딕"/>
-              </a:rPr>
-              <a:t>연동</a:t>
-            </a:r>
-            <a:r>
-              <a:rPr sz="1200" b="0">
-                <a:solidFill>
-                  <a:srgbClr val="000000"/>
-                </a:solidFill>
-                <a:latin typeface="맑은 고딕"/>
-                <a:ea typeface="맑은 고딕"/>
-              </a:rPr>
-              <a:t> —</a:t>
-            </a:r>
-            <a:r>
-              <a:rPr sz="1000" b="0">
-                <a:solidFill>
-                  <a:srgbClr val="000000"/>
-                </a:solidFill>
-                <a:latin typeface="맑은 고딕"/>
-                <a:ea typeface="맑은 고딕"/>
-              </a:rPr>
-              <a:t> </a:t>
-            </a:r>
-            <a:r>
-              <a:rPr sz="1000" b="0">
-                <a:solidFill>
-                  <a:srgbClr val="000000"/>
-                </a:solidFill>
-                <a:latin typeface="맑은 고딕"/>
-                <a:ea typeface="맑은 고딕"/>
-              </a:rPr>
-              <a:t>PaymentAdapter</a:t>
-            </a:r>
-            <a:r>
-              <a:rPr sz="1000" b="0">
-                <a:solidFill>
-                  <a:srgbClr val="000000"/>
-                </a:solidFill>
-                <a:latin typeface="맑은 고딕"/>
-                <a:ea typeface="맑은 고딕"/>
-              </a:rPr>
-              <a:t>가 포인트 요청 형식을 옮긴다.</a:t>
-            </a:r>
-          </a:p>
-        </p:txBody>
-      </p:sp>
-    </p:spTree>
-    <p:extLst>
-      <p:ext uri="{BB962C8B-B14F-4D97-AF65-F5344CB8AC3E}">
-        <p14:creationId xmlns:p14="http://schemas.microsoft.com/office/powerpoint/2010/main" val="3555436673"/>
       </p:ext>
     </p:extLst>
   </p:cSld>
@@ -37562,7 +37210,7 @@
                 <a:latin typeface="맑은 고딕"/>
                 <a:ea typeface="맑은 고딕"/>
               </a:rPr>
-              <a:t>41. 설계 클래스 다이어그램 </a:t>
+              <a:t>변이 설계 </a:t>
             </a:r>
             <a:r>
               <a:rPr sz="1800" b="1">
@@ -37573,6 +37221,18 @@
                 <a:ea typeface="맑은 고딕"/>
               </a:rPr>
               <a:t>(안)</a:t>
+            </a:r>
+          </a:p>
+          <a:p>
+            <a:r>
+              <a:rPr sz="1100" b="1">
+                <a:solidFill>
+                  <a:srgbClr val="000000"/>
+                </a:solidFill>
+                <a:latin typeface="맑은 고딕"/>
+                <a:ea typeface="맑은 고딕"/>
+              </a:rPr>
+              <a:t>별첨. 실습 답</a:t>
             </a:r>
           </a:p>
         </p:txBody>
@@ -37635,7 +37295,7 @@
           <a:p>
             <a:r>
               <a:rPr kumimoji="1" lang="en-US" altLang="ko-KR" sz="1400" dirty="0" err="1"/>
-              <a:t>08. 변화 대응과 변이 설계</a:t>
+              <a:t>별첨: 08. 변화 대응과 변이 설계</a:t>
             </a:r>
           </a:p>
         </p:txBody>
@@ -37708,8 +37368,249 @@
         </p:nvSpPr>
         <p:spPr>
           <a:xfrm>
-            <a:off x="365760" y="960120"/>
-            <a:ext cx="8412480" cy="2514600"/>
+            <a:off x="233172" y="1414318"/>
+            <a:ext cx="4338828" cy="4898147"/>
+          </a:xfrm>
+        </p:spPr>
+        <p:txBody>
+          <a:bodyPr>
+            <a:normAutofit/>
+          </a:bodyPr>
+          <a:lstStyle/>
+          <a:p>
+            <a:pPr lvl="2" marL="228600" indent="-182880">
+              <a:spcBef>
+                <a:spcPts val="300"/>
+              </a:spcBef>
+              <a:spcAft>
+                <a:spcPts val="300"/>
+              </a:spcAft>
+              <a:buSzPct val="90000"/>
+              <a:buFont typeface="Wingdings" pitchFamily="2" charset="2"/>
+              <a:buChar char=""/>
+            </a:pPr>
+            <a:r>
+              <a:rPr sz="1400" b="1">
+                <a:solidFill>
+                  <a:srgbClr val="000000"/>
+                </a:solidFill>
+                <a:latin typeface="맑은 고딕"/>
+                <a:ea typeface="맑은 고딕"/>
+              </a:rPr>
+              <a:t>배송 주기 </a:t>
+            </a:r>
+            <a:r>
+              <a:rPr sz="1400" b="1">
+                <a:solidFill>
+                  <a:srgbClr val="000000"/>
+                </a:solidFill>
+                <a:latin typeface="맑은 고딕"/>
+                <a:ea typeface="맑은 고딕"/>
+              </a:rPr>
+              <a:t>DeliveryCycle</a:t>
+            </a:r>
+          </a:p>
+          <a:p>
+            <a:pPr lvl="3" marL="457200" indent="-182880">
+              <a:spcBef>
+                <a:spcPts val="300"/>
+              </a:spcBef>
+              <a:spcAft>
+                <a:spcPts val="300"/>
+              </a:spcAft>
+              <a:buSzPct val="90000"/>
+              <a:buFont typeface="Wingdings" pitchFamily="2" charset="2"/>
+              <a:buChar char=""/>
+            </a:pPr>
+            <a:r>
+              <a:rPr sz="1200" b="1">
+                <a:solidFill>
+                  <a:srgbClr val="000000"/>
+                </a:solidFill>
+                <a:latin typeface="맑은 고딕"/>
+                <a:ea typeface="맑은 고딕"/>
+              </a:rPr>
+              <a:t>약속</a:t>
+            </a:r>
+            <a:r>
+              <a:rPr sz="1200" b="0">
+                <a:solidFill>
+                  <a:srgbClr val="000000"/>
+                </a:solidFill>
+                <a:latin typeface="맑은 고딕"/>
+                <a:ea typeface="맑은 고딕"/>
+              </a:rPr>
+              <a:t> —</a:t>
+            </a:r>
+            <a:r>
+              <a:rPr sz="1000" b="0">
+                <a:solidFill>
+                  <a:srgbClr val="000000"/>
+                </a:solidFill>
+                <a:latin typeface="맑은 고딕"/>
+                <a:ea typeface="맑은 고딕"/>
+              </a:rPr>
+              <a:t> 다음 배송일을 계산한다: </a:t>
+            </a:r>
+            <a:r>
+              <a:rPr sz="1000" b="0">
+                <a:solidFill>
+                  <a:srgbClr val="000000"/>
+                </a:solidFill>
+                <a:latin typeface="맑은 고딕"/>
+                <a:ea typeface="맑은 고딕"/>
+              </a:rPr>
+              <a:t>nextDate(from)</a:t>
+            </a:r>
+          </a:p>
+          <a:p>
+            <a:pPr lvl="3" marL="457200" indent="-182880">
+              <a:spcBef>
+                <a:spcPts val="300"/>
+              </a:spcBef>
+              <a:spcAft>
+                <a:spcPts val="300"/>
+              </a:spcAft>
+              <a:buSzPct val="90000"/>
+              <a:buFont typeface="Wingdings" pitchFamily="2" charset="2"/>
+              <a:buChar char=""/>
+            </a:pPr>
+            <a:r>
+              <a:rPr sz="1200" b="1">
+                <a:solidFill>
+                  <a:srgbClr val="000000"/>
+                </a:solidFill>
+                <a:latin typeface="맑은 고딕"/>
+                <a:ea typeface="맑은 고딕"/>
+              </a:rPr>
+              <a:t>일 간격 </a:t>
+            </a:r>
+            <a:r>
+              <a:rPr sz="1200" b="1">
+                <a:solidFill>
+                  <a:srgbClr val="000000"/>
+                </a:solidFill>
+                <a:latin typeface="맑은 고딕"/>
+                <a:ea typeface="맑은 고딕"/>
+              </a:rPr>
+              <a:t>DailyCycle</a:t>
+            </a:r>
+            <a:r>
+              <a:rPr sz="1200" b="0">
+                <a:solidFill>
+                  <a:srgbClr val="000000"/>
+                </a:solidFill>
+                <a:latin typeface="맑은 고딕"/>
+                <a:ea typeface="맑은 고딕"/>
+              </a:rPr>
+              <a:t> —</a:t>
+            </a:r>
+            <a:r>
+              <a:rPr sz="1000" b="0">
+                <a:solidFill>
+                  <a:srgbClr val="000000"/>
+                </a:solidFill>
+                <a:latin typeface="맑은 고딕"/>
+                <a:ea typeface="맑은 고딕"/>
+              </a:rPr>
+              <a:t> 1~28일마다</a:t>
+            </a:r>
+            <a:r>
+              <a:rPr sz="800" b="0">
+                <a:solidFill>
+                  <a:srgbClr val="000000"/>
+                </a:solidFill>
+                <a:latin typeface="맑은 고딕"/>
+                <a:ea typeface="맑은 고딕"/>
+              </a:rPr>
+              <a:t>(기존 R1)</a:t>
+            </a:r>
+          </a:p>
+          <a:p>
+            <a:pPr lvl="3" marL="457200" indent="-182880">
+              <a:spcBef>
+                <a:spcPts val="300"/>
+              </a:spcBef>
+              <a:spcAft>
+                <a:spcPts val="300"/>
+              </a:spcAft>
+              <a:buSzPct val="90000"/>
+              <a:buFont typeface="Wingdings" pitchFamily="2" charset="2"/>
+              <a:buChar char=""/>
+            </a:pPr>
+            <a:r>
+              <a:rPr sz="1200" b="1">
+                <a:solidFill>
+                  <a:srgbClr val="000000"/>
+                </a:solidFill>
+                <a:latin typeface="맑은 고딕"/>
+                <a:ea typeface="맑은 고딕"/>
+              </a:rPr>
+              <a:t>매월 ○일 </a:t>
+            </a:r>
+            <a:r>
+              <a:rPr sz="1200" b="1">
+                <a:solidFill>
+                  <a:srgbClr val="000000"/>
+                </a:solidFill>
+                <a:latin typeface="맑은 고딕"/>
+                <a:ea typeface="맑은 고딕"/>
+              </a:rPr>
+              <a:t>MonthlyCycle</a:t>
+            </a:r>
+            <a:r>
+              <a:rPr sz="1200" b="0">
+                <a:solidFill>
+                  <a:srgbClr val="000000"/>
+                </a:solidFill>
+                <a:latin typeface="맑은 고딕"/>
+                <a:ea typeface="맑은 고딕"/>
+              </a:rPr>
+              <a:t> —</a:t>
+            </a:r>
+            <a:r>
+              <a:rPr sz="1000" b="0">
+                <a:solidFill>
+                  <a:srgbClr val="000000"/>
+                </a:solidFill>
+                <a:latin typeface="맑은 고딕"/>
+                <a:ea typeface="맑은 고딕"/>
+              </a:rPr>
+              <a:t> 매월 1~28일 중 하루</a:t>
+            </a:r>
+            <a:r>
+              <a:rPr sz="800" b="0">
+                <a:solidFill>
+                  <a:srgbClr val="000000"/>
+                </a:solidFill>
+                <a:latin typeface="맑은 고딕"/>
+                <a:ea typeface="맑은 고딕"/>
+              </a:rPr>
+              <a:t>(요청 B)</a:t>
+            </a:r>
+          </a:p>
+        </p:txBody>
+      </p:sp>
+      <p:sp>
+        <p:nvSpPr>
+          <p:cNvPr id="9" name="내용 개체 틀 7">
+            <a:extLst>
+              <a:ext uri="{FF2B5EF4-FFF2-40B4-BE49-F238E27FC236}">
+                <a16:creationId xmlns:a16="http://schemas.microsoft.com/office/drawing/2014/main" id="{BEBA2C4A-B0BF-F2E4-EA6E-614C99CBA184}"/>
+              </a:ext>
+            </a:extLst>
+          </p:cNvPr>
+          <p:cNvSpPr>
+            <a:spLocks noGrp="1"/>
+          </p:cNvSpPr>
+          <p:nvPr>
+            <p:ph idx="1"/>
+          </p:nvPr>
+        </p:nvSpPr>
+        <p:spPr>
+          <a:xfrm>
+            <a:off x="233172" y="960120"/>
+            <a:ext cx="8778240" cy="454198"/>
           </a:xfrm>
         </p:spPr>
         <p:txBody>
@@ -37735,7 +37636,7 @@
                 <a:latin typeface="맑은 고딕"/>
                 <a:ea typeface="맑은 고딕"/>
               </a:rPr>
-              <a:t>주기의 </a:t>
+              <a:t>배송 주기를 </a:t>
             </a:r>
             <a:r>
               <a:rPr sz="1400" b="1">
@@ -37745,7 +37646,7 @@
                 <a:latin typeface="맑은 고딕"/>
                 <a:ea typeface="맑은 고딕"/>
               </a:rPr>
-              <a:t>종류만</a:t>
+              <a:t>다형성</a:t>
             </a:r>
             <a:r>
               <a:rPr sz="1400" b="0">
@@ -37755,35 +37656,368 @@
                 <a:latin typeface="맑은 고딕"/>
                 <a:ea typeface="맑은 고딕"/>
               </a:rPr>
-              <a:t> 약속 뒤로 보내고, 나머지는 그대로 두었다.</a:t>
+              <a:t>으로 바꾼다. 정기배송은 주기에게 "다음 배송일"을 묻지 않고 </a:t>
+            </a:r>
+            <a:r>
+              <a:rPr sz="1400" b="1">
+                <a:solidFill>
+                  <a:srgbClr val="000000"/>
+                </a:solidFill>
+                <a:latin typeface="맑은 고딕"/>
+                <a:ea typeface="맑은 고딕"/>
+              </a:rPr>
+              <a:t>맡긴다</a:t>
+            </a:r>
+            <a:r>
+              <a:rPr sz="1400" b="0">
+                <a:solidFill>
+                  <a:srgbClr val="000000"/>
+                </a:solidFill>
+                <a:latin typeface="맑은 고딕"/>
+                <a:ea typeface="맑은 고딕"/>
+              </a:rPr>
+              <a:t>.</a:t>
             </a:r>
           </a:p>
         </p:txBody>
       </p:sp>
-      <p:pic>
-        <p:nvPicPr>
-          <p:cNvPr id="9" name="plantuml Diagram 8"/>
-          <p:cNvPicPr>
-            <a:picLocks noChangeAspect="1"/>
-          </p:cNvPicPr>
-          <p:nvPr/>
-        </p:nvPicPr>
-        <p:blipFill>
-          <a:blip r:embed="plantumlImage8"/>
-          <a:stretch>
-            <a:fillRect/>
-          </a:stretch>
-        </p:blipFill>
+      <p:sp>
+        <p:nvSpPr>
+          <p:cNvPr id="10" name="내용 개체 틀 7">
+            <a:extLst>
+              <a:ext uri="{FF2B5EF4-FFF2-40B4-BE49-F238E27FC236}">
+                <a16:creationId xmlns:a16="http://schemas.microsoft.com/office/drawing/2014/main" id="{BEBA2C4A-B0BF-F2E4-EA6E-614C99CBA184}"/>
+              </a:ext>
+            </a:extLst>
+          </p:cNvPr>
+          <p:cNvSpPr>
+            <a:spLocks noGrp="1"/>
+          </p:cNvSpPr>
+          <p:nvPr>
+            <p:ph idx="1"/>
+          </p:nvPr>
+        </p:nvSpPr>
         <p:spPr>
           <a:xfrm>
-            <a:off x="2715846" y="1681697"/>
-            <a:ext cx="3712308" cy="4370754"/>
+            <a:off x="4572000" y="1414318"/>
+            <a:ext cx="4439412" cy="4898147"/>
           </a:xfrm>
-          <a:prstGeom prst="rect">
-            <a:avLst/>
-          </a:prstGeom>
         </p:spPr>
-      </p:pic>
+        <p:txBody>
+          <a:bodyPr>
+            <a:normAutofit/>
+          </a:bodyPr>
+          <a:lstStyle/>
+          <a:p>
+            <a:pPr lvl="2" marL="228600" indent="-182880">
+              <a:spcBef>
+                <a:spcPts val="300"/>
+              </a:spcBef>
+              <a:spcAft>
+                <a:spcPts val="300"/>
+              </a:spcAft>
+              <a:buSzPct val="90000"/>
+              <a:buFont typeface="Wingdings" pitchFamily="2" charset="2"/>
+              <a:buChar char=""/>
+            </a:pPr>
+            <a:r>
+              <a:rPr sz="1400" b="1">
+                <a:solidFill>
+                  <a:srgbClr val="000000"/>
+                </a:solidFill>
+                <a:latin typeface="맑은 고딕"/>
+                <a:ea typeface="맑은 고딕"/>
+              </a:rPr>
+              <a:t>정기배송 </a:t>
+            </a:r>
+            <a:r>
+              <a:rPr sz="1400" b="1">
+                <a:solidFill>
+                  <a:srgbClr val="000000"/>
+                </a:solidFill>
+                <a:latin typeface="맑은 고딕"/>
+                <a:ea typeface="맑은 고딕"/>
+              </a:rPr>
+              <a:t>Subscription</a:t>
+            </a:r>
+          </a:p>
+          <a:p>
+            <a:pPr lvl="3" marL="457200" indent="-182880">
+              <a:spcBef>
+                <a:spcPts val="300"/>
+              </a:spcBef>
+              <a:spcAft>
+                <a:spcPts val="300"/>
+              </a:spcAft>
+              <a:buSzPct val="90000"/>
+              <a:buFont typeface="Wingdings" pitchFamily="2" charset="2"/>
+              <a:buChar char=""/>
+            </a:pPr>
+            <a:r>
+              <a:rPr sz="1200" b="1">
+                <a:solidFill>
+                  <a:srgbClr val="000000"/>
+                </a:solidFill>
+                <a:latin typeface="맑은 고딕"/>
+                <a:ea typeface="맑은 고딕"/>
+              </a:rPr>
+              <a:t>회차 생성</a:t>
+            </a:r>
+            <a:r>
+              <a:rPr sz="1200" b="0">
+                <a:solidFill>
+                  <a:srgbClr val="000000"/>
+                </a:solidFill>
+                <a:latin typeface="맑은 고딕"/>
+                <a:ea typeface="맑은 고딕"/>
+              </a:rPr>
+              <a:t> —</a:t>
+            </a:r>
+            <a:r>
+              <a:rPr sz="1000" b="0">
+                <a:solidFill>
+                  <a:srgbClr val="000000"/>
+                </a:solidFill>
+                <a:latin typeface="맑은 고딕"/>
+                <a:ea typeface="맑은 고딕"/>
+              </a:rPr>
+              <a:t> 첫 배송일부터 만료일까지 </a:t>
+            </a:r>
+            <a:r>
+              <a:rPr sz="1000" b="0">
+                <a:solidFill>
+                  <a:srgbClr val="000000"/>
+                </a:solidFill>
+                <a:latin typeface="맑은 고딕"/>
+                <a:ea typeface="맑은 고딕"/>
+              </a:rPr>
+              <a:t>nextDate</a:t>
+            </a:r>
+            <a:r>
+              <a:rPr sz="1000" b="0">
+                <a:solidFill>
+                  <a:srgbClr val="000000"/>
+                </a:solidFill>
+                <a:latin typeface="맑은 고딕"/>
+                <a:ea typeface="맑은 고딕"/>
+              </a:rPr>
+              <a:t>로 회차를 만든다.</a:t>
+            </a:r>
+          </a:p>
+          <a:p>
+            <a:pPr lvl="3" marL="457200" indent="-182880">
+              <a:spcBef>
+                <a:spcPts val="300"/>
+              </a:spcBef>
+              <a:spcAft>
+                <a:spcPts val="300"/>
+              </a:spcAft>
+              <a:buSzPct val="90000"/>
+              <a:buFont typeface="Wingdings" pitchFamily="2" charset="2"/>
+              <a:buChar char=""/>
+            </a:pPr>
+            <a:r>
+              <a:rPr sz="1200" b="1">
+                <a:solidFill>
+                  <a:srgbClr val="000000"/>
+                </a:solidFill>
+                <a:latin typeface="맑은 고딕"/>
+                <a:ea typeface="맑은 고딕"/>
+              </a:rPr>
+              <a:t>그대로</a:t>
+            </a:r>
+            <a:r>
+              <a:rPr sz="1200" b="0">
+                <a:solidFill>
+                  <a:srgbClr val="000000"/>
+                </a:solidFill>
+                <a:latin typeface="맑은 고딕"/>
+                <a:ea typeface="맑은 고딕"/>
+              </a:rPr>
+              <a:t> —</a:t>
+            </a:r>
+            <a:r>
+              <a:rPr sz="1000" b="0">
+                <a:solidFill>
+                  <a:srgbClr val="000000"/>
+                </a:solidFill>
+                <a:latin typeface="맑은 고딕"/>
+                <a:ea typeface="맑은 고딕"/>
+              </a:rPr>
+              <a:t> 회차 금액, 만료일, 결제·확정의 계약</a:t>
+            </a:r>
+          </a:p>
+          <a:p>
+            <a:pPr lvl="2" marL="228600" indent="-182880">
+              <a:spcBef>
+                <a:spcPts val="300"/>
+              </a:spcBef>
+              <a:spcAft>
+                <a:spcPts val="300"/>
+              </a:spcAft>
+              <a:buSzPct val="90000"/>
+              <a:buFont typeface="Wingdings" pitchFamily="2" charset="2"/>
+              <a:buChar char=""/>
+            </a:pPr>
+            <a:r>
+              <a:rPr sz="1400" b="1">
+                <a:solidFill>
+                  <a:srgbClr val="000000"/>
+                </a:solidFill>
+                <a:latin typeface="맑은 고딕"/>
+                <a:ea typeface="맑은 고딕"/>
+              </a:rPr>
+              <a:t>결제 방법</a:t>
+            </a:r>
+          </a:p>
+          <a:p>
+            <a:pPr lvl="3" marL="457200" indent="-182880">
+              <a:spcBef>
+                <a:spcPts val="300"/>
+              </a:spcBef>
+              <a:spcAft>
+                <a:spcPts val="300"/>
+              </a:spcAft>
+              <a:buSzPct val="90000"/>
+              <a:buFont typeface="Wingdings" pitchFamily="2" charset="2"/>
+              <a:buChar char=""/>
+            </a:pPr>
+            <a:r>
+              <a:rPr sz="1200" b="1">
+                <a:solidFill>
+                  <a:srgbClr val="000000"/>
+                </a:solidFill>
+                <a:latin typeface="맑은 고딕"/>
+                <a:ea typeface="맑은 고딕"/>
+              </a:rPr>
+              <a:t>값</a:t>
+            </a:r>
+            <a:r>
+              <a:rPr sz="1200" b="0">
+                <a:solidFill>
+                  <a:srgbClr val="000000"/>
+                </a:solidFill>
+                <a:latin typeface="맑은 고딕"/>
+                <a:ea typeface="맑은 고딕"/>
+              </a:rPr>
+              <a:t> —</a:t>
+            </a:r>
+            <a:r>
+              <a:rPr sz="1000" b="0">
+                <a:solidFill>
+                  <a:srgbClr val="000000"/>
+                </a:solidFill>
+                <a:latin typeface="맑은 고딕"/>
+                <a:ea typeface="맑은 고딕"/>
+              </a:rPr>
+              <a:t> </a:t>
+            </a:r>
+            <a:r>
+              <a:rPr sz="1000" b="0">
+                <a:solidFill>
+                  <a:srgbClr val="000000"/>
+                </a:solidFill>
+                <a:latin typeface="맑은 고딕"/>
+                <a:ea typeface="맑은 고딕"/>
+              </a:rPr>
+              <a:t>PaymentMethod</a:t>
+            </a:r>
+            <a:r>
+              <a:rPr sz="1000" b="0">
+                <a:solidFill>
+                  <a:srgbClr val="000000"/>
+                </a:solidFill>
+                <a:latin typeface="맑은 고딕"/>
+                <a:ea typeface="맑은 고딕"/>
+              </a:rPr>
+              <a:t>에 </a:t>
+            </a:r>
+            <a:r>
+              <a:rPr sz="1000" b="0">
+                <a:solidFill>
+                  <a:srgbClr val="000000"/>
+                </a:solidFill>
+                <a:latin typeface="맑은 고딕"/>
+                <a:ea typeface="맑은 고딕"/>
+              </a:rPr>
+              <a:t>POINT</a:t>
+            </a:r>
+            <a:r>
+              <a:rPr sz="1000" b="0">
+                <a:solidFill>
+                  <a:srgbClr val="000000"/>
+                </a:solidFill>
+                <a:latin typeface="맑은 고딕"/>
+                <a:ea typeface="맑은 고딕"/>
+              </a:rPr>
+              <a:t>를 더한다.</a:t>
+            </a:r>
+          </a:p>
+          <a:p>
+            <a:pPr lvl="3" marL="457200" indent="-182880">
+              <a:spcBef>
+                <a:spcPts val="300"/>
+              </a:spcBef>
+              <a:spcAft>
+                <a:spcPts val="300"/>
+              </a:spcAft>
+              <a:buSzPct val="90000"/>
+              <a:buFont typeface="Wingdings" pitchFamily="2" charset="2"/>
+              <a:buChar char=""/>
+            </a:pPr>
+            <a:r>
+              <a:rPr sz="1200" b="1">
+                <a:solidFill>
+                  <a:srgbClr val="000000"/>
+                </a:solidFill>
+                <a:latin typeface="맑은 고딕"/>
+                <a:ea typeface="맑은 고딕"/>
+              </a:rPr>
+              <a:t>연동</a:t>
+            </a:r>
+            <a:r>
+              <a:rPr sz="1200" b="0">
+                <a:solidFill>
+                  <a:srgbClr val="000000"/>
+                </a:solidFill>
+                <a:latin typeface="맑은 고딕"/>
+                <a:ea typeface="맑은 고딕"/>
+              </a:rPr>
+              <a:t> —</a:t>
+            </a:r>
+            <a:r>
+              <a:rPr sz="1000" b="0">
+                <a:solidFill>
+                  <a:srgbClr val="000000"/>
+                </a:solidFill>
+                <a:latin typeface="맑은 고딕"/>
+                <a:ea typeface="맑은 고딕"/>
+              </a:rPr>
+              <a:t> </a:t>
+            </a:r>
+            <a:r>
+              <a:rPr sz="1000" b="0">
+                <a:solidFill>
+                  <a:srgbClr val="000000"/>
+                </a:solidFill>
+                <a:latin typeface="맑은 고딕"/>
+                <a:ea typeface="맑은 고딕"/>
+              </a:rPr>
+              <a:t>PaymentAdapter</a:t>
+            </a:r>
+            <a:r>
+              <a:rPr sz="1000" b="0">
+                <a:solidFill>
+                  <a:srgbClr val="000000"/>
+                </a:solidFill>
+                <a:latin typeface="맑은 고딕"/>
+                <a:ea typeface="맑은 고딕"/>
+              </a:rPr>
+              <a:t>가 포인트 요청 형식을 옮긴다.</a:t>
+            </a:r>
+          </a:p>
+        </p:txBody>
+      </p:sp>
     </p:spTree>
     <p:extLst>
       <p:ext uri="{BB962C8B-B14F-4D97-AF65-F5344CB8AC3E}">
@@ -37849,7 +38083,7 @@
                 <a:latin typeface="맑은 고딕"/>
                 <a:ea typeface="맑은 고딕"/>
               </a:rPr>
-              <a:t>42. 변화 대응 보완 </a:t>
+              <a:t>설계 클래스 다이어그램 </a:t>
             </a:r>
             <a:r>
               <a:rPr sz="1800" b="1">
@@ -37860,6 +38094,18 @@
                 <a:ea typeface="맑은 고딕"/>
               </a:rPr>
               <a:t>(안)</a:t>
+            </a:r>
+          </a:p>
+          <a:p>
+            <a:r>
+              <a:rPr sz="1100" b="1">
+                <a:solidFill>
+                  <a:srgbClr val="000000"/>
+                </a:solidFill>
+                <a:latin typeface="맑은 고딕"/>
+                <a:ea typeface="맑은 고딕"/>
+              </a:rPr>
+              <a:t>별첨. 실습 답</a:t>
             </a:r>
           </a:p>
         </p:txBody>
@@ -37922,7 +38168,7 @@
           <a:p>
             <a:r>
               <a:rPr kumimoji="1" lang="en-US" altLang="ko-KR" sz="1400" dirty="0" err="1"/>
-              <a:t>08. 변화 대응과 변이 설계</a:t>
+              <a:t>별첨: 08. 변화 대응과 변이 설계</a:t>
             </a:r>
           </a:p>
         </p:txBody>
@@ -37995,312 +38241,8 @@
         </p:nvSpPr>
         <p:spPr>
           <a:xfrm>
-            <a:off x="233172" y="1414318"/>
-            <a:ext cx="4338828" cy="4898147"/>
-          </a:xfrm>
-        </p:spPr>
-        <p:txBody>
-          <a:bodyPr>
-            <a:normAutofit/>
-          </a:bodyPr>
-          <a:lstStyle/>
-          <a:p>
-            <a:pPr lvl="2" marL="228600" indent="-182880">
-              <a:spcBef>
-                <a:spcPts val="300"/>
-              </a:spcBef>
-              <a:spcAft>
-                <a:spcPts val="300"/>
-              </a:spcAft>
-              <a:buSzPct val="90000"/>
-              <a:buFont typeface="Wingdings" pitchFamily="2" charset="2"/>
-              <a:buChar char=""/>
-            </a:pPr>
-            <a:r>
-              <a:rPr sz="1400" b="1">
-                <a:solidFill>
-                  <a:srgbClr val="000000"/>
-                </a:solidFill>
-                <a:latin typeface="맑은 고딕"/>
-                <a:ea typeface="맑은 고딕"/>
-              </a:rPr>
-              <a:t>요구사항 명세서</a:t>
-            </a:r>
-            <a:r>
-              <a:rPr sz="1000" b="0">
-                <a:solidFill>
-                  <a:srgbClr val="000000"/>
-                </a:solidFill>
-                <a:latin typeface="맑은 고딕"/>
-                <a:ea typeface="맑은 고딕"/>
-              </a:rPr>
-              <a:t>(실습 1)</a:t>
-            </a:r>
-          </a:p>
-          <a:p>
-            <a:pPr lvl="3" marL="457200" indent="-182880">
-              <a:spcBef>
-                <a:spcPts val="300"/>
-              </a:spcBef>
-              <a:spcAft>
-                <a:spcPts val="300"/>
-              </a:spcAft>
-              <a:buSzPct val="90000"/>
-              <a:buFont typeface="Wingdings" pitchFamily="2" charset="2"/>
-              <a:buChar char=""/>
-            </a:pPr>
-            <a:r>
-              <a:rPr sz="1200" b="1">
-                <a:solidFill>
-                  <a:srgbClr val="000000"/>
-                </a:solidFill>
-                <a:latin typeface="맑은 고딕"/>
-                <a:ea typeface="맑은 고딕"/>
-              </a:rPr>
-              <a:t>R1 배송 주기</a:t>
-            </a:r>
-            <a:r>
-              <a:rPr sz="1200" b="0">
-                <a:solidFill>
-                  <a:srgbClr val="000000"/>
-                </a:solidFill>
-                <a:latin typeface="맑은 고딕"/>
-                <a:ea typeface="맑은 고딕"/>
-              </a:rPr>
-              <a:t> —</a:t>
-            </a:r>
-            <a:r>
-              <a:rPr sz="1000" b="0">
-                <a:solidFill>
-                  <a:srgbClr val="000000"/>
-                </a:solidFill>
-                <a:latin typeface="맑은 고딕"/>
-                <a:ea typeface="맑은 고딕"/>
-              </a:rPr>
-              <a:t> "1~28일 간격 또는 매월 1~28일 중 하루"로 고친다.</a:t>
-            </a:r>
-          </a:p>
-          <a:p>
-            <a:pPr lvl="3" marL="457200" indent="-182880">
-              <a:spcBef>
-                <a:spcPts val="300"/>
-              </a:spcBef>
-              <a:spcAft>
-                <a:spcPts val="300"/>
-              </a:spcAft>
-              <a:buSzPct val="90000"/>
-              <a:buFont typeface="Wingdings" pitchFamily="2" charset="2"/>
-              <a:buChar char=""/>
-            </a:pPr>
-            <a:r>
-              <a:rPr sz="1200" b="1">
-                <a:solidFill>
-                  <a:srgbClr val="000000"/>
-                </a:solidFill>
-                <a:latin typeface="맑은 고딕"/>
-                <a:ea typeface="맑은 고딕"/>
-              </a:rPr>
-              <a:t>R5 결제 방법</a:t>
-            </a:r>
-            <a:r>
-              <a:rPr sz="1200" b="0">
-                <a:solidFill>
-                  <a:srgbClr val="000000"/>
-                </a:solidFill>
-                <a:latin typeface="맑은 고딕"/>
-                <a:ea typeface="맑은 고딕"/>
-              </a:rPr>
-              <a:t> —</a:t>
-            </a:r>
-            <a:r>
-              <a:rPr sz="1000" b="0">
-                <a:solidFill>
-                  <a:srgbClr val="000000"/>
-                </a:solidFill>
-                <a:latin typeface="맑은 고딕"/>
-                <a:ea typeface="맑은 고딕"/>
-              </a:rPr>
-              <a:t> 포인트를 더한다.</a:t>
-            </a:r>
-          </a:p>
-          <a:p>
-            <a:pPr lvl="2" marL="228600" indent="-182880">
-              <a:spcBef>
-                <a:spcPts val="300"/>
-              </a:spcBef>
-              <a:spcAft>
-                <a:spcPts val="300"/>
-              </a:spcAft>
-              <a:buSzPct val="90000"/>
-              <a:buFont typeface="Wingdings" pitchFamily="2" charset="2"/>
-              <a:buChar char=""/>
-            </a:pPr>
-            <a:r>
-              <a:rPr sz="1400" b="1">
-                <a:solidFill>
-                  <a:srgbClr val="000000"/>
-                </a:solidFill>
-                <a:latin typeface="맑은 고딕"/>
-                <a:ea typeface="맑은 고딕"/>
-              </a:rPr>
-              <a:t>용어집</a:t>
-            </a:r>
-            <a:r>
-              <a:rPr sz="1000" b="0">
-                <a:solidFill>
-                  <a:srgbClr val="000000"/>
-                </a:solidFill>
-                <a:latin typeface="맑은 고딕"/>
-                <a:ea typeface="맑은 고딕"/>
-              </a:rPr>
-              <a:t>(실습 2)</a:t>
-            </a:r>
-          </a:p>
-          <a:p>
-            <a:pPr lvl="3" marL="457200" indent="-182880">
-              <a:spcBef>
-                <a:spcPts val="300"/>
-              </a:spcBef>
-              <a:spcAft>
-                <a:spcPts val="300"/>
-              </a:spcAft>
-              <a:buSzPct val="90000"/>
-              <a:buFont typeface="Wingdings" pitchFamily="2" charset="2"/>
-              <a:buChar char=""/>
-            </a:pPr>
-            <a:r>
-              <a:rPr sz="1200" b="1">
-                <a:solidFill>
-                  <a:srgbClr val="000000"/>
-                </a:solidFill>
-                <a:latin typeface="맑은 고딕"/>
-                <a:ea typeface="맑은 고딕"/>
-              </a:rPr>
-              <a:t>새 용어</a:t>
-            </a:r>
-            <a:r>
-              <a:rPr sz="1200" b="0">
-                <a:solidFill>
-                  <a:srgbClr val="000000"/>
-                </a:solidFill>
-                <a:latin typeface="맑은 고딕"/>
-                <a:ea typeface="맑은 고딕"/>
-              </a:rPr>
-              <a:t> —</a:t>
-            </a:r>
-            <a:r>
-              <a:rPr sz="1000" b="0">
-                <a:solidFill>
-                  <a:srgbClr val="000000"/>
-                </a:solidFill>
-                <a:latin typeface="맑은 고딕"/>
-                <a:ea typeface="맑은 고딕"/>
-              </a:rPr>
-              <a:t> 배송 주기 </a:t>
-            </a:r>
-            <a:r>
-              <a:rPr sz="1000" b="0">
-                <a:solidFill>
-                  <a:srgbClr val="000000"/>
-                </a:solidFill>
-                <a:latin typeface="맑은 고딕"/>
-                <a:ea typeface="맑은 고딕"/>
-              </a:rPr>
-              <a:t>DeliveryCycle</a:t>
-            </a:r>
-            <a:r>
-              <a:rPr sz="800" b="0">
-                <a:solidFill>
-                  <a:srgbClr val="000000"/>
-                </a:solidFill>
-                <a:latin typeface="맑은 고딕"/>
-                <a:ea typeface="맑은 고딕"/>
-              </a:rPr>
-              <a:t>(타입)</a:t>
-            </a:r>
-            <a:r>
-              <a:rPr sz="1000" b="0">
-                <a:solidFill>
-                  <a:srgbClr val="000000"/>
-                </a:solidFill>
-                <a:latin typeface="맑은 고딕"/>
-                <a:ea typeface="맑은 고딕"/>
-              </a:rPr>
-              <a:t>, 일 간격 </a:t>
-            </a:r>
-            <a:r>
-              <a:rPr sz="1000" b="0">
-                <a:solidFill>
-                  <a:srgbClr val="000000"/>
-                </a:solidFill>
-                <a:latin typeface="맑은 고딕"/>
-                <a:ea typeface="맑은 고딕"/>
-              </a:rPr>
-              <a:t>DailyCycle</a:t>
-            </a:r>
-            <a:r>
-              <a:rPr sz="1000" b="0">
-                <a:solidFill>
-                  <a:srgbClr val="000000"/>
-                </a:solidFill>
-                <a:latin typeface="맑은 고딕"/>
-                <a:ea typeface="맑은 고딕"/>
-              </a:rPr>
-              <a:t>, 매월 ○일 </a:t>
-            </a:r>
-            <a:r>
-              <a:rPr sz="1000" b="0">
-                <a:solidFill>
-                  <a:srgbClr val="000000"/>
-                </a:solidFill>
-                <a:latin typeface="맑은 고딕"/>
-                <a:ea typeface="맑은 고딕"/>
-              </a:rPr>
-              <a:t>MonthlyCycle</a:t>
-            </a:r>
-            <a:r>
-              <a:rPr sz="1000" b="0">
-                <a:solidFill>
-                  <a:srgbClr val="000000"/>
-                </a:solidFill>
-                <a:latin typeface="맑은 고딕"/>
-                <a:ea typeface="맑은 고딕"/>
-              </a:rPr>
-              <a:t>, 포인트 </a:t>
-            </a:r>
-            <a:r>
-              <a:rPr sz="1000" b="0">
-                <a:solidFill>
-                  <a:srgbClr val="000000"/>
-                </a:solidFill>
-                <a:latin typeface="맑은 고딕"/>
-                <a:ea typeface="맑은 고딕"/>
-              </a:rPr>
-              <a:t>POINT</a:t>
-            </a:r>
-          </a:p>
-        </p:txBody>
-      </p:sp>
-      <p:sp>
-        <p:nvSpPr>
-          <p:cNvPr id="9" name="내용 개체 틀 7">
-            <a:extLst>
-              <a:ext uri="{FF2B5EF4-FFF2-40B4-BE49-F238E27FC236}">
-                <a16:creationId xmlns:a16="http://schemas.microsoft.com/office/drawing/2014/main" id="{BEBA2C4A-B0BF-F2E4-EA6E-614C99CBA184}"/>
-              </a:ext>
-            </a:extLst>
-          </p:cNvPr>
-          <p:cNvSpPr>
-            <a:spLocks noGrp="1"/>
-          </p:cNvSpPr>
-          <p:nvPr>
-            <p:ph idx="1"/>
-          </p:nvPr>
-        </p:nvSpPr>
-        <p:spPr>
-          <a:xfrm>
-            <a:off x="233172" y="960120"/>
-            <a:ext cx="8778240" cy="454198"/>
+            <a:off x="365760" y="960120"/>
+            <a:ext cx="8412480" cy="2514600"/>
           </a:xfrm>
         </p:spPr>
         <p:txBody>
@@ -38326,7 +38268,7 @@
                 <a:latin typeface="맑은 고딕"/>
                 <a:ea typeface="맑은 고딕"/>
               </a:rPr>
-              <a:t>변경을 설계하며 발견한 것은 </a:t>
+              <a:t>주기의 </a:t>
             </a:r>
             <a:r>
               <a:rPr sz="1400" b="1">
@@ -38336,7 +38278,7 @@
                 <a:latin typeface="맑은 고딕"/>
                 <a:ea typeface="맑은 고딕"/>
               </a:rPr>
-              <a:t>후속 작업에 영향을 미치는 경우에만</a:t>
+              <a:t>종류만</a:t>
             </a:r>
             <a:r>
               <a:rPr sz="1400" b="0">
@@ -38346,245 +38288,35 @@
                 <a:latin typeface="맑은 고딕"/>
                 <a:ea typeface="맑은 고딕"/>
               </a:rPr>
-              <a:t> 이전 산출물에 반영한다.</a:t>
+              <a:t> 약속 뒤로 보내고, 나머지는 그대로 두었다.</a:t>
             </a:r>
           </a:p>
         </p:txBody>
       </p:sp>
-      <p:sp>
-        <p:nvSpPr>
-          <p:cNvPr id="10" name="내용 개체 틀 7">
-            <a:extLst>
-              <a:ext uri="{FF2B5EF4-FFF2-40B4-BE49-F238E27FC236}">
-                <a16:creationId xmlns:a16="http://schemas.microsoft.com/office/drawing/2014/main" id="{BEBA2C4A-B0BF-F2E4-EA6E-614C99CBA184}"/>
-              </a:ext>
-            </a:extLst>
-          </p:cNvPr>
-          <p:cNvSpPr>
-            <a:spLocks noGrp="1"/>
-          </p:cNvSpPr>
-          <p:nvPr>
-            <p:ph idx="1"/>
-          </p:nvPr>
-        </p:nvSpPr>
+      <p:pic>
+        <p:nvPicPr>
+          <p:cNvPr id="9" name="plantuml Diagram 8"/>
+          <p:cNvPicPr>
+            <a:picLocks noChangeAspect="1"/>
+          </p:cNvPicPr>
+          <p:nvPr/>
+        </p:nvPicPr>
+        <p:blipFill>
+          <a:blip r:embed="plantumlImage8"/>
+          <a:stretch>
+            <a:fillRect/>
+          </a:stretch>
+        </p:blipFill>
         <p:spPr>
           <a:xfrm>
-            <a:off x="4572000" y="1414318"/>
-            <a:ext cx="4439412" cy="4898147"/>
+            <a:off x="2715846" y="1681697"/>
+            <a:ext cx="3712308" cy="4370754"/>
           </a:xfrm>
+          <a:prstGeom prst="rect">
+            <a:avLst/>
+          </a:prstGeom>
         </p:spPr>
-        <p:txBody>
-          <a:bodyPr>
-            <a:normAutofit/>
-          </a:bodyPr>
-          <a:lstStyle/>
-          <a:p>
-            <a:pPr lvl="2" marL="228600" indent="-182880">
-              <a:spcBef>
-                <a:spcPts val="300"/>
-              </a:spcBef>
-              <a:spcAft>
-                <a:spcPts val="300"/>
-              </a:spcAft>
-              <a:buSzPct val="90000"/>
-              <a:buFont typeface="Wingdings" pitchFamily="2" charset="2"/>
-              <a:buChar char=""/>
-            </a:pPr>
-            <a:r>
-              <a:rPr sz="1400" b="1">
-                <a:solidFill>
-                  <a:srgbClr val="000000"/>
-                </a:solidFill>
-                <a:latin typeface="맑은 고딕"/>
-                <a:ea typeface="맑은 고딕"/>
-              </a:rPr>
-              <a:t>도메인 모델</a:t>
-            </a:r>
-            <a:r>
-              <a:rPr sz="1000" b="0">
-                <a:solidFill>
-                  <a:srgbClr val="000000"/>
-                </a:solidFill>
-                <a:latin typeface="맑은 고딕"/>
-                <a:ea typeface="맑은 고딕"/>
-              </a:rPr>
-              <a:t>(실습 3)</a:t>
-            </a:r>
-          </a:p>
-          <a:p>
-            <a:pPr lvl="3" marL="457200" indent="-182880">
-              <a:spcBef>
-                <a:spcPts val="300"/>
-              </a:spcBef>
-              <a:spcAft>
-                <a:spcPts val="300"/>
-              </a:spcAft>
-              <a:buSzPct val="90000"/>
-              <a:buFont typeface="Wingdings" pitchFamily="2" charset="2"/>
-              <a:buChar char=""/>
-            </a:pPr>
-            <a:r>
-              <a:rPr sz="1200" b="1">
-                <a:solidFill>
-                  <a:srgbClr val="000000"/>
-                </a:solidFill>
-                <a:latin typeface="맑은 고딕"/>
-                <a:ea typeface="맑은 고딕"/>
-              </a:rPr>
-              <a:t>배송 주기의 속성 도메인</a:t>
-            </a:r>
-            <a:r>
-              <a:rPr sz="1200" b="0">
-                <a:solidFill>
-                  <a:srgbClr val="000000"/>
-                </a:solidFill>
-                <a:latin typeface="맑은 고딕"/>
-                <a:ea typeface="맑은 고딕"/>
-              </a:rPr>
-              <a:t> —</a:t>
-            </a:r>
-            <a:r>
-              <a:rPr sz="1000" b="0">
-                <a:solidFill>
-                  <a:srgbClr val="000000"/>
-                </a:solidFill>
-                <a:latin typeface="맑은 고딕"/>
-                <a:ea typeface="맑은 고딕"/>
-              </a:rPr>
-              <a:t> 일수에서 "일 간격 또는 매월 ○일"로 바꾼다.</a:t>
-            </a:r>
-          </a:p>
-          <a:p>
-            <a:pPr lvl="2" marL="228600" indent="-182880">
-              <a:spcBef>
-                <a:spcPts val="300"/>
-              </a:spcBef>
-              <a:spcAft>
-                <a:spcPts val="300"/>
-              </a:spcAft>
-              <a:buSzPct val="90000"/>
-              <a:buFont typeface="Wingdings" pitchFamily="2" charset="2"/>
-              <a:buChar char=""/>
-            </a:pPr>
-            <a:r>
-              <a:rPr sz="1400" b="1">
-                <a:solidFill>
-                  <a:srgbClr val="000000"/>
-                </a:solidFill>
-                <a:latin typeface="맑은 고딕"/>
-                <a:ea typeface="맑은 고딕"/>
-              </a:rPr>
-              <a:t>※ 현행화 기준</a:t>
-            </a:r>
-          </a:p>
-          <a:p>
-            <a:pPr lvl="3" marL="457200" indent="-182880">
-              <a:spcBef>
-                <a:spcPts val="300"/>
-              </a:spcBef>
-              <a:spcAft>
-                <a:spcPts val="300"/>
-              </a:spcAft>
-              <a:buSzPct val="90000"/>
-              <a:buFont typeface="Wingdings" pitchFamily="2" charset="2"/>
-              <a:buChar char=""/>
-            </a:pPr>
-            <a:r>
-              <a:rPr sz="1200" b="1">
-                <a:solidFill>
-                  <a:srgbClr val="000000"/>
-                </a:solidFill>
-                <a:latin typeface="맑은 고딕"/>
-                <a:ea typeface="맑은 고딕"/>
-              </a:rPr>
-              <a:t>반영</a:t>
-            </a:r>
-            <a:r>
-              <a:rPr sz="1200" b="0">
-                <a:solidFill>
-                  <a:srgbClr val="000000"/>
-                </a:solidFill>
-                <a:latin typeface="맑은 고딕"/>
-                <a:ea typeface="맑은 고딕"/>
-              </a:rPr>
-              <a:t> —</a:t>
-            </a:r>
-            <a:r>
-              <a:rPr sz="1000" b="0">
-                <a:solidFill>
-                  <a:srgbClr val="000000"/>
-                </a:solidFill>
-                <a:latin typeface="맑은 고딕"/>
-                <a:ea typeface="맑은 고딕"/>
-              </a:rPr>
-              <a:t> R1·R5, 용어집, 속성 도메인. 설계 대안 평가의 입력이 된다.</a:t>
-            </a:r>
-          </a:p>
-          <a:p>
-            <a:pPr lvl="3" marL="457200" indent="-182880">
-              <a:spcBef>
-                <a:spcPts val="300"/>
-              </a:spcBef>
-              <a:spcAft>
-                <a:spcPts val="300"/>
-              </a:spcAft>
-              <a:buSzPct val="90000"/>
-              <a:buFont typeface="Wingdings" pitchFamily="2" charset="2"/>
-              <a:buChar char=""/>
-            </a:pPr>
-            <a:r>
-              <a:rPr sz="1200" b="1">
-                <a:solidFill>
-                  <a:srgbClr val="000000"/>
-                </a:solidFill>
-                <a:latin typeface="맑은 고딕"/>
-                <a:ea typeface="맑은 고딕"/>
-              </a:rPr>
-              <a:t>기록만</a:t>
-            </a:r>
-            <a:r>
-              <a:rPr sz="1200" b="0">
-                <a:solidFill>
-                  <a:srgbClr val="000000"/>
-                </a:solidFill>
-                <a:latin typeface="맑은 고딕"/>
-                <a:ea typeface="맑은 고딕"/>
-              </a:rPr>
-              <a:t> —</a:t>
-            </a:r>
-            <a:r>
-              <a:rPr sz="1000" b="0">
-                <a:solidFill>
-                  <a:srgbClr val="000000"/>
-                </a:solidFill>
-                <a:latin typeface="맑은 고딕"/>
-                <a:ea typeface="맑은 고딕"/>
-              </a:rPr>
-              <a:t> 유스케이스 명세서의 예외 흐름 3a</a:t>
-            </a:r>
-            <a:r>
-              <a:rPr sz="800" b="0">
-                <a:solidFill>
-                  <a:srgbClr val="000000"/>
-                </a:solidFill>
-                <a:latin typeface="맑은 고딕"/>
-                <a:ea typeface="맑은 고딕"/>
-              </a:rPr>
-              <a:t>(범위 벗어남)</a:t>
-            </a:r>
-            <a:r>
-              <a:rPr sz="1000" b="0">
-                <a:solidFill>
-                  <a:srgbClr val="000000"/>
-                </a:solidFill>
-                <a:latin typeface="맑은 고딕"/>
-                <a:ea typeface="맑은 고딕"/>
-              </a:rPr>
-              <a:t>의 문구.</a:t>
-            </a:r>
-          </a:p>
-        </p:txBody>
-      </p:sp>
+      </p:pic>
     </p:spTree>
     <p:extLst>
       <p:ext uri="{BB962C8B-B14F-4D97-AF65-F5344CB8AC3E}">
@@ -38650,7 +38382,29 @@
                 <a:latin typeface="맑은 고딕"/>
                 <a:ea typeface="맑은 고딕"/>
               </a:rPr>
-              <a:t>43. 요약</a:t>
+              <a:t>변화 대응 보완 </a:t>
+            </a:r>
+            <a:r>
+              <a:rPr sz="1800" b="1">
+                <a:solidFill>
+                  <a:srgbClr val="000000"/>
+                </a:solidFill>
+                <a:latin typeface="맑은 고딕"/>
+                <a:ea typeface="맑은 고딕"/>
+              </a:rPr>
+              <a:t>(안)</a:t>
+            </a:r>
+          </a:p>
+          <a:p>
+            <a:r>
+              <a:rPr sz="1100" b="1">
+                <a:solidFill>
+                  <a:srgbClr val="000000"/>
+                </a:solidFill>
+                <a:latin typeface="맑은 고딕"/>
+                <a:ea typeface="맑은 고딕"/>
+              </a:rPr>
+              <a:t>별첨. 실습 답</a:t>
             </a:r>
           </a:p>
         </p:txBody>
@@ -38713,7 +38467,7 @@
           <a:p>
             <a:r>
               <a:rPr kumimoji="1" lang="en-US" altLang="ko-KR" sz="1400" dirty="0" err="1"/>
-              <a:t>08. 변화 대응과 변이 설계</a:t>
+              <a:t>별첨: 08. 변화 대응과 변이 설계</a:t>
             </a:r>
           </a:p>
         </p:txBody>
@@ -38784,290 +38538,514 @@
             <p:ph idx="1"/>
           </p:nvPr>
         </p:nvSpPr>
-        <p:spPr/>
+        <p:spPr>
+          <a:xfrm>
+            <a:off x="233172" y="1414318"/>
+            <a:ext cx="4338828" cy="4898147"/>
+          </a:xfrm>
+        </p:spPr>
         <p:txBody>
           <a:bodyPr>
             <a:normAutofit/>
           </a:bodyPr>
           <a:lstStyle/>
           <a:p>
-            <a:pPr marL="0" indent="0">
+            <a:pPr lvl="2" marL="228600" indent="-182880">
               <a:spcBef>
-                <a:spcPts val="600"/>
+                <a:spcPts val="300"/>
               </a:spcBef>
               <a:spcAft>
-                <a:spcPts val="600"/>
-              </a:spcAft>
-              <a:buNone/>
-            </a:pPr>
-            <a:r>
-              <a:rPr sz="1800" b="0">
-                <a:solidFill>
-                  <a:srgbClr val="000000"/>
-                </a:solidFill>
-                <a:latin typeface="맑은 고딕"/>
-                <a:ea typeface="맑은 고딕"/>
-              </a:rPr>
-              <a:t>이 세션은 </a:t>
-            </a:r>
-            <a:r>
-              <a:rPr sz="1800" b="1">
-                <a:solidFill>
-                  <a:srgbClr val="000000"/>
-                </a:solidFill>
-                <a:latin typeface="맑은 고딕"/>
-                <a:ea typeface="맑은 고딕"/>
-              </a:rPr>
-              <a:t>실제 변경 요청</a:t>
-            </a:r>
-            <a:r>
-              <a:rPr sz="1800" b="0">
-                <a:solidFill>
-                  <a:srgbClr val="000000"/>
-                </a:solidFill>
-                <a:latin typeface="맑은 고딕"/>
-                <a:ea typeface="맑은 고딕"/>
-              </a:rPr>
-              <a:t>으로 설계의 파급을 관찰하고, 변화를 </a:t>
-            </a:r>
-            <a:r>
-              <a:rPr sz="1800" b="1">
-                <a:solidFill>
-                  <a:srgbClr val="000000"/>
-                </a:solidFill>
-                <a:latin typeface="맑은 고딕"/>
-                <a:ea typeface="맑은 고딕"/>
-              </a:rPr>
-              <a:t>국소화</a:t>
-            </a:r>
-            <a:r>
-              <a:rPr sz="1800" b="0">
-                <a:solidFill>
-                  <a:srgbClr val="000000"/>
-                </a:solidFill>
-                <a:latin typeface="맑은 고딕"/>
-                <a:ea typeface="맑은 고딕"/>
-              </a:rPr>
-              <a:t>하는 설계를 만들었다.</a:t>
-            </a:r>
-          </a:p>
-          <a:p>
-            <a:pPr marL="342900" indent="0">
-              <a:spcBef>
-                <a:spcPts val="600"/>
-              </a:spcBef>
-              <a:spcAft>
-                <a:spcPts val="600"/>
-              </a:spcAft>
-              <a:buNone/>
-            </a:pPr>
-            <a:r>
-              <a:rPr sz="1800" b="1">
-                <a:solidFill>
-                  <a:srgbClr val="000000"/>
-                </a:solidFill>
-                <a:latin typeface="맑은 고딕"/>
-                <a:ea typeface="맑은 고딕"/>
-              </a:rPr>
-              <a:t>변화 대응과 변이 설계의 핵심</a:t>
-            </a:r>
-          </a:p>
-          <a:p>
-            <a:pPr lvl="2" marL="723900" indent="-368300">
-              <a:spcBef>
-                <a:spcPts val="600"/>
-              </a:spcBef>
-              <a:spcAft>
-                <a:spcPts val="600"/>
+                <a:spcPts val="300"/>
               </a:spcAft>
               <a:buSzPct val="90000"/>
               <a:buFont typeface="Wingdings" pitchFamily="2" charset="2"/>
               <a:buChar char=""/>
             </a:pPr>
             <a:r>
-              <a:rPr sz="1800" b="1">
-                <a:solidFill>
-                  <a:srgbClr val="000000"/>
-                </a:solidFill>
-                <a:latin typeface="맑은 고딕"/>
-                <a:ea typeface="맑은 고딕"/>
-              </a:rPr>
-              <a:t>판단</a:t>
-            </a:r>
-            <a:r>
-              <a:rPr sz="1800" b="0">
-                <a:solidFill>
-                  <a:srgbClr val="000000"/>
-                </a:solidFill>
-                <a:latin typeface="맑은 고딕"/>
-                <a:ea typeface="맑은 고딕"/>
-              </a:rPr>
-              <a:t> —</a:t>
-            </a:r>
-            <a:r>
-              <a:rPr sz="1600" b="0">
-                <a:solidFill>
-                  <a:srgbClr val="000000"/>
-                </a:solidFill>
-                <a:latin typeface="맑은 고딕"/>
-                <a:ea typeface="맑은 고딕"/>
-              </a:rPr>
-              <a:t> 모든 변이가 아니라 실제 변경 압력을 국소화한다</a:t>
-            </a:r>
-          </a:p>
-          <a:p>
-            <a:pPr lvl="2" marL="723900" indent="-368300">
+              <a:rPr sz="1400" b="1">
+                <a:solidFill>
+                  <a:srgbClr val="000000"/>
+                </a:solidFill>
+                <a:latin typeface="맑은 고딕"/>
+                <a:ea typeface="맑은 고딕"/>
+              </a:rPr>
+              <a:t>요구사항 정의서</a:t>
+            </a:r>
+            <a:r>
+              <a:rPr sz="1000" b="0">
+                <a:solidFill>
+                  <a:srgbClr val="000000"/>
+                </a:solidFill>
+                <a:latin typeface="맑은 고딕"/>
+                <a:ea typeface="맑은 고딕"/>
+              </a:rPr>
+              <a:t>(실습 1)</a:t>
+            </a:r>
+          </a:p>
+          <a:p>
+            <a:pPr lvl="3" marL="457200" indent="-182880">
               <a:spcBef>
-                <a:spcPts val="600"/>
+                <a:spcPts val="300"/>
               </a:spcBef>
               <a:spcAft>
-                <a:spcPts val="600"/>
+                <a:spcPts val="300"/>
+              </a:spcAft>
+              <a:buSzPct val="90000"/>
+              <a:buFont typeface="Wingdings" pitchFamily="2" charset="2"/>
+              <a:buChar char=""/>
+            </a:pPr>
+            <a:r>
+              <a:rPr sz="1200" b="1">
+                <a:solidFill>
+                  <a:srgbClr val="000000"/>
+                </a:solidFill>
+                <a:latin typeface="맑은 고딕"/>
+                <a:ea typeface="맑은 고딕"/>
+              </a:rPr>
+              <a:t>R1 배송 주기</a:t>
+            </a:r>
+            <a:r>
+              <a:rPr sz="1200" b="0">
+                <a:solidFill>
+                  <a:srgbClr val="000000"/>
+                </a:solidFill>
+                <a:latin typeface="맑은 고딕"/>
+                <a:ea typeface="맑은 고딕"/>
+              </a:rPr>
+              <a:t> —</a:t>
+            </a:r>
+            <a:r>
+              <a:rPr sz="1000" b="0">
+                <a:solidFill>
+                  <a:srgbClr val="000000"/>
+                </a:solidFill>
+                <a:latin typeface="맑은 고딕"/>
+                <a:ea typeface="맑은 고딕"/>
+              </a:rPr>
+              <a:t> "1~28일 간격 또는 매월 1~28일 중 하루"로 고친다.</a:t>
+            </a:r>
+          </a:p>
+          <a:p>
+            <a:pPr lvl="3" marL="457200" indent="-182880">
+              <a:spcBef>
+                <a:spcPts val="300"/>
+              </a:spcBef>
+              <a:spcAft>
+                <a:spcPts val="300"/>
+              </a:spcAft>
+              <a:buSzPct val="90000"/>
+              <a:buFont typeface="Wingdings" pitchFamily="2" charset="2"/>
+              <a:buChar char=""/>
+            </a:pPr>
+            <a:r>
+              <a:rPr sz="1200" b="1">
+                <a:solidFill>
+                  <a:srgbClr val="000000"/>
+                </a:solidFill>
+                <a:latin typeface="맑은 고딕"/>
+                <a:ea typeface="맑은 고딕"/>
+              </a:rPr>
+              <a:t>R5 결제 방법</a:t>
+            </a:r>
+            <a:r>
+              <a:rPr sz="1200" b="0">
+                <a:solidFill>
+                  <a:srgbClr val="000000"/>
+                </a:solidFill>
+                <a:latin typeface="맑은 고딕"/>
+                <a:ea typeface="맑은 고딕"/>
+              </a:rPr>
+              <a:t> —</a:t>
+            </a:r>
+            <a:r>
+              <a:rPr sz="1000" b="0">
+                <a:solidFill>
+                  <a:srgbClr val="000000"/>
+                </a:solidFill>
+                <a:latin typeface="맑은 고딕"/>
+                <a:ea typeface="맑은 고딕"/>
+              </a:rPr>
+              <a:t> 포인트를 더한다.</a:t>
+            </a:r>
+          </a:p>
+          <a:p>
+            <a:pPr lvl="2" marL="228600" indent="-182880">
+              <a:spcBef>
+                <a:spcPts val="300"/>
+              </a:spcBef>
+              <a:spcAft>
+                <a:spcPts val="300"/>
               </a:spcAft>
               <a:buSzPct val="90000"/>
               <a:buFont typeface="Wingdings" pitchFamily="2" charset="2"/>
               <a:buChar char=""/>
             </a:pPr>
             <a:r>
-              <a:rPr sz="1800" b="1">
-                <a:solidFill>
-                  <a:srgbClr val="000000"/>
-                </a:solidFill>
-                <a:latin typeface="맑은 고딕"/>
-                <a:ea typeface="맑은 고딕"/>
-              </a:rPr>
-              <a:t>파급</a:t>
-            </a:r>
-            <a:r>
-              <a:rPr sz="1800" b="0">
-                <a:solidFill>
-                  <a:srgbClr val="000000"/>
-                </a:solidFill>
-                <a:latin typeface="맑은 고딕"/>
-                <a:ea typeface="맑은 고딕"/>
-              </a:rPr>
-              <a:t> —</a:t>
-            </a:r>
-            <a:r>
-              <a:rPr sz="1600" b="0">
-                <a:solidFill>
-                  <a:srgbClr val="000000"/>
-                </a:solidFill>
-                <a:latin typeface="맑은 고딕"/>
-                <a:ea typeface="맑은 고딕"/>
-              </a:rPr>
-              <a:t> 바뀌는 곳과 그대로인 곳을 적어 경직성을 드러낸다</a:t>
-            </a:r>
-          </a:p>
-          <a:p>
-            <a:pPr lvl="2" marL="723900" indent="-368300">
+              <a:rPr sz="1400" b="1">
+                <a:solidFill>
+                  <a:srgbClr val="000000"/>
+                </a:solidFill>
+                <a:latin typeface="맑은 고딕"/>
+                <a:ea typeface="맑은 고딕"/>
+              </a:rPr>
+              <a:t>용어집</a:t>
+            </a:r>
+            <a:r>
+              <a:rPr sz="1000" b="0">
+                <a:solidFill>
+                  <a:srgbClr val="000000"/>
+                </a:solidFill>
+                <a:latin typeface="맑은 고딕"/>
+                <a:ea typeface="맑은 고딕"/>
+              </a:rPr>
+              <a:t>(실습 2)</a:t>
+            </a:r>
+          </a:p>
+          <a:p>
+            <a:pPr lvl="3" marL="457200" indent="-182880">
               <a:spcBef>
-                <a:spcPts val="600"/>
+                <a:spcPts val="300"/>
               </a:spcBef>
               <a:spcAft>
-                <a:spcPts val="600"/>
+                <a:spcPts val="300"/>
+              </a:spcAft>
+              <a:buSzPct val="90000"/>
+              <a:buFont typeface="Wingdings" pitchFamily="2" charset="2"/>
+              <a:buChar char=""/>
+            </a:pPr>
+            <a:r>
+              <a:rPr sz="1200" b="1">
+                <a:solidFill>
+                  <a:srgbClr val="000000"/>
+                </a:solidFill>
+                <a:latin typeface="맑은 고딕"/>
+                <a:ea typeface="맑은 고딕"/>
+              </a:rPr>
+              <a:t>새 용어</a:t>
+            </a:r>
+            <a:r>
+              <a:rPr sz="1200" b="0">
+                <a:solidFill>
+                  <a:srgbClr val="000000"/>
+                </a:solidFill>
+                <a:latin typeface="맑은 고딕"/>
+                <a:ea typeface="맑은 고딕"/>
+              </a:rPr>
+              <a:t> —</a:t>
+            </a:r>
+            <a:r>
+              <a:rPr sz="1000" b="0">
+                <a:solidFill>
+                  <a:srgbClr val="000000"/>
+                </a:solidFill>
+                <a:latin typeface="맑은 고딕"/>
+                <a:ea typeface="맑은 고딕"/>
+              </a:rPr>
+              <a:t> 배송 주기 </a:t>
+            </a:r>
+            <a:r>
+              <a:rPr sz="1000" b="0">
+                <a:solidFill>
+                  <a:srgbClr val="000000"/>
+                </a:solidFill>
+                <a:latin typeface="맑은 고딕"/>
+                <a:ea typeface="맑은 고딕"/>
+              </a:rPr>
+              <a:t>DeliveryCycle</a:t>
+            </a:r>
+            <a:r>
+              <a:rPr sz="800" b="0">
+                <a:solidFill>
+                  <a:srgbClr val="000000"/>
+                </a:solidFill>
+                <a:latin typeface="맑은 고딕"/>
+                <a:ea typeface="맑은 고딕"/>
+              </a:rPr>
+              <a:t>(타입)</a:t>
+            </a:r>
+            <a:r>
+              <a:rPr sz="1000" b="0">
+                <a:solidFill>
+                  <a:srgbClr val="000000"/>
+                </a:solidFill>
+                <a:latin typeface="맑은 고딕"/>
+                <a:ea typeface="맑은 고딕"/>
+              </a:rPr>
+              <a:t>, 일 간격 </a:t>
+            </a:r>
+            <a:r>
+              <a:rPr sz="1000" b="0">
+                <a:solidFill>
+                  <a:srgbClr val="000000"/>
+                </a:solidFill>
+                <a:latin typeface="맑은 고딕"/>
+                <a:ea typeface="맑은 고딕"/>
+              </a:rPr>
+              <a:t>DailyCycle</a:t>
+            </a:r>
+            <a:r>
+              <a:rPr sz="1000" b="0">
+                <a:solidFill>
+                  <a:srgbClr val="000000"/>
+                </a:solidFill>
+                <a:latin typeface="맑은 고딕"/>
+                <a:ea typeface="맑은 고딕"/>
+              </a:rPr>
+              <a:t>, 매월 ○일 </a:t>
+            </a:r>
+            <a:r>
+              <a:rPr sz="1000" b="0">
+                <a:solidFill>
+                  <a:srgbClr val="000000"/>
+                </a:solidFill>
+                <a:latin typeface="맑은 고딕"/>
+                <a:ea typeface="맑은 고딕"/>
+              </a:rPr>
+              <a:t>MonthlyCycle</a:t>
+            </a:r>
+            <a:r>
+              <a:rPr sz="1000" b="0">
+                <a:solidFill>
+                  <a:srgbClr val="000000"/>
+                </a:solidFill>
+                <a:latin typeface="맑은 고딕"/>
+                <a:ea typeface="맑은 고딕"/>
+              </a:rPr>
+              <a:t>, 포인트 </a:t>
+            </a:r>
+            <a:r>
+              <a:rPr sz="1000" b="0">
+                <a:solidFill>
+                  <a:srgbClr val="000000"/>
+                </a:solidFill>
+                <a:latin typeface="맑은 고딕"/>
+                <a:ea typeface="맑은 고딕"/>
+              </a:rPr>
+              <a:t>POINT</a:t>
+            </a:r>
+          </a:p>
+        </p:txBody>
+      </p:sp>
+      <p:sp>
+        <p:nvSpPr>
+          <p:cNvPr id="9" name="내용 개체 틀 7">
+            <a:extLst>
+              <a:ext uri="{FF2B5EF4-FFF2-40B4-BE49-F238E27FC236}">
+                <a16:creationId xmlns:a16="http://schemas.microsoft.com/office/drawing/2014/main" id="{BEBA2C4A-B0BF-F2E4-EA6E-614C99CBA184}"/>
+              </a:ext>
+            </a:extLst>
+          </p:cNvPr>
+          <p:cNvSpPr>
+            <a:spLocks noGrp="1"/>
+          </p:cNvSpPr>
+          <p:nvPr>
+            <p:ph idx="1"/>
+          </p:nvPr>
+        </p:nvSpPr>
+        <p:spPr>
+          <a:xfrm>
+            <a:off x="233172" y="960120"/>
+            <a:ext cx="8778240" cy="454198"/>
+          </a:xfrm>
+        </p:spPr>
+        <p:txBody>
+          <a:bodyPr>
+            <a:normAutofit/>
+          </a:bodyPr>
+          <a:lstStyle/>
+          <a:p>
+            <a:pPr marL="0" indent="0">
+              <a:spcBef>
+                <a:spcPts val="300"/>
+              </a:spcBef>
+              <a:spcAft>
+                <a:spcPts val="300"/>
+              </a:spcAft>
+              <a:buNone/>
+            </a:pPr>
+            <a:r>
+              <a:rPr sz="1400" b="0">
+                <a:solidFill>
+                  <a:srgbClr val="000000"/>
+                </a:solidFill>
+                <a:latin typeface="맑은 고딕"/>
+                <a:ea typeface="맑은 고딕"/>
+              </a:rPr>
+              <a:t>변경을 설계하며 발견한 것은 </a:t>
+            </a:r>
+            <a:r>
+              <a:rPr sz="1400" b="1">
+                <a:solidFill>
+                  <a:srgbClr val="000000"/>
+                </a:solidFill>
+                <a:latin typeface="맑은 고딕"/>
+                <a:ea typeface="맑은 고딕"/>
+              </a:rPr>
+              <a:t>후속 작업에 영향을 미치는 경우에만</a:t>
+            </a:r>
+            <a:r>
+              <a:rPr sz="1400" b="0">
+                <a:solidFill>
+                  <a:srgbClr val="000000"/>
+                </a:solidFill>
+                <a:latin typeface="맑은 고딕"/>
+                <a:ea typeface="맑은 고딕"/>
+              </a:rPr>
+              <a:t> 이전 산출물에 반영한다.</a:t>
+            </a:r>
+          </a:p>
+        </p:txBody>
+      </p:sp>
+      <p:sp>
+        <p:nvSpPr>
+          <p:cNvPr id="10" name="내용 개체 틀 7">
+            <a:extLst>
+              <a:ext uri="{FF2B5EF4-FFF2-40B4-BE49-F238E27FC236}">
+                <a16:creationId xmlns:a16="http://schemas.microsoft.com/office/drawing/2014/main" id="{BEBA2C4A-B0BF-F2E4-EA6E-614C99CBA184}"/>
+              </a:ext>
+            </a:extLst>
+          </p:cNvPr>
+          <p:cNvSpPr>
+            <a:spLocks noGrp="1"/>
+          </p:cNvSpPr>
+          <p:nvPr>
+            <p:ph idx="1"/>
+          </p:nvPr>
+        </p:nvSpPr>
+        <p:spPr>
+          <a:xfrm>
+            <a:off x="4572000" y="1414318"/>
+            <a:ext cx="4439412" cy="4898147"/>
+          </a:xfrm>
+        </p:spPr>
+        <p:txBody>
+          <a:bodyPr>
+            <a:normAutofit/>
+          </a:bodyPr>
+          <a:lstStyle/>
+          <a:p>
+            <a:pPr lvl="2" marL="228600" indent="-182880">
+              <a:spcBef>
+                <a:spcPts val="300"/>
+              </a:spcBef>
+              <a:spcAft>
+                <a:spcPts val="300"/>
               </a:spcAft>
               <a:buSzPct val="90000"/>
               <a:buFont typeface="Wingdings" pitchFamily="2" charset="2"/>
               <a:buChar char=""/>
             </a:pPr>
             <a:r>
-              <a:rPr sz="1800" b="1">
-                <a:solidFill>
-                  <a:srgbClr val="000000"/>
-                </a:solidFill>
-                <a:latin typeface="맑은 고딕"/>
-                <a:ea typeface="맑은 고딕"/>
-              </a:rPr>
-              <a:t>지점</a:t>
-            </a:r>
-            <a:r>
-              <a:rPr sz="1800" b="0">
-                <a:solidFill>
-                  <a:srgbClr val="000000"/>
-                </a:solidFill>
-                <a:latin typeface="맑은 고딕"/>
-                <a:ea typeface="맑은 고딕"/>
-              </a:rPr>
-              <a:t> —</a:t>
-            </a:r>
-            <a:r>
-              <a:rPr sz="1600" b="0">
-                <a:solidFill>
-                  <a:srgbClr val="000000"/>
-                </a:solidFill>
-                <a:latin typeface="맑은 고딕"/>
-                <a:ea typeface="맑은 고딕"/>
-              </a:rPr>
-              <a:t> 변이 지점은 지금 보호하고, 진화 지점은 추측으로 남긴다</a:t>
-            </a:r>
-          </a:p>
-          <a:p>
-            <a:pPr lvl="2" marL="723900" indent="-368300">
+              <a:rPr sz="1400" b="1">
+                <a:solidFill>
+                  <a:srgbClr val="000000"/>
+                </a:solidFill>
+                <a:latin typeface="맑은 고딕"/>
+                <a:ea typeface="맑은 고딕"/>
+              </a:rPr>
+              <a:t>도메인 모델</a:t>
+            </a:r>
+            <a:r>
+              <a:rPr sz="1000" b="0">
+                <a:solidFill>
+                  <a:srgbClr val="000000"/>
+                </a:solidFill>
+                <a:latin typeface="맑은 고딕"/>
+                <a:ea typeface="맑은 고딕"/>
+              </a:rPr>
+              <a:t>(실습 3)</a:t>
+            </a:r>
+          </a:p>
+          <a:p>
+            <a:pPr lvl="3" marL="457200" indent="-182880">
               <a:spcBef>
-                <a:spcPts val="600"/>
+                <a:spcPts val="300"/>
               </a:spcBef>
               <a:spcAft>
-                <a:spcPts val="600"/>
+                <a:spcPts val="300"/>
+              </a:spcAft>
+              <a:buSzPct val="90000"/>
+              <a:buFont typeface="Wingdings" pitchFamily="2" charset="2"/>
+              <a:buChar char=""/>
+            </a:pPr>
+            <a:r>
+              <a:rPr sz="1200" b="1">
+                <a:solidFill>
+                  <a:srgbClr val="000000"/>
+                </a:solidFill>
+                <a:latin typeface="맑은 고딕"/>
+                <a:ea typeface="맑은 고딕"/>
+              </a:rPr>
+              <a:t>배송 주기의 속성 도메인</a:t>
+            </a:r>
+            <a:r>
+              <a:rPr sz="1200" b="0">
+                <a:solidFill>
+                  <a:srgbClr val="000000"/>
+                </a:solidFill>
+                <a:latin typeface="맑은 고딕"/>
+                <a:ea typeface="맑은 고딕"/>
+              </a:rPr>
+              <a:t> —</a:t>
+            </a:r>
+            <a:r>
+              <a:rPr sz="1000" b="0">
+                <a:solidFill>
+                  <a:srgbClr val="000000"/>
+                </a:solidFill>
+                <a:latin typeface="맑은 고딕"/>
+                <a:ea typeface="맑은 고딕"/>
+              </a:rPr>
+              <a:t> 일수에서 "일 간격 또는 매월 ○일"로 바꾼다.</a:t>
+            </a:r>
+          </a:p>
+          <a:p>
+            <a:pPr lvl="2" marL="228600" indent="-182880">
+              <a:spcBef>
+                <a:spcPts val="300"/>
+              </a:spcBef>
+              <a:spcAft>
+                <a:spcPts val="300"/>
               </a:spcAft>
               <a:buSzPct val="90000"/>
               <a:buFont typeface="Wingdings" pitchFamily="2" charset="2"/>
               <a:buChar char=""/>
             </a:pPr>
             <a:r>
-              <a:rPr sz="1800" b="1">
-                <a:solidFill>
-                  <a:srgbClr val="000000"/>
-                </a:solidFill>
-                <a:latin typeface="맑은 고딕"/>
-                <a:ea typeface="맑은 고딕"/>
-              </a:rPr>
-              <a:t>원칙</a:t>
-            </a:r>
-            <a:r>
-              <a:rPr sz="1800" b="0">
-                <a:solidFill>
-                  <a:srgbClr val="000000"/>
-                </a:solidFill>
-                <a:latin typeface="맑은 고딕"/>
-                <a:ea typeface="맑은 고딕"/>
-              </a:rPr>
-              <a:t> —</a:t>
-            </a:r>
-            <a:r>
-              <a:rPr sz="1600" b="0">
-                <a:solidFill>
-                  <a:srgbClr val="000000"/>
-                </a:solidFill>
-                <a:latin typeface="맑은 고딕"/>
-                <a:ea typeface="맑은 고딕"/>
-              </a:rPr>
-              <a:t> OCP·보호된 변이·다형성·간접화·합성·구조 숨기기</a:t>
-            </a:r>
-          </a:p>
-          <a:p>
-            <a:pPr lvl="2" marL="723900" indent="-368300">
+              <a:rPr sz="1400" b="1">
+                <a:solidFill>
+                  <a:srgbClr val="000000"/>
+                </a:solidFill>
+                <a:latin typeface="맑은 고딕"/>
+                <a:ea typeface="맑은 고딕"/>
+              </a:rPr>
+              <a:t>※ 현행화 기준</a:t>
+            </a:r>
+          </a:p>
+          <a:p>
+            <a:pPr lvl="3" marL="457200" indent="-182880">
               <a:spcBef>
-                <a:spcPts val="600"/>
+                <a:spcPts val="300"/>
               </a:spcBef>
               <a:spcAft>
-                <a:spcPts val="600"/>
+                <a:spcPts val="300"/>
               </a:spcAft>
               <a:buSzPct val="90000"/>
               <a:buFont typeface="Wingdings" pitchFamily="2" charset="2"/>
-              <a:buChar char=""/>
+              <a:buChar char=""/>
             </a:pPr>
             <a:r>
-              <a:rPr sz="1800" b="1">
-                <a:solidFill>
-                  <a:srgbClr val="000000"/>
-                </a:solidFill>
-                <a:latin typeface="맑은 고딕"/>
-                <a:ea typeface="맑은 고딕"/>
-              </a:rPr>
-              <a:t>패턴</a:t>
-            </a:r>
-            <a:r>
-              <a:rPr sz="1800" b="0">
+              <a:rPr sz="1200" b="1">
+                <a:solidFill>
+                  <a:srgbClr val="000000"/>
+                </a:solidFill>
+                <a:latin typeface="맑은 고딕"/>
+                <a:ea typeface="맑은 고딕"/>
+              </a:rPr>
+              <a:t>반영</a:t>
+            </a:r>
+            <a:r>
+              <a:rPr sz="1200" b="0">
                 <a:solidFill>
                   <a:srgbClr val="000000"/>
                 </a:solidFill>
@@ -39077,40 +39055,40 @@
               <a:t> —</a:t>
             </a:r>
             <a:r>
-              <a:rPr sz="1600" b="0">
-                <a:solidFill>
-                  <a:srgbClr val="000000"/>
-                </a:solidFill>
-                <a:latin typeface="맑은 고딕"/>
-                <a:ea typeface="맑은 고딕"/>
-              </a:rPr>
-              <a:t> 어댑터·전략은 원칙을 구조로 옮긴 어휘. 압력에서 출발한다</a:t>
-            </a:r>
-          </a:p>
-          <a:p>
-            <a:pPr lvl="2" marL="723900" indent="-368300">
+              <a:rPr sz="1000" b="0">
+                <a:solidFill>
+                  <a:srgbClr val="000000"/>
+                </a:solidFill>
+                <a:latin typeface="맑은 고딕"/>
+                <a:ea typeface="맑은 고딕"/>
+              </a:rPr>
+              <a:t> R1·R5, 용어집, 속성 도메인. 설계 대안 평가의 입력이 된다.</a:t>
+            </a:r>
+          </a:p>
+          <a:p>
+            <a:pPr lvl="3" marL="457200" indent="-182880">
               <a:spcBef>
-                <a:spcPts val="600"/>
+                <a:spcPts val="300"/>
               </a:spcBef>
               <a:spcAft>
-                <a:spcPts val="600"/>
+                <a:spcPts val="300"/>
               </a:spcAft>
               <a:buSzPct val="90000"/>
               <a:buFont typeface="Wingdings" pitchFamily="2" charset="2"/>
-              <a:buChar char=""/>
+              <a:buChar char=""/>
             </a:pPr>
             <a:r>
-              <a:rPr sz="1800" b="1">
-                <a:solidFill>
-                  <a:srgbClr val="000000"/>
-                </a:solidFill>
-                <a:latin typeface="맑은 고딕"/>
-                <a:ea typeface="맑은 고딕"/>
-              </a:rPr>
-              <a:t>잘못된 관행</a:t>
-            </a:r>
-            <a:r>
-              <a:rPr sz="1800" b="0">
+              <a:rPr sz="1200" b="1">
+                <a:solidFill>
+                  <a:srgbClr val="000000"/>
+                </a:solidFill>
+                <a:latin typeface="맑은 고딕"/>
+                <a:ea typeface="맑은 고딕"/>
+              </a:rPr>
+              <a:t>기록만</a:t>
+            </a:r>
+            <a:r>
+              <a:rPr sz="1200" b="0">
                 <a:solidFill>
                   <a:srgbClr val="000000"/>
                 </a:solidFill>
@@ -39120,88 +39098,34 @@
               <a:t> —</a:t>
             </a:r>
             <a:r>
-              <a:rPr sz="1600" b="0">
-                <a:solidFill>
-                  <a:srgbClr val="000000"/>
-                </a:solidFill>
-                <a:latin typeface="맑은 고딕"/>
-                <a:ea typeface="맑은 고딕"/>
-              </a:rPr>
-              <a:t> 추측성 일반화, 흩어진 변경, 타입 검사 분기, 패턴 과잉</a:t>
-            </a:r>
-          </a:p>
-          <a:p>
-            <a:pPr marL="342900" indent="0">
-              <a:spcBef>
-                <a:spcPts val="600"/>
-              </a:spcBef>
-              <a:spcAft>
-                <a:spcPts val="600"/>
-              </a:spcAft>
-              <a:buNone/>
-            </a:pPr>
-            <a:r>
-              <a:rPr sz="1800" b="1">
-                <a:solidFill>
-                  <a:srgbClr val="000000"/>
-                </a:solidFill>
-                <a:latin typeface="맑은 고딕"/>
-                <a:ea typeface="맑은 고딕"/>
-              </a:rPr>
-              <a:t>다음 세션</a:t>
-            </a:r>
-          </a:p>
-          <a:p>
-            <a:pPr lvl="2" marL="723900" indent="-368300">
-              <a:spcBef>
-                <a:spcPts val="600"/>
-              </a:spcBef>
-              <a:spcAft>
-                <a:spcPts val="600"/>
-              </a:spcAft>
-              <a:buSzPct val="90000"/>
-              <a:buFont typeface="Wingdings" pitchFamily="2" charset="2"/>
-              <a:buChar char=""/>
-            </a:pPr>
-            <a:r>
-              <a:rPr sz="1800" b="0">
-                <a:solidFill>
-                  <a:srgbClr val="000000"/>
-                </a:solidFill>
-                <a:latin typeface="맑은 고딕"/>
-                <a:ea typeface="맑은 고딕"/>
-              </a:rPr>
-              <a:t>"</a:t>
-            </a:r>
-            <a:r>
-              <a:rPr sz="1800" b="1">
-                <a:solidFill>
-                  <a:srgbClr val="000000"/>
-                </a:solidFill>
-                <a:latin typeface="맑은 고딕"/>
-                <a:ea typeface="맑은 고딕"/>
-              </a:rPr>
-              <a:t>09. 설계 대안 평가</a:t>
-            </a:r>
-            <a:r>
-              <a:rPr sz="1800" b="0">
-                <a:solidFill>
-                  <a:srgbClr val="000000"/>
-                </a:solidFill>
-                <a:latin typeface="맑은 고딕"/>
-                <a:ea typeface="맑은 고딕"/>
-              </a:rPr>
-              <a:t>" —</a:t>
-            </a:r>
-            <a:r>
-              <a:rPr sz="1600" b="0">
-                <a:solidFill>
-                  <a:srgbClr val="000000"/>
-                </a:solidFill>
-                <a:latin typeface="맑은 고딕"/>
-                <a:ea typeface="맑은 고딕"/>
-              </a:rPr>
-              <a:t> 동일한 문제에 대한 여러 설계 대안을 change impact·품질·비용·trade-off 관점에서 비교하고 선택한다.</a:t>
+              <a:rPr sz="1000" b="0">
+                <a:solidFill>
+                  <a:srgbClr val="000000"/>
+                </a:solidFill>
+                <a:latin typeface="맑은 고딕"/>
+                <a:ea typeface="맑은 고딕"/>
+              </a:rPr>
+              <a:t> 유스케이스 명세서의 예외 흐름 3a</a:t>
+            </a:r>
+            <a:r>
+              <a:rPr sz="800" b="0">
+                <a:solidFill>
+                  <a:srgbClr val="000000"/>
+                </a:solidFill>
+                <a:latin typeface="맑은 고딕"/>
+                <a:ea typeface="맑은 고딕"/>
+              </a:rPr>
+              <a:t>(범위 벗어남)</a:t>
+            </a:r>
+            <a:r>
+              <a:rPr sz="1000" b="0">
+                <a:solidFill>
+                  <a:srgbClr val="000000"/>
+                </a:solidFill>
+                <a:latin typeface="맑은 고딕"/>
+                <a:ea typeface="맑은 고딕"/>
+              </a:rPr>
+              <a:t>의 문구.</a:t>
             </a:r>
           </a:p>
         </p:txBody>
@@ -42667,8 +42591,8 @@
           </p:nvPr>
         </p:nvGraphicFramePr>
         <p:xfrm>
-          <a:off x="2069656" y="1842998"/>
-          <a:ext cx="4991100" cy="3873500"/>
+          <a:off x="2040446" y="1842998"/>
+          <a:ext cx="5049520" cy="3873500"/>
         </p:xfrm>
         <a:graphic>
           <a:graphicData uri="http://schemas.openxmlformats.org/drawingml/2006/table">
@@ -42676,7 +42600,7 @@
               <a:tblPr/>
               <a:tblGrid>
                 <a:gridCol w="1645920"/>
-                <a:gridCol w="889000"/>
+                <a:gridCol w="947420"/>
                 <a:gridCol w="2456180"/>
               </a:tblGrid>
               <a:tr h="288000">
@@ -42760,7 +42684,7 @@
                           <a:ea typeface="맑은 고딕" panose="020B0503020000020004" pitchFamily="34" charset="-127"/>
                           <a:cs typeface="맑은 고딕"/>
                         </a:rPr>
-                        <a:t>바뀌는가</a:t>
+                        <a:t>바뀌는가?</a:t>
                       </a:r>
                     </a:p>
                   </a:txBody>

--- a/courses/ooad/sessions/s08.pptx
+++ b/courses/ooad/sessions/s08.pptx
@@ -575,7 +575,7 @@
             <a:pPr lvl="0"/>
             <a:r>
               <a:rPr lang="ko-KR" sz="1200"/>
-              <a:t>"05. 구조적 경계와 의존성"에서 약속을 업무 경계가 소유하게 한 결정(의존 역전)이 이 변경 요청에서 회수된다.</a:t>
+              <a:t>"세션 05. 구조적 경계와 의존성"에서 약속을 업무 경계가 소유하게 한 결정(의존 역전)이 이 변경 요청에서 회수된다.</a:t>
             </a:r>
           </a:p>
           <a:p>
@@ -779,14 +779,14 @@
             <a:pPr lvl="0"/>
             <a:r>
               <a:rPr lang="ko-KR" sz="1200"/>
-              <a:t>안정된 책임은 "07. 책임·협력·계약"의 계약과 불변 조건에서 나온다. 계약이 분명할수록 무엇이 안정적인지 분명하다.</a:t>
+              <a:t>안정된 책임은 "세션 07. 책임·협력·계약"의 계약과 불변 조건에서 나온다. 계약이 분명할수록 무엇이 안정적인지 분명하다.</a:t>
             </a:r>
           </a:p>
           <a:p>
             <a:pPr lvl="0"/>
             <a:r>
               <a:rPr lang="ko-KR" sz="1200"/>
-              <a:t>"05. 구조적 경계와 의존성"의 안정된 의존 원칙(SDP)과 같은 생각을 클래스 수준에서 본 것이다.</a:t>
+              <a:t>"세션 05. 구조적 경계와 의존성"의 안정된 의존 원칙(SDP)과 같은 생각을 클래스 수준에서 본 것이다.</a:t>
             </a:r>
           </a:p>
         </p:txBody>
@@ -990,7 +990,7 @@
             <a:pPr lvl="0"/>
             <a:r>
               <a:rPr lang="ko-KR" sz="1200"/>
-              <a:t>정보 은닉은 "07. 책임·협력·계약"의 「13. 정보 은닉」, 변경 이유에 따른 경계 판단은 "05. 구조적 경계와 의존성"의 「07. 경계 후보」에서 다뤘다.</a:t>
+              <a:t>정보 은닉은 "세션 07. 책임·협력·계약"의 「13. 정보 은닉」, 변경 이유에 따른 경계 판단은 "세션 05. 구조적 경계와 의존성"의 「07. 경계 후보」에서 다뤘다.</a:t>
             </a:r>
           </a:p>
         </p:txBody>
@@ -1126,7 +1126,7 @@
             <a:pPr lvl="0"/>
             <a:r>
               <a:rPr lang="ko-KR" sz="1200"/>
-              <a:t>DIP("07. 책임·협력·계약")가 의존의 방향을 말한다면, 여기서는 인터페이스가 변이를 허용하는 쪽을 본다.</a:t>
+              <a:t>DIP("세션 07. 책임·협력·계약")가 의존의 방향을 말한다면, 여기서는 인터페이스가 변이를 허용하는 쪽을 본다.</a:t>
             </a:r>
           </a:p>
         </p:txBody>
@@ -1398,7 +1398,7 @@
             <a:pPr lvl="0"/>
             <a:r>
               <a:rPr lang="ko-KR" sz="1200"/>
-              <a:t>"07. 책임·협력·계약"의 「40. 잘못된 관행 — 묻고 또 묻기」와 같은 판단을 변화 대응 관점에서 본 것이다.</a:t>
+              <a:t>"세션 07. 책임·협력·계약"의 「40. 잘못된 관행 — 묻고 또 묻기」와 같은 판단을 변화 대응 관점에서 본 것이다.</a:t>
             </a:r>
           </a:p>
         </p:txBody>
@@ -1459,7 +1459,7 @@
             <a:pPr lvl="0"/>
             <a:r>
               <a:rPr lang="ko-KR" sz="1200"/>
-              <a:t>도식은 분석의 상태 기계라 한글이다("04. 동적 모델 — 상호작용과 상태"의 「08. 상태 기계 다이어그램」의 「주문 상태 기계」에 전이 하나를 더했다). 배송 완료는 생략했다.</a:t>
+              <a:t>도식은 분석의 상태 기계라 한글이다("세션 04. 동적 모델 — 상호작용과 상태"의 「08. 상태 기계 다이어그램」의 「주문 상태 기계」에 전이 하나를 더했다). 배송 완료는 생략했다.</a:t>
             </a:r>
           </a:p>
           <a:p>
@@ -1527,7 +1527,7 @@
             <a:pPr lvl="0"/>
             <a:r>
               <a:rPr lang="ko-KR" sz="1200"/>
-              <a:t>외부 시스템마다 연동 경계를 하나 둔다는 "05. 구조적 경계와 의존성"의 결정대로 새 패키지를 만들었다. 이름은 용어집에 더했다(당일 배송 연동 SameDayDeliveryAdapter).</a:t>
+              <a:t>외부 시스템마다 연동 경계를 하나 둔다는 "세션 05. 구조적 경계와 의존성"의 결정대로 새 패키지를 만들었다. 이름은 용어집에 더했다(당일 배송 연동 SameDayDeliveryAdapter).</a:t>
             </a:r>
           </a:p>
           <a:p>
@@ -1602,7 +1602,7 @@
             <a:pPr lvl="0"/>
             <a:r>
               <a:rPr lang="ko-KR" sz="1200"/>
-              <a:t>분석으로 되돌아가는 것은 실패가 아니다. "06. 분석 모델에서 설계 모델로"의 되돌림과 같은 흐름이다.</a:t>
+              <a:t>분석으로 되돌아가는 것은 실패가 아니다. "세션 06. 분석 모델에서 설계 모델로"의 되돌림과 같은 흐름이다.</a:t>
             </a:r>
           </a:p>
         </p:txBody>
@@ -1670,7 +1670,7 @@
             <a:pPr lvl="0"/>
             <a:r>
               <a:rPr lang="ko-KR" sz="1200"/>
-              <a:t>①은 리팩터링이다 — 동작을 바꾸지 않으므로 기존 테스트가 안전망이다. 리팩터링의 실천은 "12. 구현·검증·DevOps와 SW공학 피드백"에서 다룬다.</a:t>
+              <a:t>①은 리팩터링이다 — 동작을 바꾸지 않으므로 기존 테스트가 안전망이다. 리팩터링의 실천은 "세션 12. 구현·검증·DevOps와 SW공학 피드백"에서 다룬다.</a:t>
             </a:r>
           </a:p>
         </p:txBody>
@@ -1935,7 +1935,7 @@
             <a:pPr lvl="0"/>
             <a:r>
               <a:rPr lang="ko-KR" sz="1200"/>
-              <a:t>입력은 "07. 책임·협력·계약"의 정제된 설계와 계약이다. 대안의 체계적 평가(비용·trade-off)는 "09. 설계 대안 평가"에서 한다.</a:t>
+              <a:t>입력은 "세션 07. 책임·협력·계약"의 정제된 설계와 계약이다. 대안의 체계적 평가(비용·trade-off)는 "세션 09. 설계 대안 평가"에서 한다.</a:t>
             </a:r>
           </a:p>
         </p:txBody>
@@ -2139,7 +2139,7 @@
             <a:pPr lvl="0"/>
             <a:r>
               <a:rPr lang="ko-KR" sz="1200"/>
-              <a:t>코드는 code/s08/의 원본에서 발췌했으며, 컴파일·실행해 확인한다. 결제 완료의 취소 부분은 "07. 책임·협력·계약"과 같다.</a:t>
+              <a:t>코드는 code/s08/의 원본에서 발췌했으며, 컴파일·실행해 확인한다. 결제 완료의 취소 부분은 "세션 07. 책임·협력·계약"과 같다.</a:t>
             </a:r>
           </a:p>
         </p:txBody>
@@ -2207,7 +2207,7 @@
             <a:pPr lvl="0"/>
             <a:r>
               <a:rPr lang="ko-KR" sz="1200"/>
-              <a:t>새 연동도 "07. 책임·협력·계약"의 LSP를 지켜야 한다 — 출고 중단을 요청할 수 있으면 참, 아니면 거짓. 다른 조건을 덧붙이지 않는다.</a:t>
+              <a:t>새 연동도 "세션 07. 책임·협력·계약"의 LSP를 지켜야 한다 — 출고 중단을 요청할 수 있으면 참, 아니면 거짓. 다른 조건을 덧붙이지 않는다.</a:t>
             </a:r>
           </a:p>
         </p:txBody>
@@ -2350,7 +2350,7 @@
             <a:pPr lvl="0"/>
             <a:r>
               <a:rPr lang="ko-KR" sz="1200"/>
-              <a:t>추측성 일반화는 "07. 책임·협력·계약"의 원칙 과잉과 짝이다. 원칙 과잉은 구조를, 추측성 일반화는 기능을 미리 만든다.</a:t>
+              <a:t>추측성 일반화는 "세션 07. 책임·협력·계약"의 원칙 과잉과 짝이다. 원칙 과잉은 구조를, 추측성 일반화는 기능을 미리 만든다.</a:t>
             </a:r>
           </a:p>
         </p:txBody>
@@ -2411,7 +2411,7 @@
             <a:pPr lvl="0"/>
             <a:r>
               <a:rPr lang="ko-KR" sz="1200"/>
-              <a:t>흩어진 변경은 "산탄총 수술(Shotgun Surgery)"로도 불린다. 원인은 대개 책임 배치("07. 책임·협력·계약")나 경계("05. 구조적 경계와 의존성")에 있다.</a:t>
+              <a:t>흩어진 변경은 "산탄총 수술(Shotgun Surgery)"로도 불린다. 원인은 대개 책임 배치("세션 07. 책임·협력·계약")나 경계("세션 05. 구조적 경계와 의존성")에 있다.</a:t>
             </a:r>
           </a:p>
           <a:p>
@@ -2615,7 +2615,7 @@
             <a:pPr lvl="0"/>
             <a:r>
               <a:rPr lang="ko-KR" sz="1200"/>
-              <a:t>여러 대안을 비용·품질·trade-off로 비교해 고르는 일은 "09. 설계 대안 평가"에서 한다.</a:t>
+              <a:t>여러 대안을 비용·품질·trade-off로 비교해 고르는 일은 "세션 09. 설계 대안 평가"에서 한다.</a:t>
             </a:r>
           </a:p>
           <a:p>
@@ -3206,7 +3206,7 @@
             <a:pPr lvl="0"/>
             <a:r>
               <a:rPr lang="ko-KR" sz="1200"/>
-              <a:t>변경 이력(같은 곳이 반복해서 바뀜)은 강한 압력이다. 버전 관리 이력에서 자주 함께 바뀌는 파일을 찾는 것도 방법이다 — "12. 구현·검증·DevOps와 SW공학 피드백".</a:t>
+              <a:t>변경 이력(같은 곳이 반복해서 바뀜)은 강한 압력이다. 버전 관리 이력에서 자주 함께 바뀌는 파일을 찾는 것도 방법이다 — "세션 12. 구현·검증·DevOps와 SW공학 피드백".</a:t>
             </a:r>
           </a:p>
           <a:p>
@@ -3274,7 +3274,7 @@
             <a:pPr lvl="0"/>
             <a:r>
               <a:rPr lang="ko-KR" sz="1200"/>
-              <a:t>결제 전 취소는 "04. 동적 모델 — 상호작용과 상태"의 「08. 상태 기계 다이어그램」의 「가드와 금지된 전이」와 "05. 구조적 경계와 의존성"의 「15. 변경 파급」에서 미정으로 남겼다. 이 세션은 "결제 대기 → 취소됨, 외부 요청 없음"으로 정해졌다고 가정한다.</a:t>
+              <a:t>결제 전 취소는 "세션 04. 동적 모델 — 상호작용과 상태"의 「08. 상태 기계 다이어그램」의 「가드와 금지된 전이」와 "세션 05. 구조적 경계와 의존성"의 「15. 변경 파급」에서 미정으로 남겼다. 이 세션은 "결제 대기 → 취소됨, 외부 요청 없음"으로 정해졌다고 가정한다.</a:t>
             </a:r>
           </a:p>
           <a:p>
@@ -3349,7 +3349,7 @@
             <a:pPr lvl="0"/>
             <a:r>
               <a:rPr lang="ko-KR" sz="1200"/>
-              <a:t>"05. 구조적 경계와 의존성"의 「15. 변경 파급」은 패키지 수준이었다. 이 세션은 클래스·계약 수준이다.</a:t>
+              <a:t>"세션 05. 구조적 경계와 의존성"의 「15. 변경 파급」은 패키지 수준이었다. 이 세션은 클래스·계약 수준이다.</a:t>
             </a:r>
           </a:p>
         </p:txBody>
@@ -3410,7 +3410,7 @@
             <a:pPr lvl="0"/>
             <a:r>
               <a:rPr lang="ko-KR" sz="1200"/>
-              <a:t>"07. 책임·협력·계약"의 「12. 묻기와 시키기」에서 서비스가 상태를 물어 판단했다면, 이 규칙 변경은 판단을 복사한 모든 서비스로 번졌을 것이다.</a:t>
+              <a:t>"세션 07. 책임·협력·계약"의 「12. 묻기와 시키기」에서 서비스가 상태를 물어 판단했다면, 이 규칙 변경은 판단을 복사한 모든 서비스로 번졌을 것이다.</a:t>
             </a:r>
           </a:p>
           <a:p>
@@ -5682,7 +5682,7 @@
           </p:nvPr>
         </p:nvGraphicFramePr>
         <p:xfrm>
-          <a:off x="1523556" y="1842998"/>
+          <a:off x="1523556" y="1813560"/>
           <a:ext cx="6083300" cy="3873500"/>
         </p:xfrm>
         <a:graphic>
@@ -6911,7 +6911,7 @@
         </p:nvSpPr>
         <p:spPr>
           <a:xfrm>
-            <a:off x="365760" y="3672598"/>
+            <a:off x="365760" y="3770160"/>
             <a:ext cx="8412480" cy="781278"/>
           </a:xfrm>
           <a:prstGeom prst="rect">
@@ -7168,7 +7168,7 @@
           </p:nvPr>
         </p:nvGraphicFramePr>
         <p:xfrm>
-          <a:off x="1202246" y="1842998"/>
+          <a:off x="1202246" y="1813560"/>
           <a:ext cx="6725920" cy="3873500"/>
         </p:xfrm>
         <a:graphic>
@@ -8377,7 +8377,7 @@
         </p:nvSpPr>
         <p:spPr>
           <a:xfrm>
-            <a:off x="365760" y="3672598"/>
+            <a:off x="365760" y="3770160"/>
             <a:ext cx="8412480" cy="781278"/>
           </a:xfrm>
           <a:prstGeom prst="rect">
@@ -8604,7 +8604,7 @@
           </p:nvPr>
         </p:nvGraphicFramePr>
         <p:xfrm>
-          <a:off x="1579436" y="3350174"/>
+          <a:off x="1579436" y="3113116"/>
           <a:ext cx="5971540" cy="3873500"/>
         </p:xfrm>
         <a:graphic>
@@ -9175,7 +9175,7 @@
         <p:spPr>
           <a:xfrm>
             <a:off x="365760" y="960120"/>
-            <a:ext cx="8412480" cy="2288454"/>
+            <a:ext cx="8412480" cy="2136568"/>
           </a:xfrm>
           <a:prstGeom prst="rect">
             <a:avLst/>
@@ -9690,7 +9690,7 @@
           </p:nvPr>
         </p:nvGraphicFramePr>
         <p:xfrm>
-          <a:off x="1537526" y="1842998"/>
+          <a:off x="1537526" y="1813560"/>
           <a:ext cx="6055360" cy="3873500"/>
         </p:xfrm>
         <a:graphic>
@@ -10751,7 +10751,7 @@
         </p:nvSpPr>
         <p:spPr>
           <a:xfrm>
-            <a:off x="365760" y="3384598"/>
+            <a:off x="365760" y="3482160"/>
             <a:ext cx="8412480" cy="781278"/>
           </a:xfrm>
           <a:prstGeom prst="rect">
@@ -10978,7 +10978,7 @@
           </p:nvPr>
         </p:nvGraphicFramePr>
         <p:xfrm>
-          <a:off x="1063816" y="1842998"/>
+          <a:off x="1063816" y="1813560"/>
           <a:ext cx="7002780" cy="3873500"/>
         </p:xfrm>
         <a:graphic>
@@ -12334,7 +12334,7 @@
         </p:nvSpPr>
         <p:spPr>
           <a:xfrm>
-            <a:off x="365760" y="3384598"/>
+            <a:off x="365760" y="3482160"/>
             <a:ext cx="8412480" cy="781278"/>
           </a:xfrm>
           <a:prstGeom prst="rect">
@@ -13138,7 +13138,7 @@
           </p:nvPr>
         </p:nvGraphicFramePr>
         <p:xfrm>
-          <a:off x="936816" y="2801048"/>
+          <a:off x="936816" y="2762596"/>
           <a:ext cx="7256780" cy="3873500"/>
         </p:xfrm>
         <a:graphic>
@@ -14249,7 +14249,7 @@
           </p:nvPr>
         </p:nvGraphicFramePr>
         <p:xfrm>
-          <a:off x="2208086" y="2801048"/>
+          <a:off x="2208086" y="2600498"/>
           <a:ext cx="4714240" cy="3873500"/>
         </p:xfrm>
         <a:graphic>
@@ -15156,7 +15156,7 @@
         <p:spPr>
           <a:xfrm>
             <a:off x="365760" y="960120"/>
-            <a:ext cx="8412480" cy="1739328"/>
+            <a:ext cx="8412480" cy="1587442"/>
           </a:xfrm>
           <a:prstGeom prst="rect">
             <a:avLst/>
@@ -16035,7 +16035,7 @@
           </p:nvPr>
         </p:nvGraphicFramePr>
         <p:xfrm>
-          <a:off x="586295" y="2801048"/>
+          <a:off x="586295" y="2762596"/>
           <a:ext cx="7957820" cy="3873500"/>
         </p:xfrm>
         <a:graphic>
@@ -17199,7 +17199,7 @@
           </p:nvPr>
         </p:nvGraphicFramePr>
         <p:xfrm>
-          <a:off x="1062546" y="2801048"/>
+          <a:off x="1062546" y="2600498"/>
           <a:ext cx="7005320" cy="3873500"/>
         </p:xfrm>
         <a:graphic>
@@ -17770,7 +17770,7 @@
         <p:spPr>
           <a:xfrm>
             <a:off x="365760" y="960120"/>
-            <a:ext cx="8412480" cy="1739328"/>
+            <a:ext cx="8412480" cy="1587442"/>
           </a:xfrm>
           <a:prstGeom prst="rect">
             <a:avLst/>
@@ -18162,7 +18162,7 @@
           </p:nvPr>
         </p:nvGraphicFramePr>
         <p:xfrm>
-          <a:off x="978725" y="2801048"/>
+          <a:off x="978725" y="2600498"/>
           <a:ext cx="7172960" cy="3873500"/>
         </p:xfrm>
         <a:graphic>
@@ -18901,7 +18901,7 @@
         <p:spPr>
           <a:xfrm>
             <a:off x="365760" y="960120"/>
-            <a:ext cx="8412480" cy="1739328"/>
+            <a:ext cx="8412480" cy="1587442"/>
           </a:xfrm>
           <a:prstGeom prst="rect">
             <a:avLst/>
@@ -19283,7 +19283,7 @@
           </p:nvPr>
         </p:nvGraphicFramePr>
         <p:xfrm>
-          <a:off x="412306" y="1842998"/>
+          <a:off x="412306" y="1813560"/>
           <a:ext cx="8305800" cy="3873500"/>
         </p:xfrm>
         <a:graphic>
@@ -19805,7 +19805,7 @@
         </p:nvSpPr>
         <p:spPr>
           <a:xfrm>
-            <a:off x="365760" y="2808598"/>
+            <a:off x="365760" y="2906160"/>
             <a:ext cx="8412480" cy="781278"/>
           </a:xfrm>
           <a:prstGeom prst="rect">
@@ -20290,7 +20290,7 @@
         </p:blipFill>
         <p:spPr>
           <a:xfrm>
-            <a:off x="688731" y="4006644"/>
+            <a:off x="688731" y="2788920"/>
             <a:ext cx="7766538" cy="1436077"/>
           </a:xfrm>
           <a:prstGeom prst="rect">
@@ -20479,7 +20479,7 @@
           </p:nvPr>
         </p:nvGraphicFramePr>
         <p:xfrm>
-          <a:off x="1410525" y="4565194"/>
+          <a:off x="1410525" y="4662756"/>
           <a:ext cx="6309360" cy="3873500"/>
         </p:xfrm>
         <a:graphic>
@@ -21115,7 +21115,7 @@
         </p:blipFill>
         <p:spPr>
           <a:xfrm>
-            <a:off x="1777311" y="1842998"/>
+            <a:off x="1777311" y="1813560"/>
             <a:ext cx="5575788" cy="2620596"/>
           </a:xfrm>
           <a:prstGeom prst="rect">
@@ -21907,7 +21907,7 @@
           </p:nvPr>
         </p:nvGraphicFramePr>
         <p:xfrm>
-          <a:off x="922845" y="2392124"/>
+          <a:off x="922845" y="2326178"/>
           <a:ext cx="7284720" cy="3873500"/>
         </p:xfrm>
         <a:graphic>
@@ -23038,7 +23038,7 @@
           </p:nvPr>
         </p:nvGraphicFramePr>
         <p:xfrm>
-          <a:off x="1955356" y="2801048"/>
+          <a:off x="1955356" y="2762596"/>
           <a:ext cx="5219700" cy="3873500"/>
         </p:xfrm>
         <a:graphic>
@@ -23950,7 +23950,7 @@
           </p:nvPr>
         </p:nvGraphicFramePr>
         <p:xfrm>
-          <a:off x="699325" y="2801048"/>
+          <a:off x="699325" y="2600498"/>
           <a:ext cx="7731760" cy="3873500"/>
         </p:xfrm>
         <a:graphic>
@@ -24689,7 +24689,7 @@
         <p:spPr>
           <a:xfrm>
             <a:off x="365760" y="960120"/>
-            <a:ext cx="8412480" cy="1739328"/>
+            <a:ext cx="8412480" cy="1587442"/>
           </a:xfrm>
           <a:prstGeom prst="rect">
             <a:avLst/>
@@ -25083,7 +25083,7 @@
           </p:nvPr>
         </p:nvGraphicFramePr>
         <p:xfrm>
-          <a:off x="2290635" y="3700617"/>
+          <a:off x="2290635" y="3798179"/>
           <a:ext cx="4549140" cy="3873500"/>
         </p:xfrm>
         <a:graphic>
@@ -25841,7 +25841,7 @@
         </p:blipFill>
         <p:spPr>
           <a:xfrm>
-            <a:off x="1879888" y="1842998"/>
+            <a:off x="1879888" y="1813560"/>
             <a:ext cx="5370635" cy="1756019"/>
           </a:xfrm>
           <a:prstGeom prst="rect">
@@ -26819,7 +26819,7 @@
         </p:blipFill>
         <p:spPr>
           <a:xfrm>
-            <a:off x="2491154" y="3176894"/>
+            <a:off x="2491154" y="2438400"/>
             <a:ext cx="4161692" cy="2620596"/>
           </a:xfrm>
           <a:prstGeom prst="rect">
@@ -26996,7 +26996,7 @@
           </p:nvPr>
         </p:nvGraphicFramePr>
         <p:xfrm>
-          <a:off x="2335086" y="1842998"/>
+          <a:off x="2335086" y="1813560"/>
           <a:ext cx="4460240" cy="3873500"/>
         </p:xfrm>
         <a:graphic>
@@ -27869,7 +27869,7 @@
         </p:nvSpPr>
         <p:spPr>
           <a:xfrm>
-            <a:off x="365760" y="3096598"/>
+            <a:off x="365760" y="3194160"/>
             <a:ext cx="8412480" cy="781278"/>
           </a:xfrm>
           <a:prstGeom prst="rect">
@@ -29956,7 +29956,7 @@
           </p:nvPr>
         </p:nvGraphicFramePr>
         <p:xfrm>
-          <a:off x="1675956" y="2801048"/>
+          <a:off x="1675956" y="2600498"/>
           <a:ext cx="5778500" cy="3873500"/>
         </p:xfrm>
         <a:graphic>
@@ -30456,7 +30456,7 @@
         <p:spPr>
           <a:xfrm>
             <a:off x="365760" y="960120"/>
-            <a:ext cx="8412480" cy="1739328"/>
+            <a:ext cx="8412480" cy="1587442"/>
           </a:xfrm>
           <a:prstGeom prst="rect">
             <a:avLst/>
@@ -30818,7 +30818,7 @@
           </p:nvPr>
         </p:nvGraphicFramePr>
         <p:xfrm>
-          <a:off x="1606106" y="1842998"/>
+          <a:off x="1606106" y="1813560"/>
           <a:ext cx="5918200" cy="3873500"/>
         </p:xfrm>
         <a:graphic>
@@ -31607,7 +31607,7 @@
           </p:nvPr>
         </p:nvGraphicFramePr>
         <p:xfrm>
-          <a:off x="412306" y="1842998"/>
+          <a:off x="412306" y="1813560"/>
           <a:ext cx="8305800" cy="3873500"/>
         </p:xfrm>
         <a:graphic>
@@ -32396,7 +32396,7 @@
           </p:nvPr>
         </p:nvGraphicFramePr>
         <p:xfrm>
-          <a:off x="1396555" y="1842998"/>
+          <a:off x="1396555" y="1813560"/>
           <a:ext cx="6337300" cy="3873500"/>
         </p:xfrm>
         <a:graphic>
@@ -33842,7 +33842,7 @@
                 <a:latin typeface="맑은 고딕"/>
                 <a:ea typeface="맑은 고딕"/>
               </a:rPr>
-              <a:t> "07. 책임·협력·계약"의 계약과 약속</a:t>
+              <a:t> "세션 07. 책임·협력·계약"의 계약과 약속</a:t>
             </a:r>
             <a:r>
               <a:rPr sz="1200" b="0">
@@ -33916,7 +33916,7 @@
         </p:blipFill>
         <p:spPr>
           <a:xfrm>
-            <a:off x="1460500" y="3828008"/>
+            <a:off x="1460500" y="2514600"/>
             <a:ext cx="6223000" cy="801688"/>
           </a:xfrm>
           <a:prstGeom prst="rect">
@@ -35742,7 +35742,7 @@
           </p:nvPr>
         </p:nvGraphicFramePr>
         <p:xfrm>
-          <a:off x="1691196" y="1842998"/>
+          <a:off x="1691196" y="1813560"/>
           <a:ext cx="5748020" cy="3873500"/>
         </p:xfrm>
         <a:graphic>
@@ -38309,7 +38309,7 @@
         </p:blipFill>
         <p:spPr>
           <a:xfrm>
-            <a:off x="2715846" y="1681697"/>
+            <a:off x="2715846" y="1539240"/>
             <a:ext cx="3712308" cy="4370754"/>
           </a:xfrm>
           <a:prstGeom prst="rect">
@@ -39726,7 +39726,7 @@
           </p:nvPr>
         </p:nvGraphicFramePr>
         <p:xfrm>
-          <a:off x="742506" y="1842998"/>
+          <a:off x="742506" y="1813560"/>
           <a:ext cx="7645400" cy="3873500"/>
         </p:xfrm>
         <a:graphic>
@@ -40629,7 +40629,7 @@
         </p:nvSpPr>
         <p:spPr>
           <a:xfrm>
-            <a:off x="365760" y="3096598"/>
+            <a:off x="365760" y="3194160"/>
             <a:ext cx="8412480" cy="781278"/>
           </a:xfrm>
           <a:prstGeom prst="rect">
@@ -40856,7 +40856,7 @@
           </p:nvPr>
         </p:nvGraphicFramePr>
         <p:xfrm>
-          <a:off x="1327976" y="1842998"/>
+          <a:off x="1327976" y="1813560"/>
           <a:ext cx="6474460" cy="3873500"/>
         </p:xfrm>
         <a:graphic>
@@ -41739,7 +41739,7 @@
         </p:nvSpPr>
         <p:spPr>
           <a:xfrm>
-            <a:off x="365760" y="3096598"/>
+            <a:off x="365760" y="3194160"/>
             <a:ext cx="8412480" cy="781278"/>
           </a:xfrm>
           <a:prstGeom prst="rect">
@@ -42591,7 +42591,7 @@
           </p:nvPr>
         </p:nvGraphicFramePr>
         <p:xfrm>
-          <a:off x="2040446" y="1842998"/>
+          <a:off x="2040446" y="1813560"/>
           <a:ext cx="5049520" cy="3873500"/>
         </p:xfrm>
         <a:graphic>
@@ -43830,7 +43830,7 @@
         </p:nvSpPr>
         <p:spPr>
           <a:xfrm>
-            <a:off x="365760" y="3672598"/>
+            <a:off x="365760" y="3770160"/>
             <a:ext cx="8412480" cy="781278"/>
           </a:xfrm>
           <a:prstGeom prst="rect">

--- a/courses/ooad/sessions/s08.pptx
+++ b/courses/ooad/sessions/s08.pptx
@@ -9308,7 +9308,7 @@
                 <a:latin typeface="맑은 고딕"/>
                 <a:ea typeface="맑은 고딕"/>
               </a:rPr>
-              <a:t>"변이 지점 — 기존 시스템이나 요구에 </a:t>
+              <a:t>변이 지점 — 기존 시스템이나 요구에 </a:t>
             </a:r>
             <a:r>
               <a:rPr sz="1800" b="1">
@@ -9328,7 +9328,7 @@
                 <a:latin typeface="맑은 고딕"/>
                 <a:ea typeface="맑은 고딕"/>
               </a:rPr>
-              <a:t> 변이"</a:t>
+              <a:t> 변이</a:t>
             </a:r>
             <a:r>
               <a:rPr sz="1000" b="0">
@@ -9348,27 +9348,7 @@
                 <a:latin typeface="맑은 고딕"/>
                 <a:ea typeface="맑은 고딕"/>
               </a:rPr>
-              <a:t>"variation point—Variations in the existing, current system or requirements"</a:t>
-            </a:r>
-            <a:r>
-              <a:rPr sz="1000" b="0">
-                <a:solidFill>
-                  <a:srgbClr val="000000"/>
-                </a:solidFill>
-                <a:latin typeface="맑은 고딕"/>
-                <a:ea typeface="맑은 고딕"/>
-              </a:rPr>
-              <a:t>, </a:t>
-            </a:r>
-            <a:r>
-              <a:rPr sz="1000" b="0">
-                <a:solidFill>
-                  <a:srgbClr val="000000"/>
-                </a:solidFill>
-                <a:latin typeface="맑은 고딕"/>
-                <a:ea typeface="맑은 고딕"/>
-              </a:rPr>
-              <a:t>[Larman 2004]</a:t>
+              <a:t>"variation point—Variations in the existing, current system or requirements", [Larman 2004]</a:t>
             </a:r>
           </a:p>
           <a:p>
@@ -9391,7 +9371,7 @@
                 <a:latin typeface="맑은 고딕"/>
                 <a:ea typeface="맑은 고딕"/>
               </a:rPr>
-              <a:t>"진화 지점 — 앞으로 생길 수 있지만 현재 요구에는 </a:t>
+              <a:t>진화 지점 — 앞으로 생길 수 있지만 현재 요구에는 </a:t>
             </a:r>
             <a:r>
               <a:rPr sz="1800" b="1">
@@ -9411,7 +9391,7 @@
                 <a:latin typeface="맑은 고딕"/>
                 <a:ea typeface="맑은 고딕"/>
               </a:rPr>
-              <a:t> 추측성 변이 지점"</a:t>
+              <a:t> 추측성 변이 지점</a:t>
             </a:r>
             <a:r>
               <a:rPr sz="1000" b="0">
@@ -9431,27 +9411,7 @@
                 <a:latin typeface="맑은 고딕"/>
                 <a:ea typeface="맑은 고딕"/>
               </a:rPr>
-              <a:t>"evolution point—Speculative points of variation that may arise in the future, but which are not present in the existing requirements."</a:t>
-            </a:r>
-            <a:r>
-              <a:rPr sz="1000" b="0">
-                <a:solidFill>
-                  <a:srgbClr val="000000"/>
-                </a:solidFill>
-                <a:latin typeface="맑은 고딕"/>
-                <a:ea typeface="맑은 고딕"/>
-              </a:rPr>
-              <a:t>, </a:t>
-            </a:r>
-            <a:r>
-              <a:rPr sz="1000" b="0">
-                <a:solidFill>
-                  <a:srgbClr val="000000"/>
-                </a:solidFill>
-                <a:latin typeface="맑은 고딕"/>
-                <a:ea typeface="맑은 고딕"/>
-              </a:rPr>
-              <a:t>[Larman 2004]</a:t>
+              <a:t>"evolution point—Speculative points of variation that may arise in the future, but which are not present in the existing requirements.", [Larman 2004]</a:t>
             </a:r>
           </a:p>
         </p:txBody>
@@ -12738,7 +12698,7 @@
                 <a:latin typeface="맑은 고딕"/>
                 <a:ea typeface="맑은 고딕"/>
               </a:rPr>
-              <a:t>"모듈은 </a:t>
+              <a:t>모듈은 </a:t>
             </a:r>
             <a:r>
               <a:rPr sz="1800" b="1">
@@ -12778,7 +12738,7 @@
                 <a:latin typeface="맑은 고딕"/>
                 <a:ea typeface="맑은 고딕"/>
               </a:rPr>
-              <a:t> 있어야 한다"</a:t>
+              <a:t> 있어야 한다</a:t>
             </a:r>
             <a:r>
               <a:rPr sz="1000" b="0">
@@ -12798,27 +12758,7 @@
                 <a:latin typeface="맑은 고딕"/>
                 <a:ea typeface="맑은 고딕"/>
               </a:rPr>
-              <a:t>"A module should be open for extension but closed for modification."</a:t>
-            </a:r>
-            <a:r>
-              <a:rPr sz="1000" b="0">
-                <a:solidFill>
-                  <a:srgbClr val="000000"/>
-                </a:solidFill>
-                <a:latin typeface="맑은 고딕"/>
-                <a:ea typeface="맑은 고딕"/>
-              </a:rPr>
-              <a:t>, </a:t>
-            </a:r>
-            <a:r>
-              <a:rPr sz="1000" b="0">
-                <a:solidFill>
-                  <a:srgbClr val="000000"/>
-                </a:solidFill>
-                <a:latin typeface="맑은 고딕"/>
-                <a:ea typeface="맑은 고딕"/>
-              </a:rPr>
-              <a:t>[Martin 2000]</a:t>
+              <a:t>"A module should be open for extension but closed for modification.", [Martin 2000]</a:t>
             </a:r>
           </a:p>
           <a:p>
@@ -13950,7 +13890,7 @@
                 <a:latin typeface="맑은 고딕"/>
                 <a:ea typeface="맑은 고딕"/>
               </a:rPr>
-              <a:t>"OCP와 보호된 변이는 본질적으로 </a:t>
+              <a:t>OCP와 보호된 변이는 본질적으로 </a:t>
             </a:r>
             <a:r>
               <a:rPr sz="1800" b="1">
@@ -13970,7 +13910,7 @@
                 <a:latin typeface="맑은 고딕"/>
                 <a:ea typeface="맑은 고딕"/>
               </a:rPr>
-              <a:t>이며, 강조점이 다를 뿐이다 — 변이 지점과 진화 지점에서의 보호"</a:t>
+              <a:t>이며 강조점만 다르다 — 변이 지점과 진화 지점에서의 보호다</a:t>
             </a:r>
             <a:r>
               <a:rPr sz="1000" b="0">
@@ -13990,27 +13930,7 @@
                 <a:latin typeface="맑은 고딕"/>
                 <a:ea typeface="맑은 고딕"/>
               </a:rPr>
-              <a:t>"OCP and PV are essentially two expressions of the same principle, with different emphasis: protection at variation and evolution points."</a:t>
-            </a:r>
-            <a:r>
-              <a:rPr sz="1000" b="0">
-                <a:solidFill>
-                  <a:srgbClr val="000000"/>
-                </a:solidFill>
-                <a:latin typeface="맑은 고딕"/>
-                <a:ea typeface="맑은 고딕"/>
-              </a:rPr>
-              <a:t>, </a:t>
-            </a:r>
-            <a:r>
-              <a:rPr sz="1000" b="0">
-                <a:solidFill>
-                  <a:srgbClr val="000000"/>
-                </a:solidFill>
-                <a:latin typeface="맑은 고딕"/>
-                <a:ea typeface="맑은 고딕"/>
-              </a:rPr>
-              <a:t>[Larman 2004]</a:t>
+              <a:t>"OCP and PV are essentially two expressions of the same principle, with different emphasis: protection at variation and evolution points.", [Larman 2004]</a:t>
             </a:r>
           </a:p>
         </p:txBody>
@@ -15249,7 +15169,7 @@
                 <a:latin typeface="맑은 고딕"/>
                 <a:ea typeface="맑은 고딕"/>
               </a:rPr>
-              <a:t>"예측된 </a:t>
+              <a:t>예측된 </a:t>
             </a:r>
             <a:r>
               <a:rPr sz="1800" b="1">
@@ -15269,7 +15189,7 @@
                 <a:latin typeface="맑은 고딕"/>
                 <a:ea typeface="맑은 고딕"/>
               </a:rPr>
-              <a:t>을 찾고, 그 둘레에 </a:t>
+              <a:t>을 찾고 그 둘레에 </a:t>
             </a:r>
             <a:r>
               <a:rPr sz="1800" b="1">
@@ -15289,7 +15209,7 @@
                 <a:latin typeface="맑은 고딕"/>
                 <a:ea typeface="맑은 고딕"/>
               </a:rPr>
-              <a:t>를 만드는 책임을 배정한다"</a:t>
+              <a:t>를 만드는 책임을 배정한다</a:t>
             </a:r>
             <a:r>
               <a:rPr sz="1000" b="0">
@@ -15309,27 +15229,7 @@
                 <a:latin typeface="맑은 고딕"/>
                 <a:ea typeface="맑은 고딕"/>
               </a:rPr>
-              <a:t>"Identify points of predicted variation or instability; assign responsibilities to create a stable interface around them."</a:t>
-            </a:r>
-            <a:r>
-              <a:rPr sz="1000" b="0">
-                <a:solidFill>
-                  <a:srgbClr val="000000"/>
-                </a:solidFill>
-                <a:latin typeface="맑은 고딕"/>
-                <a:ea typeface="맑은 고딕"/>
-              </a:rPr>
-              <a:t>, </a:t>
-            </a:r>
-            <a:r>
-              <a:rPr sz="1000" b="0">
-                <a:solidFill>
-                  <a:srgbClr val="000000"/>
-                </a:solidFill>
-                <a:latin typeface="맑은 고딕"/>
-                <a:ea typeface="맑은 고딕"/>
-              </a:rPr>
-              <a:t>[Larman 2004]</a:t>
+              <a:t>"Identify points of predicted variation or instability; assign responsibilities to create a stable interface around them.", [Larman 2004]</a:t>
             </a:r>
           </a:p>
         </p:txBody>
@@ -15675,7 +15575,7 @@
                 <a:latin typeface="맑은 고딕"/>
                 <a:ea typeface="맑은 고딕"/>
               </a:rPr>
-              <a:t>"인터페이스에만 의존하면 구현에서 분리된다. 구현은 </a:t>
+              <a:t>인터페이스에만 의존하면 구현에서 분리된다 — 구현은 </a:t>
             </a:r>
             <a:r>
               <a:rPr sz="1800" b="1">
@@ -15695,7 +15595,7 @@
                 <a:latin typeface="맑은 고딕"/>
                 <a:ea typeface="맑은 고딕"/>
               </a:rPr>
-              <a:t>, 그것이 건강한 의존 관계다"</a:t>
+              <a:t> 그것이 건강한 의존 관계다</a:t>
             </a:r>
             <a:r>
               <a:rPr sz="1000" b="0">
@@ -15715,27 +15615,7 @@
                 <a:latin typeface="맑은 고딕"/>
                 <a:ea typeface="맑은 고딕"/>
               </a:rPr>
-              <a:t>"Once you depend on interfaces only, you're decoupled from the implementation. That means the implementation can vary, and that's a healthy dependency relationship."</a:t>
-            </a:r>
-            <a:r>
-              <a:rPr sz="1000" b="0">
-                <a:solidFill>
-                  <a:srgbClr val="000000"/>
-                </a:solidFill>
-                <a:latin typeface="맑은 고딕"/>
-                <a:ea typeface="맑은 고딕"/>
-              </a:rPr>
-              <a:t>, </a:t>
-            </a:r>
-            <a:r>
-              <a:rPr sz="1000" b="0">
-                <a:solidFill>
-                  <a:srgbClr val="000000"/>
-                </a:solidFill>
-                <a:latin typeface="맑은 고딕"/>
-                <a:ea typeface="맑은 고딕"/>
-              </a:rPr>
-              <a:t>[Gamma 2005]</a:t>
+              <a:t>"Once you depend on interfaces only, you're decoupled from the implementation. That means the implementation can vary, and that's a healthy dependency relationship.", [Gamma 2005]</a:t>
             </a:r>
           </a:p>
           <a:p>
@@ -16516,7 +16396,7 @@
                 <a:latin typeface="맑은 고딕"/>
                 <a:ea typeface="맑은 고딕"/>
               </a:rPr>
-              <a:t>"관련된 대안이나 행위가 </a:t>
+              <a:t>관련된 대안이나 행위가 </a:t>
             </a:r>
             <a:r>
               <a:rPr sz="1800" b="1">
@@ -16536,7 +16416,7 @@
                 <a:latin typeface="맑은 고딕"/>
                 <a:ea typeface="맑은 고딕"/>
               </a:rPr>
-              <a:t>, 다형적 오퍼레이션으로 그 행위의 책임을 행위가 달라지는 타입에 배정한다"</a:t>
+              <a:t> 다형적 오퍼레이션으로 그 행위의 책임을 행위가 달라지는 타입에 배정한다</a:t>
             </a:r>
             <a:r>
               <a:rPr sz="1000" b="0">
@@ -16556,27 +16436,7 @@
                 <a:latin typeface="맑은 고딕"/>
                 <a:ea typeface="맑은 고딕"/>
               </a:rPr>
-              <a:t>"When related alternatives or behaviors vary by type (class), assign responsibility for the behavior—using polymorphic operations—to the types for which the behavior varies."</a:t>
-            </a:r>
-            <a:r>
-              <a:rPr sz="1000" b="0">
-                <a:solidFill>
-                  <a:srgbClr val="000000"/>
-                </a:solidFill>
-                <a:latin typeface="맑은 고딕"/>
-                <a:ea typeface="맑은 고딕"/>
-              </a:rPr>
-              <a:t>, </a:t>
-            </a:r>
-            <a:r>
-              <a:rPr sz="1000" b="0">
-                <a:solidFill>
-                  <a:srgbClr val="000000"/>
-                </a:solidFill>
-                <a:latin typeface="맑은 고딕"/>
-                <a:ea typeface="맑은 고딕"/>
-              </a:rPr>
-              <a:t>[Larman 2004]</a:t>
+              <a:t>"When related alternatives or behaviors vary by type (class), assign responsibility for the behavior—using polymorphic operations—to the types for which the behavior varies.", [Larman 2004]</a:t>
             </a:r>
           </a:p>
         </p:txBody>
@@ -17863,7 +17723,7 @@
                 <a:latin typeface="맑은 고딕"/>
                 <a:ea typeface="맑은 고딕"/>
               </a:rPr>
-              <a:t>"다른 구성 요소들이 </a:t>
+              <a:t>다른 구성 요소들이 </a:t>
             </a:r>
             <a:r>
               <a:rPr sz="1800" b="1">
@@ -17883,7 +17743,7 @@
                 <a:latin typeface="맑은 고딕"/>
                 <a:ea typeface="맑은 고딕"/>
               </a:rPr>
-              <a:t> 그 사이를 중재하는 중간 객체에 책임을 배정한다"</a:t>
+              <a:t> 그 사이를 중재하는 중간 객체에 책임을 배정한다</a:t>
             </a:r>
             <a:r>
               <a:rPr sz="1000" b="0">
@@ -17903,27 +17763,7 @@
                 <a:latin typeface="맑은 고딕"/>
                 <a:ea typeface="맑은 고딕"/>
               </a:rPr>
-              <a:t>"Assign the responsibility to an intermediate object to mediate between other components or services so that they are not directly coupled."</a:t>
-            </a:r>
-            <a:r>
-              <a:rPr sz="1000" b="0">
-                <a:solidFill>
-                  <a:srgbClr val="000000"/>
-                </a:solidFill>
-                <a:latin typeface="맑은 고딕"/>
-                <a:ea typeface="맑은 고딕"/>
-              </a:rPr>
-              <a:t>, </a:t>
-            </a:r>
-            <a:r>
-              <a:rPr sz="1000" b="0">
-                <a:solidFill>
-                  <a:srgbClr val="000000"/>
-                </a:solidFill>
-                <a:latin typeface="맑은 고딕"/>
-                <a:ea typeface="맑은 고딕"/>
-              </a:rPr>
-              <a:t>[Larman 2004]</a:t>
+              <a:t>"Assign the responsibility to an intermediate object to mediate between other components or services so that they are not directly coupled.", [Larman 2004]</a:t>
             </a:r>
           </a:p>
         </p:txBody>
@@ -18984,7 +18824,7 @@
                 <a:latin typeface="맑은 고딕"/>
                 <a:ea typeface="맑은 고딕"/>
               </a:rPr>
-              <a:t>"합성은 더 좋은 성질이 있다. 큰 것에 </a:t>
+              <a:t>합성은 더 좋은 성질이 있다. 큰 것에 </a:t>
             </a:r>
             <a:r>
               <a:rPr sz="1800" b="1">
@@ -19004,7 +18844,7 @@
                 <a:latin typeface="맑은 고딕"/>
                 <a:ea typeface="맑은 고딕"/>
               </a:rPr>
-              <a:t> 것만으로 결합이 줄어든다"</a:t>
+              <a:t> 것만으로 결합이 줄어든다</a:t>
             </a:r>
             <a:r>
               <a:rPr sz="1000" b="0">
@@ -19024,27 +18864,7 @@
                 <a:latin typeface="맑은 고딕"/>
                 <a:ea typeface="맑은 고딕"/>
               </a:rPr>
-              <a:t>"Composition has a nicer property. The coupling is reduced by just having some smaller things you plug into something bigger."</a:t>
-            </a:r>
-            <a:r>
-              <a:rPr sz="1000" b="0">
-                <a:solidFill>
-                  <a:srgbClr val="000000"/>
-                </a:solidFill>
-                <a:latin typeface="맑은 고딕"/>
-                <a:ea typeface="맑은 고딕"/>
-              </a:rPr>
-              <a:t>, </a:t>
-            </a:r>
-            <a:r>
-              <a:rPr sz="1000" b="0">
-                <a:solidFill>
-                  <a:srgbClr val="000000"/>
-                </a:solidFill>
-                <a:latin typeface="맑은 고딕"/>
-                <a:ea typeface="맑은 고딕"/>
-              </a:rPr>
-              <a:t>[Gamma 2005]</a:t>
+              <a:t>"Composition has a nicer property. The coupling is reduced by just having some smaller things you plug into something bigger.", [Gamma 2005]</a:t>
             </a:r>
           </a:p>
         </p:txBody>
@@ -22732,6 +22552,16 @@
               <a:buChar char=""/>
             </a:pPr>
             <a:r>
+              <a:rPr sz="1800" b="1">
+                <a:solidFill>
+                  <a:srgbClr val="000000"/>
+                </a:solidFill>
+                <a:latin typeface="맑은 고딕"/>
+                <a:ea typeface="맑은 고딕"/>
+              </a:rPr>
+              <a:t>변경을 쉽게</a:t>
+            </a:r>
+            <a:r>
               <a:rPr sz="1800" b="0">
                 <a:solidFill>
                   <a:srgbClr val="000000"/>
@@ -22739,27 +22569,7 @@
                 <a:latin typeface="맑은 고딕"/>
                 <a:ea typeface="맑은 고딕"/>
               </a:rPr>
-              <a:t>"</a:t>
-            </a:r>
-            <a:r>
-              <a:rPr sz="1800" b="1">
-                <a:solidFill>
-                  <a:srgbClr val="000000"/>
-                </a:solidFill>
-                <a:latin typeface="맑은 고딕"/>
-                <a:ea typeface="맑은 고딕"/>
-              </a:rPr>
-              <a:t>변경을 쉽게</a:t>
-            </a:r>
-            <a:r>
-              <a:rPr sz="1800" b="0">
-                <a:solidFill>
-                  <a:srgbClr val="000000"/>
-                </a:solidFill>
-                <a:latin typeface="맑은 고딕"/>
-                <a:ea typeface="맑은 고딕"/>
-              </a:rPr>
-              <a:t> 만들고, 그다음 쉬운 변경을 하라"</a:t>
+              <a:t> 만들고</a:t>
             </a:r>
             <a:r>
               <a:rPr sz="1000" b="0">
@@ -22779,27 +22589,7 @@
                 <a:latin typeface="맑은 고딕"/>
                 <a:ea typeface="맑은 고딕"/>
               </a:rPr>
-              <a:t>"make the change easy, then make the easy change"</a:t>
-            </a:r>
-            <a:r>
-              <a:rPr sz="1000" b="0">
-                <a:solidFill>
-                  <a:srgbClr val="000000"/>
-                </a:solidFill>
-                <a:latin typeface="맑은 고딕"/>
-                <a:ea typeface="맑은 고딕"/>
-              </a:rPr>
-              <a:t>, </a:t>
-            </a:r>
-            <a:r>
-              <a:rPr sz="1000" b="0">
-                <a:solidFill>
-                  <a:srgbClr val="000000"/>
-                </a:solidFill>
-                <a:latin typeface="맑은 고딕"/>
-                <a:ea typeface="맑은 고딕"/>
-              </a:rPr>
-              <a:t>[Beck 2012, 재인용]</a:t>
+              <a:t>그다음 쉬운 변경을 하라, "make the change easy, then make the easy change", [Beck 2012, 재인용]</a:t>
             </a:r>
           </a:p>
         </p:txBody>
@@ -23631,7 +23421,7 @@
                 <a:latin typeface="맑은 고딕"/>
                 <a:ea typeface="맑은 고딕"/>
               </a:rPr>
-              <a:t>"YAGNI는 </a:t>
+              <a:t>YAGNI는 </a:t>
             </a:r>
             <a:r>
               <a:rPr sz="1800" b="1">
@@ -23651,7 +23441,7 @@
                 <a:latin typeface="맑은 고딕"/>
                 <a:ea typeface="맑은 고딕"/>
               </a:rPr>
-              <a:t>을 위해 넣는 능력에만 적용되며, 소프트웨어를 </a:t>
+              <a:t>을 위해 넣는 능력에만 적용되며 소프트웨어를 </a:t>
             </a:r>
             <a:r>
               <a:rPr sz="1800" b="1">
@@ -23671,7 +23461,7 @@
                 <a:latin typeface="맑은 고딕"/>
                 <a:ea typeface="맑은 고딕"/>
               </a:rPr>
-              <a:t> 만드는 노력에는 적용되지 않는다"</a:t>
+              <a:t> 만드는 노력에는 적용되지 않는다</a:t>
             </a:r>
             <a:r>
               <a:rPr sz="1000" b="0">
@@ -23691,27 +23481,7 @@
                 <a:latin typeface="맑은 고딕"/>
                 <a:ea typeface="맑은 고딕"/>
               </a:rPr>
-              <a:t>"Yagni only applies to capabilities built into the software to support a presumptive feature, it does not apply to effort to make the software easier to modify."</a:t>
-            </a:r>
-            <a:r>
-              <a:rPr sz="1000" b="0">
-                <a:solidFill>
-                  <a:srgbClr val="000000"/>
-                </a:solidFill>
-                <a:latin typeface="맑은 고딕"/>
-                <a:ea typeface="맑은 고딕"/>
-              </a:rPr>
-              <a:t>, </a:t>
-            </a:r>
-            <a:r>
-              <a:rPr sz="1000" b="0">
-                <a:solidFill>
-                  <a:srgbClr val="000000"/>
-                </a:solidFill>
-                <a:latin typeface="맑은 고딕"/>
-                <a:ea typeface="맑은 고딕"/>
-              </a:rPr>
-              <a:t>[Fowler 2015a]</a:t>
+              <a:t>"Yagni only applies to capabilities built into the software to support a presumptive feature, it does not apply to effort to make the software easier to modify.", [Fowler 2015a]</a:t>
             </a:r>
           </a:p>
         </p:txBody>
@@ -24772,7 +24542,7 @@
                 <a:latin typeface="맑은 고딕"/>
                 <a:ea typeface="맑은 고딕"/>
               </a:rPr>
-              <a:t>"특정한 맥락의 </a:t>
+              <a:t>특정한 맥락의 </a:t>
             </a:r>
             <a:r>
               <a:rPr sz="1800" b="1">
@@ -24792,7 +24562,7 @@
                 <a:latin typeface="맑은 고딕"/>
                 <a:ea typeface="맑은 고딕"/>
               </a:rPr>
-              <a:t>를 풀도록 맞춘, 소통하는 객체와 클래스의 기술"</a:t>
+              <a:t>를 풀도록 맞춘</a:t>
             </a:r>
             <a:r>
               <a:rPr sz="1000" b="0">
@@ -24812,27 +24582,7 @@
                 <a:latin typeface="맑은 고딕"/>
                 <a:ea typeface="맑은 고딕"/>
               </a:rPr>
-              <a:t>"descriptions of communicating objects and classes that are customized to solve a general design problem in a particular context."</a:t>
-            </a:r>
-            <a:r>
-              <a:rPr sz="1000" b="0">
-                <a:solidFill>
-                  <a:srgbClr val="000000"/>
-                </a:solidFill>
-                <a:latin typeface="맑은 고딕"/>
-                <a:ea typeface="맑은 고딕"/>
-              </a:rPr>
-              <a:t>, </a:t>
-            </a:r>
-            <a:r>
-              <a:rPr sz="1000" b="0">
-                <a:solidFill>
-                  <a:srgbClr val="000000"/>
-                </a:solidFill>
-                <a:latin typeface="맑은 고딕"/>
-                <a:ea typeface="맑은 고딕"/>
-              </a:rPr>
-              <a:t>[Gamma 외 1994, 재인용]</a:t>
+              <a:t>소통하는 객체와 클래스의 기술, "descriptions of communicating objects and classes that are customized to solve a general design problem in a particular context.", [Gamma 외 1994, 재인용]</a:t>
             </a:r>
           </a:p>
         </p:txBody>
@@ -30519,7 +30269,7 @@
                 <a:latin typeface="맑은 고딕"/>
                 <a:ea typeface="맑은 고딕"/>
               </a:rPr>
-              <a:t>"진화 지점에 보호를 설계하는 비용이 단순한 설계를 </a:t>
+              <a:t>진화 지점에 보호를 설계하는 비용이 단순한 설계를 </a:t>
             </a:r>
             <a:r>
               <a:rPr sz="1800" b="1">
@@ -30539,7 +30289,7 @@
                 <a:latin typeface="맑은 고딕"/>
                 <a:ea typeface="맑은 고딕"/>
               </a:rPr>
-              <a:t> 수 있다"</a:t>
+              <a:t> 수 있다</a:t>
             </a:r>
             <a:r>
               <a:rPr sz="1000" b="0">
@@ -30559,27 +30309,7 @@
                 <a:latin typeface="맑은 고딕"/>
                 <a:ea typeface="맑은 고딕"/>
               </a:rPr>
-              <a:t>"the cost of engineering protection at evolution points can be higher than reworking a simple design."</a:t>
-            </a:r>
-            <a:r>
-              <a:rPr sz="1000" b="0">
-                <a:solidFill>
-                  <a:srgbClr val="000000"/>
-                </a:solidFill>
-                <a:latin typeface="맑은 고딕"/>
-                <a:ea typeface="맑은 고딕"/>
-              </a:rPr>
-              <a:t>, </a:t>
-            </a:r>
-            <a:r>
-              <a:rPr sz="1000" b="0">
-                <a:solidFill>
-                  <a:srgbClr val="000000"/>
-                </a:solidFill>
-                <a:latin typeface="맑은 고딕"/>
-                <a:ea typeface="맑은 고딕"/>
-              </a:rPr>
-              <a:t>[Larman 2004]</a:t>
+              <a:t>"the cost of engineering protection at evolution points can be higher than reworking a simple design.", [Larman 2004]</a:t>
             </a:r>
           </a:p>
         </p:txBody>
@@ -33916,8 +33646,8 @@
         </p:blipFill>
         <p:spPr>
           <a:xfrm>
-            <a:off x="1460500" y="2514600"/>
-            <a:ext cx="6223000" cy="801688"/>
+            <a:off x="1280160" y="2514600"/>
+            <a:ext cx="6583680" cy="848153"/>
           </a:xfrm>
           <a:prstGeom prst="rect">
             <a:avLst/>
@@ -39426,7 +39156,7 @@
                 <a:latin typeface="맑은 고딕"/>
                 <a:ea typeface="맑은 고딕"/>
               </a:rPr>
-              <a:t>"전문 설계자는 통찰로 고른다. 변경 비용과 그 </a:t>
+              <a:t>전문 설계자는 통찰로 고른다. 변경 비용과 그 </a:t>
             </a:r>
             <a:r>
               <a:rPr sz="1800" b="1">
@@ -39446,7 +39176,7 @@
                 <a:latin typeface="맑은 고딕"/>
                 <a:ea typeface="맑은 고딕"/>
               </a:rPr>
-              <a:t> 단순하고 깨지기 쉬운 설계를 택하기도 한다"</a:t>
+              <a:t> 단순하고 깨지기 쉬운 설계를 택하기도 한다</a:t>
             </a:r>
             <a:r>
               <a:rPr sz="1000" b="0">
@@ -39466,27 +39196,7 @@
                 <a:latin typeface="맑은 고딕"/>
                 <a:ea typeface="맑은 고딕"/>
               </a:rPr>
-              <a:t>"Expert designers choose with insight; perhaps a simple and brittle design whose cost of change is balanced against its likelihood."</a:t>
-            </a:r>
-            <a:r>
-              <a:rPr sz="1000" b="0">
-                <a:solidFill>
-                  <a:srgbClr val="000000"/>
-                </a:solidFill>
-                <a:latin typeface="맑은 고딕"/>
-                <a:ea typeface="맑은 고딕"/>
-              </a:rPr>
-              <a:t>, </a:t>
-            </a:r>
-            <a:r>
-              <a:rPr sz="1000" b="0">
-                <a:solidFill>
-                  <a:srgbClr val="000000"/>
-                </a:solidFill>
-                <a:latin typeface="맑은 고딕"/>
-                <a:ea typeface="맑은 고딕"/>
-              </a:rPr>
-              <a:t>[Larman 2004]</a:t>
+              <a:t>"Expert designers choose with insight; perhaps a simple and brittle design whose cost of change is balanced against its likelihood.", [Larman 2004]</a:t>
             </a:r>
           </a:p>
           <a:p>
@@ -42113,7 +41823,7 @@
                 <a:latin typeface="맑은 고딕"/>
                 <a:ea typeface="맑은 고딕"/>
               </a:rPr>
-              <a:t>"경직성은 단순한 변경조차 어려운 성질이다. </a:t>
+              <a:t>경직성은 단순한 변경조차 어려운 성질이다. </a:t>
             </a:r>
             <a:r>
               <a:rPr sz="1800" b="1">
@@ -42133,7 +41843,7 @@
                 <a:latin typeface="맑은 고딕"/>
                 <a:ea typeface="맑은 고딕"/>
               </a:rPr>
-              <a:t>를 일으킨다"</a:t>
+              <a:t>를 일으킨다</a:t>
             </a:r>
             <a:r>
               <a:rPr sz="1000" b="0">
@@ -42153,27 +41863,7 @@
                 <a:latin typeface="맑은 고딕"/>
                 <a:ea typeface="맑은 고딕"/>
               </a:rPr>
-              <a:t>"Rigidity is the tendency for software to be difficult to change, even in simple ways. Every change causes a cascade of subsequent changes in dependent modules."</a:t>
-            </a:r>
-            <a:r>
-              <a:rPr sz="1000" b="0">
-                <a:solidFill>
-                  <a:srgbClr val="000000"/>
-                </a:solidFill>
-                <a:latin typeface="맑은 고딕"/>
-                <a:ea typeface="맑은 고딕"/>
-              </a:rPr>
-              <a:t>, </a:t>
-            </a:r>
-            <a:r>
-              <a:rPr sz="1000" b="0">
-                <a:solidFill>
-                  <a:srgbClr val="000000"/>
-                </a:solidFill>
-                <a:latin typeface="맑은 고딕"/>
-                <a:ea typeface="맑은 고딕"/>
-              </a:rPr>
-              <a:t>[Martin 2000]</a:t>
+              <a:t>"Rigidity is the tendency for software to be difficult to change, even in simple ways. Every change causes a cascade of subsequent changes in dependent modules.", [Martin 2000]</a:t>
             </a:r>
           </a:p>
           <a:p>

--- a/courses/ooad/sessions/s08.pptx
+++ b/courses/ooad/sessions/s08.pptx
@@ -9348,7 +9348,27 @@
                 <a:latin typeface="맑은 고딕"/>
                 <a:ea typeface="맑은 고딕"/>
               </a:rPr>
-              <a:t>"variation point—Variations in the existing, current system or requirements", [Larman 2004]</a:t>
+              <a:t>"variation point—Variations in the existing, current system or requirements"</a:t>
+            </a:r>
+            <a:r>
+              <a:rPr sz="1000" b="0">
+                <a:solidFill>
+                  <a:srgbClr val="000000"/>
+                </a:solidFill>
+                <a:latin typeface="맑은 고딕"/>
+                <a:ea typeface="맑은 고딕"/>
+              </a:rPr>
+              <a:t>, </a:t>
+            </a:r>
+            <a:r>
+              <a:rPr sz="1000" b="0">
+                <a:solidFill>
+                  <a:srgbClr val="000000"/>
+                </a:solidFill>
+                <a:latin typeface="맑은 고딕"/>
+                <a:ea typeface="맑은 고딕"/>
+              </a:rPr>
+              <a:t>[Larman 2004]</a:t>
             </a:r>
           </a:p>
           <a:p>
@@ -9411,7 +9431,27 @@
                 <a:latin typeface="맑은 고딕"/>
                 <a:ea typeface="맑은 고딕"/>
               </a:rPr>
-              <a:t>"evolution point—Speculative points of variation that may arise in the future, but which are not present in the existing requirements.", [Larman 2004]</a:t>
+              <a:t>"evolution point—Speculative points of variation that may arise in the future, but which are not present in the existing requirements."</a:t>
+            </a:r>
+            <a:r>
+              <a:rPr sz="1000" b="0">
+                <a:solidFill>
+                  <a:srgbClr val="000000"/>
+                </a:solidFill>
+                <a:latin typeface="맑은 고딕"/>
+                <a:ea typeface="맑은 고딕"/>
+              </a:rPr>
+              <a:t>, </a:t>
+            </a:r>
+            <a:r>
+              <a:rPr sz="1000" b="0">
+                <a:solidFill>
+                  <a:srgbClr val="000000"/>
+                </a:solidFill>
+                <a:latin typeface="맑은 고딕"/>
+                <a:ea typeface="맑은 고딕"/>
+              </a:rPr>
+              <a:t>[Larman 2004]</a:t>
             </a:r>
           </a:p>
         </p:txBody>
@@ -12758,7 +12798,27 @@
                 <a:latin typeface="맑은 고딕"/>
                 <a:ea typeface="맑은 고딕"/>
               </a:rPr>
-              <a:t>"A module should be open for extension but closed for modification.", [Martin 2000]</a:t>
+              <a:t>"A module should be open for extension but closed for modification."</a:t>
+            </a:r>
+            <a:r>
+              <a:rPr sz="1000" b="0">
+                <a:solidFill>
+                  <a:srgbClr val="000000"/>
+                </a:solidFill>
+                <a:latin typeface="맑은 고딕"/>
+                <a:ea typeface="맑은 고딕"/>
+              </a:rPr>
+              <a:t>, </a:t>
+            </a:r>
+            <a:r>
+              <a:rPr sz="1000" b="0">
+                <a:solidFill>
+                  <a:srgbClr val="000000"/>
+                </a:solidFill>
+                <a:latin typeface="맑은 고딕"/>
+                <a:ea typeface="맑은 고딕"/>
+              </a:rPr>
+              <a:t>[Martin 2000]</a:t>
             </a:r>
           </a:p>
           <a:p>
@@ -13930,7 +13990,27 @@
                 <a:latin typeface="맑은 고딕"/>
                 <a:ea typeface="맑은 고딕"/>
               </a:rPr>
-              <a:t>"OCP and PV are essentially two expressions of the same principle, with different emphasis: protection at variation and evolution points.", [Larman 2004]</a:t>
+              <a:t>"OCP and PV are essentially two expressions of the same principle, with different emphasis: protection at variation and evolution points."</a:t>
+            </a:r>
+            <a:r>
+              <a:rPr sz="1000" b="0">
+                <a:solidFill>
+                  <a:srgbClr val="000000"/>
+                </a:solidFill>
+                <a:latin typeface="맑은 고딕"/>
+                <a:ea typeface="맑은 고딕"/>
+              </a:rPr>
+              <a:t>, </a:t>
+            </a:r>
+            <a:r>
+              <a:rPr sz="1000" b="0">
+                <a:solidFill>
+                  <a:srgbClr val="000000"/>
+                </a:solidFill>
+                <a:latin typeface="맑은 고딕"/>
+                <a:ea typeface="맑은 고딕"/>
+              </a:rPr>
+              <a:t>[Larman 2004]</a:t>
             </a:r>
           </a:p>
         </p:txBody>
@@ -15229,7 +15309,27 @@
                 <a:latin typeface="맑은 고딕"/>
                 <a:ea typeface="맑은 고딕"/>
               </a:rPr>
-              <a:t>"Identify points of predicted variation or instability; assign responsibilities to create a stable interface around them.", [Larman 2004]</a:t>
+              <a:t>"Identify points of predicted variation or instability; assign responsibilities to create a stable interface around them."</a:t>
+            </a:r>
+            <a:r>
+              <a:rPr sz="1000" b="0">
+                <a:solidFill>
+                  <a:srgbClr val="000000"/>
+                </a:solidFill>
+                <a:latin typeface="맑은 고딕"/>
+                <a:ea typeface="맑은 고딕"/>
+              </a:rPr>
+              <a:t>, </a:t>
+            </a:r>
+            <a:r>
+              <a:rPr sz="1000" b="0">
+                <a:solidFill>
+                  <a:srgbClr val="000000"/>
+                </a:solidFill>
+                <a:latin typeface="맑은 고딕"/>
+                <a:ea typeface="맑은 고딕"/>
+              </a:rPr>
+              <a:t>[Larman 2004]</a:t>
             </a:r>
           </a:p>
         </p:txBody>
@@ -15615,7 +15715,27 @@
                 <a:latin typeface="맑은 고딕"/>
                 <a:ea typeface="맑은 고딕"/>
               </a:rPr>
-              <a:t>"Once you depend on interfaces only, you're decoupled from the implementation. That means the implementation can vary, and that's a healthy dependency relationship.", [Gamma 2005]</a:t>
+              <a:t>"Once you depend on interfaces only, you're decoupled from the implementation. That means the implementation can vary, and that's a healthy dependency relationship."</a:t>
+            </a:r>
+            <a:r>
+              <a:rPr sz="1000" b="0">
+                <a:solidFill>
+                  <a:srgbClr val="000000"/>
+                </a:solidFill>
+                <a:latin typeface="맑은 고딕"/>
+                <a:ea typeface="맑은 고딕"/>
+              </a:rPr>
+              <a:t>, </a:t>
+            </a:r>
+            <a:r>
+              <a:rPr sz="1000" b="0">
+                <a:solidFill>
+                  <a:srgbClr val="000000"/>
+                </a:solidFill>
+                <a:latin typeface="맑은 고딕"/>
+                <a:ea typeface="맑은 고딕"/>
+              </a:rPr>
+              <a:t>[Gamma 2005]</a:t>
             </a:r>
           </a:p>
           <a:p>
@@ -16436,7 +16556,27 @@
                 <a:latin typeface="맑은 고딕"/>
                 <a:ea typeface="맑은 고딕"/>
               </a:rPr>
-              <a:t>"When related alternatives or behaviors vary by type (class), assign responsibility for the behavior—using polymorphic operations—to the types for which the behavior varies.", [Larman 2004]</a:t>
+              <a:t>"When related alternatives or behaviors vary by type (class), assign responsibility for the behavior—using polymorphic operations—to the types for which the behavior varies."</a:t>
+            </a:r>
+            <a:r>
+              <a:rPr sz="1000" b="0">
+                <a:solidFill>
+                  <a:srgbClr val="000000"/>
+                </a:solidFill>
+                <a:latin typeface="맑은 고딕"/>
+                <a:ea typeface="맑은 고딕"/>
+              </a:rPr>
+              <a:t>, </a:t>
+            </a:r>
+            <a:r>
+              <a:rPr sz="1000" b="0">
+                <a:solidFill>
+                  <a:srgbClr val="000000"/>
+                </a:solidFill>
+                <a:latin typeface="맑은 고딕"/>
+                <a:ea typeface="맑은 고딕"/>
+              </a:rPr>
+              <a:t>[Larman 2004]</a:t>
             </a:r>
           </a:p>
         </p:txBody>
@@ -17763,7 +17903,27 @@
                 <a:latin typeface="맑은 고딕"/>
                 <a:ea typeface="맑은 고딕"/>
               </a:rPr>
-              <a:t>"Assign the responsibility to an intermediate object to mediate between other components or services so that they are not directly coupled.", [Larman 2004]</a:t>
+              <a:t>"Assign the responsibility to an intermediate object to mediate between other components or services so that they are not directly coupled."</a:t>
+            </a:r>
+            <a:r>
+              <a:rPr sz="1000" b="0">
+                <a:solidFill>
+                  <a:srgbClr val="000000"/>
+                </a:solidFill>
+                <a:latin typeface="맑은 고딕"/>
+                <a:ea typeface="맑은 고딕"/>
+              </a:rPr>
+              <a:t>, </a:t>
+            </a:r>
+            <a:r>
+              <a:rPr sz="1000" b="0">
+                <a:solidFill>
+                  <a:srgbClr val="000000"/>
+                </a:solidFill>
+                <a:latin typeface="맑은 고딕"/>
+                <a:ea typeface="맑은 고딕"/>
+              </a:rPr>
+              <a:t>[Larman 2004]</a:t>
             </a:r>
           </a:p>
         </p:txBody>
@@ -18864,7 +19024,27 @@
                 <a:latin typeface="맑은 고딕"/>
                 <a:ea typeface="맑은 고딕"/>
               </a:rPr>
-              <a:t>"Composition has a nicer property. The coupling is reduced by just having some smaller things you plug into something bigger.", [Gamma 2005]</a:t>
+              <a:t>"Composition has a nicer property. The coupling is reduced by just having some smaller things you plug into something bigger."</a:t>
+            </a:r>
+            <a:r>
+              <a:rPr sz="1000" b="0">
+                <a:solidFill>
+                  <a:srgbClr val="000000"/>
+                </a:solidFill>
+                <a:latin typeface="맑은 고딕"/>
+                <a:ea typeface="맑은 고딕"/>
+              </a:rPr>
+              <a:t>, </a:t>
+            </a:r>
+            <a:r>
+              <a:rPr sz="1000" b="0">
+                <a:solidFill>
+                  <a:srgbClr val="000000"/>
+                </a:solidFill>
+                <a:latin typeface="맑은 고딕"/>
+                <a:ea typeface="맑은 고딕"/>
+              </a:rPr>
+              <a:t>[Gamma 2005]</a:t>
             </a:r>
           </a:p>
         </p:txBody>
@@ -22569,7 +22749,7 @@
                 <a:latin typeface="맑은 고딕"/>
                 <a:ea typeface="맑은 고딕"/>
               </a:rPr>
-              <a:t> 만들고</a:t>
+              <a:t> 만들고, 그다음 쉬운 변경을 하라</a:t>
             </a:r>
             <a:r>
               <a:rPr sz="1000" b="0">
@@ -22589,7 +22769,27 @@
                 <a:latin typeface="맑은 고딕"/>
                 <a:ea typeface="맑은 고딕"/>
               </a:rPr>
-              <a:t>그다음 쉬운 변경을 하라, "make the change easy, then make the easy change", [Beck 2012, 재인용]</a:t>
+              <a:t>"make the change easy, then make the easy change"</a:t>
+            </a:r>
+            <a:r>
+              <a:rPr sz="1000" b="0">
+                <a:solidFill>
+                  <a:srgbClr val="000000"/>
+                </a:solidFill>
+                <a:latin typeface="맑은 고딕"/>
+                <a:ea typeface="맑은 고딕"/>
+              </a:rPr>
+              <a:t>, </a:t>
+            </a:r>
+            <a:r>
+              <a:rPr sz="1000" b="0">
+                <a:solidFill>
+                  <a:srgbClr val="000000"/>
+                </a:solidFill>
+                <a:latin typeface="맑은 고딕"/>
+                <a:ea typeface="맑은 고딕"/>
+              </a:rPr>
+              <a:t>[Beck 2012, 재인용]</a:t>
             </a:r>
           </a:p>
         </p:txBody>
@@ -23481,7 +23681,27 @@
                 <a:latin typeface="맑은 고딕"/>
                 <a:ea typeface="맑은 고딕"/>
               </a:rPr>
-              <a:t>"Yagni only applies to capabilities built into the software to support a presumptive feature, it does not apply to effort to make the software easier to modify.", [Fowler 2015a]</a:t>
+              <a:t>"Yagni only applies to capabilities built into the software to support a presumptive feature, it does not apply to effort to make the software easier to modify."</a:t>
+            </a:r>
+            <a:r>
+              <a:rPr sz="1000" b="0">
+                <a:solidFill>
+                  <a:srgbClr val="000000"/>
+                </a:solidFill>
+                <a:latin typeface="맑은 고딕"/>
+                <a:ea typeface="맑은 고딕"/>
+              </a:rPr>
+              <a:t>, </a:t>
+            </a:r>
+            <a:r>
+              <a:rPr sz="1000" b="0">
+                <a:solidFill>
+                  <a:srgbClr val="000000"/>
+                </a:solidFill>
+                <a:latin typeface="맑은 고딕"/>
+                <a:ea typeface="맑은 고딕"/>
+              </a:rPr>
+              <a:t>[Fowler 2015a]</a:t>
             </a:r>
           </a:p>
         </p:txBody>
@@ -24562,7 +24782,7 @@
                 <a:latin typeface="맑은 고딕"/>
                 <a:ea typeface="맑은 고딕"/>
               </a:rPr>
-              <a:t>를 풀도록 맞춘</a:t>
+              <a:t>를 풀도록 맞춘, 소통하는 객체와 클래스의 기술</a:t>
             </a:r>
             <a:r>
               <a:rPr sz="1000" b="0">
@@ -24582,7 +24802,27 @@
                 <a:latin typeface="맑은 고딕"/>
                 <a:ea typeface="맑은 고딕"/>
               </a:rPr>
-              <a:t>소통하는 객체와 클래스의 기술, "descriptions of communicating objects and classes that are customized to solve a general design problem in a particular context.", [Gamma 외 1994, 재인용]</a:t>
+              <a:t>"descriptions of communicating objects and classes that are customized to solve a general design problem in a particular context."</a:t>
+            </a:r>
+            <a:r>
+              <a:rPr sz="1000" b="0">
+                <a:solidFill>
+                  <a:srgbClr val="000000"/>
+                </a:solidFill>
+                <a:latin typeface="맑은 고딕"/>
+                <a:ea typeface="맑은 고딕"/>
+              </a:rPr>
+              <a:t>, </a:t>
+            </a:r>
+            <a:r>
+              <a:rPr sz="1000" b="0">
+                <a:solidFill>
+                  <a:srgbClr val="000000"/>
+                </a:solidFill>
+                <a:latin typeface="맑은 고딕"/>
+                <a:ea typeface="맑은 고딕"/>
+              </a:rPr>
+              <a:t>[Gamma 외 1994, 재인용]</a:t>
             </a:r>
           </a:p>
         </p:txBody>
@@ -30309,7 +30549,27 @@
                 <a:latin typeface="맑은 고딕"/>
                 <a:ea typeface="맑은 고딕"/>
               </a:rPr>
-              <a:t>"the cost of engineering protection at evolution points can be higher than reworking a simple design.", [Larman 2004]</a:t>
+              <a:t>"the cost of engineering protection at evolution points can be higher than reworking a simple design."</a:t>
+            </a:r>
+            <a:r>
+              <a:rPr sz="1000" b="0">
+                <a:solidFill>
+                  <a:srgbClr val="000000"/>
+                </a:solidFill>
+                <a:latin typeface="맑은 고딕"/>
+                <a:ea typeface="맑은 고딕"/>
+              </a:rPr>
+              <a:t>, </a:t>
+            </a:r>
+            <a:r>
+              <a:rPr sz="1000" b="0">
+                <a:solidFill>
+                  <a:srgbClr val="000000"/>
+                </a:solidFill>
+                <a:latin typeface="맑은 고딕"/>
+                <a:ea typeface="맑은 고딕"/>
+              </a:rPr>
+              <a:t>[Larman 2004]</a:t>
             </a:r>
           </a:p>
         </p:txBody>
@@ -39196,7 +39456,27 @@
                 <a:latin typeface="맑은 고딕"/>
                 <a:ea typeface="맑은 고딕"/>
               </a:rPr>
-              <a:t>"Expert designers choose with insight; perhaps a simple and brittle design whose cost of change is balanced against its likelihood.", [Larman 2004]</a:t>
+              <a:t>"Expert designers choose with insight; perhaps a simple and brittle design whose cost of change is balanced against its likelihood."</a:t>
+            </a:r>
+            <a:r>
+              <a:rPr sz="1000" b="0">
+                <a:solidFill>
+                  <a:srgbClr val="000000"/>
+                </a:solidFill>
+                <a:latin typeface="맑은 고딕"/>
+                <a:ea typeface="맑은 고딕"/>
+              </a:rPr>
+              <a:t>, </a:t>
+            </a:r>
+            <a:r>
+              <a:rPr sz="1000" b="0">
+                <a:solidFill>
+                  <a:srgbClr val="000000"/>
+                </a:solidFill>
+                <a:latin typeface="맑은 고딕"/>
+                <a:ea typeface="맑은 고딕"/>
+              </a:rPr>
+              <a:t>[Larman 2004]</a:t>
             </a:r>
           </a:p>
           <a:p>
@@ -41863,7 +42143,27 @@
                 <a:latin typeface="맑은 고딕"/>
                 <a:ea typeface="맑은 고딕"/>
               </a:rPr>
-              <a:t>"Rigidity is the tendency for software to be difficult to change, even in simple ways. Every change causes a cascade of subsequent changes in dependent modules.", [Martin 2000]</a:t>
+              <a:t>"Rigidity is the tendency for software to be difficult to change, even in simple ways. Every change causes a cascade of subsequent changes in dependent modules."</a:t>
+            </a:r>
+            <a:r>
+              <a:rPr sz="1000" b="0">
+                <a:solidFill>
+                  <a:srgbClr val="000000"/>
+                </a:solidFill>
+                <a:latin typeface="맑은 고딕"/>
+                <a:ea typeface="맑은 고딕"/>
+              </a:rPr>
+              <a:t>, </a:t>
+            </a:r>
+            <a:r>
+              <a:rPr sz="1000" b="0">
+                <a:solidFill>
+                  <a:srgbClr val="000000"/>
+                </a:solidFill>
+                <a:latin typeface="맑은 고딕"/>
+                <a:ea typeface="맑은 고딕"/>
+              </a:rPr>
+              <a:t>[Martin 2000]</a:t>
             </a:r>
           </a:p>
           <a:p>
